--- a/exam/exam-02/Exam2_Jeopardy.pptx
+++ b/exam/exam-02/Exam2_Jeopardy.pptx
@@ -6,77 +6,78 @@
   </p:sldMasterIdLst>
   <p:sldIdLst>
     <p:sldId id="256" r:id="rId2"/>
-    <p:sldId id="328" r:id="rId3"/>
-    <p:sldId id="329" r:id="rId4"/>
-    <p:sldId id="322" r:id="rId5"/>
-    <p:sldId id="323" r:id="rId6"/>
-    <p:sldId id="331" r:id="rId7"/>
-    <p:sldId id="257" r:id="rId8"/>
-    <p:sldId id="258" r:id="rId9"/>
-    <p:sldId id="259" r:id="rId10"/>
-    <p:sldId id="260" r:id="rId11"/>
-    <p:sldId id="261" r:id="rId12"/>
-    <p:sldId id="262" r:id="rId13"/>
-    <p:sldId id="263" r:id="rId14"/>
-    <p:sldId id="264" r:id="rId15"/>
-    <p:sldId id="265" r:id="rId16"/>
-    <p:sldId id="266" r:id="rId17"/>
-    <p:sldId id="267" r:id="rId18"/>
-    <p:sldId id="268" r:id="rId19"/>
-    <p:sldId id="269" r:id="rId20"/>
-    <p:sldId id="270" r:id="rId21"/>
-    <p:sldId id="271" r:id="rId22"/>
-    <p:sldId id="272" r:id="rId23"/>
-    <p:sldId id="273" r:id="rId24"/>
-    <p:sldId id="274" r:id="rId25"/>
-    <p:sldId id="275" r:id="rId26"/>
-    <p:sldId id="276" r:id="rId27"/>
-    <p:sldId id="277" r:id="rId28"/>
-    <p:sldId id="321" r:id="rId29"/>
-    <p:sldId id="279" r:id="rId30"/>
-    <p:sldId id="320" r:id="rId31"/>
-    <p:sldId id="281" r:id="rId32"/>
-    <p:sldId id="319" r:id="rId33"/>
-    <p:sldId id="283" r:id="rId34"/>
-    <p:sldId id="318" r:id="rId35"/>
-    <p:sldId id="285" r:id="rId36"/>
-    <p:sldId id="286" r:id="rId37"/>
-    <p:sldId id="287" r:id="rId38"/>
-    <p:sldId id="288" r:id="rId39"/>
-    <p:sldId id="289" r:id="rId40"/>
-    <p:sldId id="290" r:id="rId41"/>
-    <p:sldId id="291" r:id="rId42"/>
-    <p:sldId id="292" r:id="rId43"/>
-    <p:sldId id="293" r:id="rId44"/>
-    <p:sldId id="294" r:id="rId45"/>
-    <p:sldId id="295" r:id="rId46"/>
-    <p:sldId id="296" r:id="rId47"/>
-    <p:sldId id="297" r:id="rId48"/>
-    <p:sldId id="298" r:id="rId49"/>
-    <p:sldId id="299" r:id="rId50"/>
-    <p:sldId id="300" r:id="rId51"/>
-    <p:sldId id="301" r:id="rId52"/>
-    <p:sldId id="302" r:id="rId53"/>
-    <p:sldId id="303" r:id="rId54"/>
-    <p:sldId id="304" r:id="rId55"/>
-    <p:sldId id="305" r:id="rId56"/>
-    <p:sldId id="306" r:id="rId57"/>
-    <p:sldId id="307" r:id="rId58"/>
-    <p:sldId id="308" r:id="rId59"/>
-    <p:sldId id="309" r:id="rId60"/>
-    <p:sldId id="310" r:id="rId61"/>
-    <p:sldId id="311" r:id="rId62"/>
-    <p:sldId id="312" r:id="rId63"/>
-    <p:sldId id="313" r:id="rId64"/>
-    <p:sldId id="314" r:id="rId65"/>
-    <p:sldId id="315" r:id="rId66"/>
-    <p:sldId id="316" r:id="rId67"/>
-    <p:sldId id="317" r:id="rId68"/>
-    <p:sldId id="324" r:id="rId69"/>
-    <p:sldId id="325" r:id="rId70"/>
-    <p:sldId id="327" r:id="rId71"/>
-    <p:sldId id="330" r:id="rId72"/>
-    <p:sldId id="326" r:id="rId73"/>
+    <p:sldId id="332" r:id="rId3"/>
+    <p:sldId id="328" r:id="rId4"/>
+    <p:sldId id="329" r:id="rId5"/>
+    <p:sldId id="322" r:id="rId6"/>
+    <p:sldId id="323" r:id="rId7"/>
+    <p:sldId id="331" r:id="rId8"/>
+    <p:sldId id="257" r:id="rId9"/>
+    <p:sldId id="258" r:id="rId10"/>
+    <p:sldId id="259" r:id="rId11"/>
+    <p:sldId id="260" r:id="rId12"/>
+    <p:sldId id="261" r:id="rId13"/>
+    <p:sldId id="262" r:id="rId14"/>
+    <p:sldId id="263" r:id="rId15"/>
+    <p:sldId id="264" r:id="rId16"/>
+    <p:sldId id="265" r:id="rId17"/>
+    <p:sldId id="266" r:id="rId18"/>
+    <p:sldId id="267" r:id="rId19"/>
+    <p:sldId id="268" r:id="rId20"/>
+    <p:sldId id="269" r:id="rId21"/>
+    <p:sldId id="270" r:id="rId22"/>
+    <p:sldId id="271" r:id="rId23"/>
+    <p:sldId id="272" r:id="rId24"/>
+    <p:sldId id="273" r:id="rId25"/>
+    <p:sldId id="274" r:id="rId26"/>
+    <p:sldId id="275" r:id="rId27"/>
+    <p:sldId id="276" r:id="rId28"/>
+    <p:sldId id="277" r:id="rId29"/>
+    <p:sldId id="321" r:id="rId30"/>
+    <p:sldId id="279" r:id="rId31"/>
+    <p:sldId id="320" r:id="rId32"/>
+    <p:sldId id="281" r:id="rId33"/>
+    <p:sldId id="319" r:id="rId34"/>
+    <p:sldId id="283" r:id="rId35"/>
+    <p:sldId id="318" r:id="rId36"/>
+    <p:sldId id="285" r:id="rId37"/>
+    <p:sldId id="286" r:id="rId38"/>
+    <p:sldId id="287" r:id="rId39"/>
+    <p:sldId id="288" r:id="rId40"/>
+    <p:sldId id="289" r:id="rId41"/>
+    <p:sldId id="290" r:id="rId42"/>
+    <p:sldId id="291" r:id="rId43"/>
+    <p:sldId id="292" r:id="rId44"/>
+    <p:sldId id="293" r:id="rId45"/>
+    <p:sldId id="294" r:id="rId46"/>
+    <p:sldId id="295" r:id="rId47"/>
+    <p:sldId id="296" r:id="rId48"/>
+    <p:sldId id="297" r:id="rId49"/>
+    <p:sldId id="298" r:id="rId50"/>
+    <p:sldId id="299" r:id="rId51"/>
+    <p:sldId id="300" r:id="rId52"/>
+    <p:sldId id="301" r:id="rId53"/>
+    <p:sldId id="302" r:id="rId54"/>
+    <p:sldId id="303" r:id="rId55"/>
+    <p:sldId id="304" r:id="rId56"/>
+    <p:sldId id="305" r:id="rId57"/>
+    <p:sldId id="306" r:id="rId58"/>
+    <p:sldId id="307" r:id="rId59"/>
+    <p:sldId id="308" r:id="rId60"/>
+    <p:sldId id="309" r:id="rId61"/>
+    <p:sldId id="310" r:id="rId62"/>
+    <p:sldId id="311" r:id="rId63"/>
+    <p:sldId id="312" r:id="rId64"/>
+    <p:sldId id="313" r:id="rId65"/>
+    <p:sldId id="314" r:id="rId66"/>
+    <p:sldId id="315" r:id="rId67"/>
+    <p:sldId id="316" r:id="rId68"/>
+    <p:sldId id="317" r:id="rId69"/>
+    <p:sldId id="324" r:id="rId70"/>
+    <p:sldId id="325" r:id="rId71"/>
+    <p:sldId id="327" r:id="rId72"/>
+    <p:sldId id="330" r:id="rId73"/>
+    <p:sldId id="326" r:id="rId74"/>
   </p:sldIdLst>
   <p:sldSz cx="12192000" cy="6858000"/>
   <p:notesSz cx="6858000" cy="9144000"/>
@@ -3484,6 +3485,108 @@
         <p:cNvPr id="1" name="">
           <a:extLst>
             <a:ext uri="{FF2B5EF4-FFF2-40B4-BE49-F238E27FC236}">
+              <a16:creationId xmlns:a16="http://schemas.microsoft.com/office/drawing/2014/main" id="{5F9D0B6F-51A1-0511-0E27-F06942A3EFC2}"/>
+            </a:ext>
+          </a:extLst>
+        </p:cNvPr>
+        <p:cNvGrpSpPr/>
+        <p:nvPr/>
+      </p:nvGrpSpPr>
+      <p:grpSpPr>
+        <a:xfrm>
+          <a:off x="0" y="0"/>
+          <a:ext cx="0" cy="0"/>
+          <a:chOff x="0" y="0"/>
+          <a:chExt cx="0" cy="0"/>
+        </a:xfrm>
+      </p:grpSpPr>
+      <p:sp>
+        <p:nvSpPr>
+          <p:cNvPr id="2" name="Title 1">
+            <a:extLst>
+              <a:ext uri="{FF2B5EF4-FFF2-40B4-BE49-F238E27FC236}">
+                <a16:creationId xmlns:a16="http://schemas.microsoft.com/office/drawing/2014/main" id="{1BA6AEAA-4681-C74B-8214-02F118E0AF56}"/>
+              </a:ext>
+            </a:extLst>
+          </p:cNvPr>
+          <p:cNvSpPr>
+            <a:spLocks noGrp="1"/>
+          </p:cNvSpPr>
+          <p:nvPr>
+            <p:ph type="title"/>
+          </p:nvPr>
+        </p:nvSpPr>
+        <p:spPr/>
+        <p:txBody>
+          <a:bodyPr/>
+          <a:lstStyle/>
+          <a:p>
+            <a:endParaRPr lang="en-US" dirty="0"/>
+          </a:p>
+        </p:txBody>
+      </p:sp>
+      <p:sp>
+        <p:nvSpPr>
+          <p:cNvPr id="3" name="Content Placeholder 2">
+            <a:extLst>
+              <a:ext uri="{FF2B5EF4-FFF2-40B4-BE49-F238E27FC236}">
+                <a16:creationId xmlns:a16="http://schemas.microsoft.com/office/drawing/2014/main" id="{29CA39D1-B7ED-B7FE-30F8-F246D7630AFF}"/>
+              </a:ext>
+            </a:extLst>
+          </p:cNvPr>
+          <p:cNvSpPr>
+            <a:spLocks noGrp="1"/>
+          </p:cNvSpPr>
+          <p:nvPr>
+            <p:ph idx="1"/>
+          </p:nvPr>
+        </p:nvSpPr>
+        <p:spPr/>
+        <p:txBody>
+          <a:bodyPr>
+            <a:normAutofit/>
+          </a:bodyPr>
+          <a:lstStyle/>
+          <a:p>
+            <a:pPr marL="0" indent="0" algn="ctr" fontAlgn="ctr">
+              <a:buNone/>
+            </a:pPr>
+            <a:r>
+              <a:rPr lang="en-US" sz="4400" b="1" dirty="0"/>
+              <a:t>What is </a:t>
+            </a:r>
+            <a:r>
+              <a:rPr lang="en-US" sz="4400" b="1" dirty="0" err="1"/>
+              <a:t>qnorm</a:t>
+            </a:r>
+            <a:r>
+              <a:rPr lang="en-US" sz="4400" b="1" dirty="0"/>
+              <a:t>()?</a:t>
+            </a:r>
+          </a:p>
+        </p:txBody>
+      </p:sp>
+    </p:spTree>
+    <p:extLst>
+      <p:ext uri="{BB962C8B-B14F-4D97-AF65-F5344CB8AC3E}">
+        <p14:creationId xmlns:p14="http://schemas.microsoft.com/office/powerpoint/2010/main" val="1893961312"/>
+      </p:ext>
+    </p:extLst>
+  </p:cSld>
+  <p:clrMapOvr>
+    <a:masterClrMapping/>
+  </p:clrMapOvr>
+</p:sld>
+</file>
+
+<file path=ppt/slides/slide11.xml><?xml version="1.0" encoding="utf-8"?>
+<p:sld xmlns:a="http://schemas.openxmlformats.org/drawingml/2006/main" xmlns:r="http://schemas.openxmlformats.org/officeDocument/2006/relationships" xmlns:p="http://schemas.openxmlformats.org/presentationml/2006/main">
+  <p:cSld>
+    <p:spTree>
+      <p:nvGrpSpPr>
+        <p:cNvPr id="1" name="">
+          <a:extLst>
+            <a:ext uri="{FF2B5EF4-FFF2-40B4-BE49-F238E27FC236}">
               <a16:creationId xmlns:a16="http://schemas.microsoft.com/office/drawing/2014/main" id="{4913456F-FB12-115F-EAF6-07348C7BA1BA}"/>
             </a:ext>
           </a:extLst>
@@ -3573,7 +3676,7 @@
 </p:sld>
 </file>
 
-<file path=ppt/slides/slide11.xml><?xml version="1.0" encoding="utf-8"?>
+<file path=ppt/slides/slide12.xml><?xml version="1.0" encoding="utf-8"?>
 <p:sld xmlns:a="http://schemas.openxmlformats.org/drawingml/2006/main" xmlns:r="http://schemas.openxmlformats.org/officeDocument/2006/relationships" xmlns:p="http://schemas.openxmlformats.org/presentationml/2006/main">
   <p:cSld>
     <p:spTree>
@@ -3675,7 +3778,7 @@
 </p:sld>
 </file>
 
-<file path=ppt/slides/slide12.xml><?xml version="1.0" encoding="utf-8"?>
+<file path=ppt/slides/slide13.xml><?xml version="1.0" encoding="utf-8"?>
 <p:sld xmlns:a="http://schemas.openxmlformats.org/drawingml/2006/main" xmlns:r="http://schemas.openxmlformats.org/officeDocument/2006/relationships" xmlns:p="http://schemas.openxmlformats.org/presentationml/2006/main">
   <p:cSld>
     <p:spTree>
@@ -3772,7 +3875,7 @@
 </p:sld>
 </file>
 
-<file path=ppt/slides/slide13.xml><?xml version="1.0" encoding="utf-8"?>
+<file path=ppt/slides/slide14.xml><?xml version="1.0" encoding="utf-8"?>
 <p:sld xmlns:a="http://schemas.openxmlformats.org/drawingml/2006/main" xmlns:r="http://schemas.openxmlformats.org/officeDocument/2006/relationships" xmlns:p="http://schemas.openxmlformats.org/presentationml/2006/main">
   <p:cSld>
     <p:spTree>
@@ -3874,7 +3977,7 @@
 </p:sld>
 </file>
 
-<file path=ppt/slides/slide14.xml><?xml version="1.0" encoding="utf-8"?>
+<file path=ppt/slides/slide15.xml><?xml version="1.0" encoding="utf-8"?>
 <p:sld xmlns:a="http://schemas.openxmlformats.org/drawingml/2006/main" xmlns:r="http://schemas.openxmlformats.org/officeDocument/2006/relationships" xmlns:p="http://schemas.openxmlformats.org/presentationml/2006/main">
   <p:cSld>
     <p:spTree>
@@ -3979,7 +4082,7 @@
 </p:sld>
 </file>
 
-<file path=ppt/slides/slide15.xml><?xml version="1.0" encoding="utf-8"?>
+<file path=ppt/slides/slide16.xml><?xml version="1.0" encoding="utf-8"?>
 <p:sld xmlns:a="http://schemas.openxmlformats.org/drawingml/2006/main" xmlns:r="http://schemas.openxmlformats.org/officeDocument/2006/relationships" xmlns:p="http://schemas.openxmlformats.org/presentationml/2006/main">
   <p:cSld>
     <p:spTree>
@@ -4081,7 +4184,7 @@
 </p:sld>
 </file>
 
-<file path=ppt/slides/slide16.xml><?xml version="1.0" encoding="utf-8"?>
+<file path=ppt/slides/slide17.xml><?xml version="1.0" encoding="utf-8"?>
 <p:sld xmlns:a="http://schemas.openxmlformats.org/drawingml/2006/main" xmlns:r="http://schemas.openxmlformats.org/officeDocument/2006/relationships" xmlns:p="http://schemas.openxmlformats.org/presentationml/2006/main">
   <p:cSld>
     <p:spTree>
@@ -4178,7 +4281,7 @@
 </p:sld>
 </file>
 
-<file path=ppt/slides/slide17.xml><?xml version="1.0" encoding="utf-8"?>
+<file path=ppt/slides/slide18.xml><?xml version="1.0" encoding="utf-8"?>
 <p:sld xmlns:a="http://schemas.openxmlformats.org/drawingml/2006/main" xmlns:r="http://schemas.openxmlformats.org/officeDocument/2006/relationships" xmlns:p="http://schemas.openxmlformats.org/presentationml/2006/main">
   <p:cSld>
     <p:spTree>
@@ -4280,7 +4383,7 @@
 </p:sld>
 </file>
 
-<file path=ppt/slides/slide18.xml><?xml version="1.0" encoding="utf-8"?>
+<file path=ppt/slides/slide19.xml><?xml version="1.0" encoding="utf-8"?>
 <p:sld xmlns:a="http://schemas.openxmlformats.org/drawingml/2006/main" xmlns:r="http://schemas.openxmlformats.org/officeDocument/2006/relationships" xmlns:p="http://schemas.openxmlformats.org/presentationml/2006/main">
   <p:cSld>
     <p:spTree>
@@ -4365,97 +4468,6 @@
     <p:extLst>
       <p:ext uri="{BB962C8B-B14F-4D97-AF65-F5344CB8AC3E}">
         <p14:creationId xmlns:p14="http://schemas.microsoft.com/office/powerpoint/2010/main" val="3220031732"/>
-      </p:ext>
-    </p:extLst>
-  </p:cSld>
-  <p:clrMapOvr>
-    <a:masterClrMapping/>
-  </p:clrMapOvr>
-</p:sld>
-</file>
-
-<file path=ppt/slides/slide19.xml><?xml version="1.0" encoding="utf-8"?>
-<p:sld xmlns:a="http://schemas.openxmlformats.org/drawingml/2006/main" xmlns:r="http://schemas.openxmlformats.org/officeDocument/2006/relationships" xmlns:p="http://schemas.openxmlformats.org/presentationml/2006/main">
-  <p:cSld>
-    <p:spTree>
-      <p:nvGrpSpPr>
-        <p:cNvPr id="1" name="">
-          <a:extLst>
-            <a:ext uri="{FF2B5EF4-FFF2-40B4-BE49-F238E27FC236}">
-              <a16:creationId xmlns:a16="http://schemas.microsoft.com/office/drawing/2014/main" id="{CCB53E84-0CD3-9E75-BF71-E1D4589E85C7}"/>
-            </a:ext>
-          </a:extLst>
-        </p:cNvPr>
-        <p:cNvGrpSpPr/>
-        <p:nvPr/>
-      </p:nvGrpSpPr>
-      <p:grpSpPr>
-        <a:xfrm>
-          <a:off x="0" y="0"/>
-          <a:ext cx="0" cy="0"/>
-          <a:chOff x="0" y="0"/>
-          <a:chExt cx="0" cy="0"/>
-        </a:xfrm>
-      </p:grpSpPr>
-      <p:sp>
-        <p:nvSpPr>
-          <p:cNvPr id="2" name="Title 1">
-            <a:extLst>
-              <a:ext uri="{FF2B5EF4-FFF2-40B4-BE49-F238E27FC236}">
-                <a16:creationId xmlns:a16="http://schemas.microsoft.com/office/drawing/2014/main" id="{D7E7045B-5173-6CB6-6AD8-C24E1BB0F6E4}"/>
-              </a:ext>
-            </a:extLst>
-          </p:cNvPr>
-          <p:cNvSpPr>
-            <a:spLocks noGrp="1"/>
-          </p:cNvSpPr>
-          <p:nvPr>
-            <p:ph type="title"/>
-          </p:nvPr>
-        </p:nvSpPr>
-        <p:spPr/>
-        <p:txBody>
-          <a:bodyPr/>
-          <a:lstStyle/>
-          <a:p>
-            <a:endParaRPr lang="en-US" dirty="0"/>
-          </a:p>
-        </p:txBody>
-      </p:sp>
-      <p:sp>
-        <p:nvSpPr>
-          <p:cNvPr id="3" name="Content Placeholder 2">
-            <a:extLst>
-              <a:ext uri="{FF2B5EF4-FFF2-40B4-BE49-F238E27FC236}">
-                <a16:creationId xmlns:a16="http://schemas.microsoft.com/office/drawing/2014/main" id="{F7BAE1EC-74AF-0E40-2B50-02AD1973DE41}"/>
-              </a:ext>
-            </a:extLst>
-          </p:cNvPr>
-          <p:cNvSpPr>
-            <a:spLocks noGrp="1"/>
-          </p:cNvSpPr>
-          <p:nvPr>
-            <p:ph idx="1"/>
-          </p:nvPr>
-        </p:nvSpPr>
-        <p:spPr/>
-        <p:txBody>
-          <a:bodyPr>
-            <a:normAutofit/>
-          </a:bodyPr>
-          <a:lstStyle/>
-          <a:p>
-            <a:pPr marL="0" indent="0" algn="ctr" fontAlgn="ctr">
-              <a:buNone/>
-            </a:pPr>
-            <a:endParaRPr lang="en-US" sz="4400" b="1" dirty="0"/>
-          </a:p>
-        </p:txBody>
-      </p:sp>
-    </p:spTree>
-    <p:extLst>
-      <p:ext uri="{BB962C8B-B14F-4D97-AF65-F5344CB8AC3E}">
-        <p14:creationId xmlns:p14="http://schemas.microsoft.com/office/powerpoint/2010/main" val="57312423"/>
       </p:ext>
     </p:extLst>
   </p:cSld>
@@ -4487,7 +4499,7 @@
           <p:cNvPr id="2" name="Title 1">
             <a:extLst>
               <a:ext uri="{FF2B5EF4-FFF2-40B4-BE49-F238E27FC236}">
-                <a16:creationId xmlns:a16="http://schemas.microsoft.com/office/drawing/2014/main" id="{476440D8-AB00-798E-35C5-803556A07C1A}"/>
+                <a16:creationId xmlns:a16="http://schemas.microsoft.com/office/drawing/2014/main" id="{F6C2BBCD-3B56-A313-5E83-3CC7F4085B92}"/>
               </a:ext>
             </a:extLst>
           </p:cNvPr>
@@ -4505,7 +4517,7 @@
           <a:p>
             <a:r>
               <a:rPr lang="en-US" dirty="0"/>
-              <a:t>Exam Info</a:t>
+              <a:t>Announcements</a:t>
             </a:r>
           </a:p>
         </p:txBody>
@@ -4515,7 +4527,7 @@
           <p:cNvPr id="3" name="Content Placeholder 2">
             <a:extLst>
               <a:ext uri="{FF2B5EF4-FFF2-40B4-BE49-F238E27FC236}">
-                <a16:creationId xmlns:a16="http://schemas.microsoft.com/office/drawing/2014/main" id="{A0F71404-C1A8-2E80-7CAE-9E92FDA38BE9}"/>
+                <a16:creationId xmlns:a16="http://schemas.microsoft.com/office/drawing/2014/main" id="{E2D0D753-E878-A77F-550A-D787F04F0373}"/>
               </a:ext>
             </a:extLst>
           </p:cNvPr>
@@ -4533,25 +4545,23 @@
           <a:p>
             <a:r>
               <a:rPr lang="en-US" dirty="0"/>
-              <a:t>Reminder that the exam is closed-note – all you need to bring is a pencil (or pen)!</a:t>
+              <a:t>Reminder that HW 12 is due tonight by midnight</a:t>
             </a:r>
           </a:p>
           <a:p>
             <a:r>
               <a:rPr lang="en-US" dirty="0"/>
-              <a:t>There are three categories of question – code-based, applications, and theory</a:t>
+              <a:t>The late assignment deadline for HW 11 is today at noon</a:t>
             </a:r>
           </a:p>
           <a:p>
             <a:r>
               <a:rPr lang="en-US" dirty="0"/>
-              <a:t>Questions will be a mix of multiple-choice, true/false, and open response</a:t>
-            </a:r>
-          </a:p>
-          <a:p>
-            <a:r>
-              <a:rPr lang="en-US" dirty="0"/>
-              <a:t>Questions follow formats like the review questions on Canvas</a:t>
+              <a:t>Placeholder bullet point to remind Molly to talk a little more about </a:t>
+            </a:r>
+            <a:r>
+              <a:rPr lang="en-US"/>
+              <a:t>coding style</a:t>
             </a:r>
           </a:p>
         </p:txBody>
@@ -4559,7 +4569,7 @@
     </p:spTree>
     <p:extLst>
       <p:ext uri="{BB962C8B-B14F-4D97-AF65-F5344CB8AC3E}">
-        <p14:creationId xmlns:p14="http://schemas.microsoft.com/office/powerpoint/2010/main" val="1925833925"/>
+        <p14:creationId xmlns:p14="http://schemas.microsoft.com/office/powerpoint/2010/main" val="436939110"/>
       </p:ext>
     </p:extLst>
   </p:cSld>
@@ -4570,6 +4580,97 @@
 </file>
 
 <file path=ppt/slides/slide20.xml><?xml version="1.0" encoding="utf-8"?>
+<p:sld xmlns:a="http://schemas.openxmlformats.org/drawingml/2006/main" xmlns:r="http://schemas.openxmlformats.org/officeDocument/2006/relationships" xmlns:p="http://schemas.openxmlformats.org/presentationml/2006/main">
+  <p:cSld>
+    <p:spTree>
+      <p:nvGrpSpPr>
+        <p:cNvPr id="1" name="">
+          <a:extLst>
+            <a:ext uri="{FF2B5EF4-FFF2-40B4-BE49-F238E27FC236}">
+              <a16:creationId xmlns:a16="http://schemas.microsoft.com/office/drawing/2014/main" id="{CCB53E84-0CD3-9E75-BF71-E1D4589E85C7}"/>
+            </a:ext>
+          </a:extLst>
+        </p:cNvPr>
+        <p:cNvGrpSpPr/>
+        <p:nvPr/>
+      </p:nvGrpSpPr>
+      <p:grpSpPr>
+        <a:xfrm>
+          <a:off x="0" y="0"/>
+          <a:ext cx="0" cy="0"/>
+          <a:chOff x="0" y="0"/>
+          <a:chExt cx="0" cy="0"/>
+        </a:xfrm>
+      </p:grpSpPr>
+      <p:sp>
+        <p:nvSpPr>
+          <p:cNvPr id="2" name="Title 1">
+            <a:extLst>
+              <a:ext uri="{FF2B5EF4-FFF2-40B4-BE49-F238E27FC236}">
+                <a16:creationId xmlns:a16="http://schemas.microsoft.com/office/drawing/2014/main" id="{D7E7045B-5173-6CB6-6AD8-C24E1BB0F6E4}"/>
+              </a:ext>
+            </a:extLst>
+          </p:cNvPr>
+          <p:cNvSpPr>
+            <a:spLocks noGrp="1"/>
+          </p:cNvSpPr>
+          <p:nvPr>
+            <p:ph type="title"/>
+          </p:nvPr>
+        </p:nvSpPr>
+        <p:spPr/>
+        <p:txBody>
+          <a:bodyPr/>
+          <a:lstStyle/>
+          <a:p>
+            <a:endParaRPr lang="en-US" dirty="0"/>
+          </a:p>
+        </p:txBody>
+      </p:sp>
+      <p:sp>
+        <p:nvSpPr>
+          <p:cNvPr id="3" name="Content Placeholder 2">
+            <a:extLst>
+              <a:ext uri="{FF2B5EF4-FFF2-40B4-BE49-F238E27FC236}">
+                <a16:creationId xmlns:a16="http://schemas.microsoft.com/office/drawing/2014/main" id="{F7BAE1EC-74AF-0E40-2B50-02AD1973DE41}"/>
+              </a:ext>
+            </a:extLst>
+          </p:cNvPr>
+          <p:cNvSpPr>
+            <a:spLocks noGrp="1"/>
+          </p:cNvSpPr>
+          <p:nvPr>
+            <p:ph idx="1"/>
+          </p:nvPr>
+        </p:nvSpPr>
+        <p:spPr/>
+        <p:txBody>
+          <a:bodyPr>
+            <a:normAutofit/>
+          </a:bodyPr>
+          <a:lstStyle/>
+          <a:p>
+            <a:pPr marL="0" indent="0" algn="ctr" fontAlgn="ctr">
+              <a:buNone/>
+            </a:pPr>
+            <a:endParaRPr lang="en-US" sz="4400" b="1" dirty="0"/>
+          </a:p>
+        </p:txBody>
+      </p:sp>
+    </p:spTree>
+    <p:extLst>
+      <p:ext uri="{BB962C8B-B14F-4D97-AF65-F5344CB8AC3E}">
+        <p14:creationId xmlns:p14="http://schemas.microsoft.com/office/powerpoint/2010/main" val="57312423"/>
+      </p:ext>
+    </p:extLst>
+  </p:cSld>
+  <p:clrMapOvr>
+    <a:masterClrMapping/>
+  </p:clrMapOvr>
+</p:sld>
+</file>
+
+<file path=ppt/slides/slide21.xml><?xml version="1.0" encoding="utf-8"?>
 <p:sld xmlns:a="http://schemas.openxmlformats.org/drawingml/2006/main" xmlns:r="http://schemas.openxmlformats.org/officeDocument/2006/relationships" xmlns:p="http://schemas.openxmlformats.org/presentationml/2006/main">
   <p:cSld>
     <p:spTree>
@@ -4666,7 +4767,7 @@
 </p:sld>
 </file>
 
-<file path=ppt/slides/slide21.xml><?xml version="1.0" encoding="utf-8"?>
+<file path=ppt/slides/slide22.xml><?xml version="1.0" encoding="utf-8"?>
 <p:sld xmlns:a="http://schemas.openxmlformats.org/drawingml/2006/main" xmlns:r="http://schemas.openxmlformats.org/officeDocument/2006/relationships" xmlns:p="http://schemas.openxmlformats.org/presentationml/2006/main">
   <p:cSld>
     <p:spTree>
@@ -4760,7 +4861,7 @@
 </p:sld>
 </file>
 
-<file path=ppt/slides/slide22.xml><?xml version="1.0" encoding="utf-8"?>
+<file path=ppt/slides/slide23.xml><?xml version="1.0" encoding="utf-8"?>
 <p:sld xmlns:a="http://schemas.openxmlformats.org/drawingml/2006/main" xmlns:r="http://schemas.openxmlformats.org/officeDocument/2006/relationships" xmlns:p="http://schemas.openxmlformats.org/presentationml/2006/main">
   <p:cSld>
     <p:spTree>
@@ -4863,7 +4964,7 @@
 </p:sld>
 </file>
 
-<file path=ppt/slides/slide23.xml><?xml version="1.0" encoding="utf-8"?>
+<file path=ppt/slides/slide24.xml><?xml version="1.0" encoding="utf-8"?>
 <p:sld xmlns:a="http://schemas.openxmlformats.org/drawingml/2006/main" xmlns:r="http://schemas.openxmlformats.org/officeDocument/2006/relationships" xmlns:p="http://schemas.openxmlformats.org/presentationml/2006/main">
   <p:cSld>
     <p:spTree>
@@ -4957,7 +5058,7 @@
 </p:sld>
 </file>
 
-<file path=ppt/slides/slide24.xml><?xml version="1.0" encoding="utf-8"?>
+<file path=ppt/slides/slide25.xml><?xml version="1.0" encoding="utf-8"?>
 <p:sld xmlns:a="http://schemas.openxmlformats.org/drawingml/2006/main" xmlns:r="http://schemas.openxmlformats.org/officeDocument/2006/relationships" xmlns:p="http://schemas.openxmlformats.org/presentationml/2006/main">
   <p:cSld>
     <p:spTree>
@@ -5060,7 +5161,7 @@
 </p:sld>
 </file>
 
-<file path=ppt/slides/slide25.xml><?xml version="1.0" encoding="utf-8"?>
+<file path=ppt/slides/slide26.xml><?xml version="1.0" encoding="utf-8"?>
 <p:sld xmlns:a="http://schemas.openxmlformats.org/drawingml/2006/main" xmlns:r="http://schemas.openxmlformats.org/officeDocument/2006/relationships" xmlns:p="http://schemas.openxmlformats.org/presentationml/2006/main">
   <p:cSld>
     <p:spTree>
@@ -5154,7 +5255,7 @@
 </p:sld>
 </file>
 
-<file path=ppt/slides/slide26.xml><?xml version="1.0" encoding="utf-8"?>
+<file path=ppt/slides/slide27.xml><?xml version="1.0" encoding="utf-8"?>
 <p:sld xmlns:a="http://schemas.openxmlformats.org/drawingml/2006/main" xmlns:r="http://schemas.openxmlformats.org/officeDocument/2006/relationships" xmlns:p="http://schemas.openxmlformats.org/presentationml/2006/main">
   <p:cSld>
     <p:spTree>
@@ -5205,8 +5306,8 @@
           </a:p>
         </p:txBody>
       </p:sp>
-      <mc:AlternateContent xmlns:mc="http://schemas.openxmlformats.org/markup-compatibility/2006">
-        <mc:Choice xmlns:a14="http://schemas.microsoft.com/office/drawing/2010/main" Requires="a14">
+      <mc:AlternateContent xmlns:mc="http://schemas.openxmlformats.org/markup-compatibility/2006" xmlns:a14="http://schemas.microsoft.com/office/drawing/2010/main">
+        <mc:Choice Requires="a14">
           <p:sp>
             <p:nvSpPr>
               <p:cNvPr id="3" name="Content Placeholder 2">
@@ -5305,7 +5406,7 @@
                       <a:rPr lang="en-US" sz="4400" b="0" i="1" smtClean="0">
                         <a:latin typeface="Cambria Math" panose="02040503050406030204" pitchFamily="18" charset="0"/>
                       </a:rPr>
-                      <m:t> - 2</m:t>
+                      <m:t> − 2</m:t>
                     </m:r>
                   </m:oMath>
                 </a14:m>
@@ -5317,7 +5418,7 @@
             </p:txBody>
           </p:sp>
         </mc:Choice>
-        <mc:Fallback>
+        <mc:Fallback xmlns="">
           <p:sp>
             <p:nvSpPr>
               <p:cNvPr id="3" name="Content Placeholder 2">
@@ -5370,7 +5471,7 @@
 </p:sld>
 </file>
 
-<file path=ppt/slides/slide27.xml><?xml version="1.0" encoding="utf-8"?>
+<file path=ppt/slides/slide28.xml><?xml version="1.0" encoding="utf-8"?>
 <p:sld xmlns:a="http://schemas.openxmlformats.org/drawingml/2006/main" xmlns:r="http://schemas.openxmlformats.org/officeDocument/2006/relationships" xmlns:p="http://schemas.openxmlformats.org/presentationml/2006/main">
   <p:cSld>
     <p:spTree>
@@ -5472,7 +5573,7 @@
 </p:sld>
 </file>
 
-<file path=ppt/slides/slide28.xml><?xml version="1.0" encoding="utf-8"?>
+<file path=ppt/slides/slide29.xml><?xml version="1.0" encoding="utf-8"?>
 <p:sld xmlns:a="http://schemas.openxmlformats.org/drawingml/2006/main" xmlns:r="http://schemas.openxmlformats.org/officeDocument/2006/relationships" xmlns:p="http://schemas.openxmlformats.org/presentationml/2006/main">
   <p:cSld>
     <p:spTree>
@@ -5565,100 +5666,6 @@
     <p:extLst>
       <p:ext uri="{BB962C8B-B14F-4D97-AF65-F5344CB8AC3E}">
         <p14:creationId xmlns:p14="http://schemas.microsoft.com/office/powerpoint/2010/main" val="3693326647"/>
-      </p:ext>
-    </p:extLst>
-  </p:cSld>
-  <p:clrMapOvr>
-    <a:masterClrMapping/>
-  </p:clrMapOvr>
-</p:sld>
-</file>
-
-<file path=ppt/slides/slide29.xml><?xml version="1.0" encoding="utf-8"?>
-<p:sld xmlns:a="http://schemas.openxmlformats.org/drawingml/2006/main" xmlns:r="http://schemas.openxmlformats.org/officeDocument/2006/relationships" xmlns:p="http://schemas.openxmlformats.org/presentationml/2006/main">
-  <p:cSld>
-    <p:spTree>
-      <p:nvGrpSpPr>
-        <p:cNvPr id="1" name="">
-          <a:extLst>
-            <a:ext uri="{FF2B5EF4-FFF2-40B4-BE49-F238E27FC236}">
-              <a16:creationId xmlns:a16="http://schemas.microsoft.com/office/drawing/2014/main" id="{A014853E-C150-C41F-0EF2-69DE0766A97F}"/>
-            </a:ext>
-          </a:extLst>
-        </p:cNvPr>
-        <p:cNvGrpSpPr/>
-        <p:nvPr/>
-      </p:nvGrpSpPr>
-      <p:grpSpPr>
-        <a:xfrm>
-          <a:off x="0" y="0"/>
-          <a:ext cx="0" cy="0"/>
-          <a:chOff x="0" y="0"/>
-          <a:chExt cx="0" cy="0"/>
-        </a:xfrm>
-      </p:grpSpPr>
-      <p:sp>
-        <p:nvSpPr>
-          <p:cNvPr id="2" name="Title 1">
-            <a:extLst>
-              <a:ext uri="{FF2B5EF4-FFF2-40B4-BE49-F238E27FC236}">
-                <a16:creationId xmlns:a16="http://schemas.microsoft.com/office/drawing/2014/main" id="{EE431F6C-ED52-1EE8-2C02-B4D4C5D7728A}"/>
-              </a:ext>
-            </a:extLst>
-          </p:cNvPr>
-          <p:cNvSpPr>
-            <a:spLocks noGrp="1"/>
-          </p:cNvSpPr>
-          <p:nvPr>
-            <p:ph type="title"/>
-          </p:nvPr>
-        </p:nvSpPr>
-        <p:spPr/>
-        <p:txBody>
-          <a:bodyPr/>
-          <a:lstStyle/>
-          <a:p>
-            <a:endParaRPr lang="en-US" dirty="0"/>
-          </a:p>
-        </p:txBody>
-      </p:sp>
-      <p:sp>
-        <p:nvSpPr>
-          <p:cNvPr id="3" name="Content Placeholder 2">
-            <a:extLst>
-              <a:ext uri="{FF2B5EF4-FFF2-40B4-BE49-F238E27FC236}">
-                <a16:creationId xmlns:a16="http://schemas.microsoft.com/office/drawing/2014/main" id="{51CDDF78-5DBF-742E-FB31-97F2C280AE31}"/>
-              </a:ext>
-            </a:extLst>
-          </p:cNvPr>
-          <p:cNvSpPr>
-            <a:spLocks noGrp="1"/>
-          </p:cNvSpPr>
-          <p:nvPr>
-            <p:ph idx="1"/>
-          </p:nvPr>
-        </p:nvSpPr>
-        <p:spPr/>
-        <p:txBody>
-          <a:bodyPr>
-            <a:normAutofit/>
-          </a:bodyPr>
-          <a:lstStyle/>
-          <a:p>
-            <a:pPr marL="0" indent="0" algn="ctr" fontAlgn="ctr">
-              <a:buNone/>
-            </a:pPr>
-            <a:r>
-              <a:rPr lang="en-US" sz="4400" b="1" dirty="0"/>
-              <a:t>What is ANOVA?</a:t>
-            </a:r>
-          </a:p>
-        </p:txBody>
-      </p:sp>
-    </p:spTree>
-    <p:extLst>
-      <p:ext uri="{BB962C8B-B14F-4D97-AF65-F5344CB8AC3E}">
-        <p14:creationId xmlns:p14="http://schemas.microsoft.com/office/powerpoint/2010/main" val="4181215934"/>
       </p:ext>
     </p:extLst>
   </p:cSld>
@@ -5690,7 +5697,7 @@
           <p:cNvPr id="2" name="Title 1">
             <a:extLst>
               <a:ext uri="{FF2B5EF4-FFF2-40B4-BE49-F238E27FC236}">
-                <a16:creationId xmlns:a16="http://schemas.microsoft.com/office/drawing/2014/main" id="{B4D6B164-459A-5845-CDA9-568B10BAC3CF}"/>
+                <a16:creationId xmlns:a16="http://schemas.microsoft.com/office/drawing/2014/main" id="{476440D8-AB00-798E-35C5-803556A07C1A}"/>
               </a:ext>
             </a:extLst>
           </p:cNvPr>
@@ -5708,40 +5715,61 @@
           <a:p>
             <a:r>
               <a:rPr lang="en-US" dirty="0"/>
-              <a:t>Jeopardy game</a:t>
-            </a:r>
-          </a:p>
-        </p:txBody>
-      </p:sp>
-      <p:sp>
-        <p:nvSpPr>
-          <p:cNvPr id="3" name="Text Placeholder 2">
-            <a:extLst>
-              <a:ext uri="{FF2B5EF4-FFF2-40B4-BE49-F238E27FC236}">
-                <a16:creationId xmlns:a16="http://schemas.microsoft.com/office/drawing/2014/main" id="{F55C66AC-4172-2428-B08F-2744BD8F1449}"/>
-              </a:ext>
-            </a:extLst>
-          </p:cNvPr>
-          <p:cNvSpPr>
-            <a:spLocks noGrp="1"/>
-          </p:cNvSpPr>
-          <p:nvPr>
-            <p:ph type="body" idx="1"/>
-          </p:nvPr>
-        </p:nvSpPr>
-        <p:spPr/>
-        <p:txBody>
-          <a:bodyPr/>
-          <a:lstStyle/>
-          <a:p>
-            <a:endParaRPr lang="en-US"/>
+              <a:t>Exam Info</a:t>
+            </a:r>
+          </a:p>
+        </p:txBody>
+      </p:sp>
+      <p:sp>
+        <p:nvSpPr>
+          <p:cNvPr id="3" name="Content Placeholder 2">
+            <a:extLst>
+              <a:ext uri="{FF2B5EF4-FFF2-40B4-BE49-F238E27FC236}">
+                <a16:creationId xmlns:a16="http://schemas.microsoft.com/office/drawing/2014/main" id="{A0F71404-C1A8-2E80-7CAE-9E92FDA38BE9}"/>
+              </a:ext>
+            </a:extLst>
+          </p:cNvPr>
+          <p:cNvSpPr>
+            <a:spLocks noGrp="1"/>
+          </p:cNvSpPr>
+          <p:nvPr>
+            <p:ph idx="1"/>
+          </p:nvPr>
+        </p:nvSpPr>
+        <p:spPr/>
+        <p:txBody>
+          <a:bodyPr/>
+          <a:lstStyle/>
+          <a:p>
+            <a:r>
+              <a:rPr lang="en-US" dirty="0"/>
+              <a:t>Reminder that the exam is closed-note – all you need to bring is a pencil (or pen)!</a:t>
+            </a:r>
+          </a:p>
+          <a:p>
+            <a:r>
+              <a:rPr lang="en-US" dirty="0"/>
+              <a:t>There are three categories of question – code-based, applications, and theory</a:t>
+            </a:r>
+          </a:p>
+          <a:p>
+            <a:r>
+              <a:rPr lang="en-US" dirty="0"/>
+              <a:t>Questions will be a mix of multiple-choice, true/false, and open response</a:t>
+            </a:r>
+          </a:p>
+          <a:p>
+            <a:r>
+              <a:rPr lang="en-US" dirty="0"/>
+              <a:t>Questions follow formats like the review questions on Canvas</a:t>
+            </a:r>
           </a:p>
         </p:txBody>
       </p:sp>
     </p:spTree>
     <p:extLst>
       <p:ext uri="{BB962C8B-B14F-4D97-AF65-F5344CB8AC3E}">
-        <p14:creationId xmlns:p14="http://schemas.microsoft.com/office/powerpoint/2010/main" val="1182834889"/>
+        <p14:creationId xmlns:p14="http://schemas.microsoft.com/office/powerpoint/2010/main" val="1925833925"/>
       </p:ext>
     </p:extLst>
   </p:cSld>
@@ -5752,6 +5780,100 @@
 </file>
 
 <file path=ppt/slides/slide30.xml><?xml version="1.0" encoding="utf-8"?>
+<p:sld xmlns:a="http://schemas.openxmlformats.org/drawingml/2006/main" xmlns:r="http://schemas.openxmlformats.org/officeDocument/2006/relationships" xmlns:p="http://schemas.openxmlformats.org/presentationml/2006/main">
+  <p:cSld>
+    <p:spTree>
+      <p:nvGrpSpPr>
+        <p:cNvPr id="1" name="">
+          <a:extLst>
+            <a:ext uri="{FF2B5EF4-FFF2-40B4-BE49-F238E27FC236}">
+              <a16:creationId xmlns:a16="http://schemas.microsoft.com/office/drawing/2014/main" id="{A014853E-C150-C41F-0EF2-69DE0766A97F}"/>
+            </a:ext>
+          </a:extLst>
+        </p:cNvPr>
+        <p:cNvGrpSpPr/>
+        <p:nvPr/>
+      </p:nvGrpSpPr>
+      <p:grpSpPr>
+        <a:xfrm>
+          <a:off x="0" y="0"/>
+          <a:ext cx="0" cy="0"/>
+          <a:chOff x="0" y="0"/>
+          <a:chExt cx="0" cy="0"/>
+        </a:xfrm>
+      </p:grpSpPr>
+      <p:sp>
+        <p:nvSpPr>
+          <p:cNvPr id="2" name="Title 1">
+            <a:extLst>
+              <a:ext uri="{FF2B5EF4-FFF2-40B4-BE49-F238E27FC236}">
+                <a16:creationId xmlns:a16="http://schemas.microsoft.com/office/drawing/2014/main" id="{EE431F6C-ED52-1EE8-2C02-B4D4C5D7728A}"/>
+              </a:ext>
+            </a:extLst>
+          </p:cNvPr>
+          <p:cNvSpPr>
+            <a:spLocks noGrp="1"/>
+          </p:cNvSpPr>
+          <p:nvPr>
+            <p:ph type="title"/>
+          </p:nvPr>
+        </p:nvSpPr>
+        <p:spPr/>
+        <p:txBody>
+          <a:bodyPr/>
+          <a:lstStyle/>
+          <a:p>
+            <a:endParaRPr lang="en-US" dirty="0"/>
+          </a:p>
+        </p:txBody>
+      </p:sp>
+      <p:sp>
+        <p:nvSpPr>
+          <p:cNvPr id="3" name="Content Placeholder 2">
+            <a:extLst>
+              <a:ext uri="{FF2B5EF4-FFF2-40B4-BE49-F238E27FC236}">
+                <a16:creationId xmlns:a16="http://schemas.microsoft.com/office/drawing/2014/main" id="{51CDDF78-5DBF-742E-FB31-97F2C280AE31}"/>
+              </a:ext>
+            </a:extLst>
+          </p:cNvPr>
+          <p:cNvSpPr>
+            <a:spLocks noGrp="1"/>
+          </p:cNvSpPr>
+          <p:nvPr>
+            <p:ph idx="1"/>
+          </p:nvPr>
+        </p:nvSpPr>
+        <p:spPr/>
+        <p:txBody>
+          <a:bodyPr>
+            <a:normAutofit/>
+          </a:bodyPr>
+          <a:lstStyle/>
+          <a:p>
+            <a:pPr marL="0" indent="0" algn="ctr" fontAlgn="ctr">
+              <a:buNone/>
+            </a:pPr>
+            <a:r>
+              <a:rPr lang="en-US" sz="4400" b="1" dirty="0"/>
+              <a:t>What is ANOVA?</a:t>
+            </a:r>
+          </a:p>
+        </p:txBody>
+      </p:sp>
+    </p:spTree>
+    <p:extLst>
+      <p:ext uri="{BB962C8B-B14F-4D97-AF65-F5344CB8AC3E}">
+        <p14:creationId xmlns:p14="http://schemas.microsoft.com/office/powerpoint/2010/main" val="4181215934"/>
+      </p:ext>
+    </p:extLst>
+  </p:cSld>
+  <p:clrMapOvr>
+    <a:masterClrMapping/>
+  </p:clrMapOvr>
+</p:sld>
+</file>
+
+<file path=ppt/slides/slide31.xml><?xml version="1.0" encoding="utf-8"?>
 <p:sld xmlns:a="http://schemas.openxmlformats.org/drawingml/2006/main" xmlns:r="http://schemas.openxmlformats.org/officeDocument/2006/relationships" xmlns:p="http://schemas.openxmlformats.org/presentationml/2006/main">
   <p:cSld>
     <p:spTree>
@@ -5848,7 +5970,7 @@
 </p:sld>
 </file>
 
-<file path=ppt/slides/slide31.xml><?xml version="1.0" encoding="utf-8"?>
+<file path=ppt/slides/slide32.xml><?xml version="1.0" encoding="utf-8"?>
 <p:sld xmlns:a="http://schemas.openxmlformats.org/drawingml/2006/main" xmlns:r="http://schemas.openxmlformats.org/officeDocument/2006/relationships" xmlns:p="http://schemas.openxmlformats.org/presentationml/2006/main">
   <p:cSld>
     <p:spTree>
@@ -5942,7 +6064,7 @@
 </p:sld>
 </file>
 
-<file path=ppt/slides/slide32.xml><?xml version="1.0" encoding="utf-8"?>
+<file path=ppt/slides/slide33.xml><?xml version="1.0" encoding="utf-8"?>
 <p:sld xmlns:a="http://schemas.openxmlformats.org/drawingml/2006/main" xmlns:r="http://schemas.openxmlformats.org/officeDocument/2006/relationships" xmlns:p="http://schemas.openxmlformats.org/presentationml/2006/main">
   <p:cSld>
     <p:spTree>
@@ -6039,7 +6161,7 @@
 </p:sld>
 </file>
 
-<file path=ppt/slides/slide33.xml><?xml version="1.0" encoding="utf-8"?>
+<file path=ppt/slides/slide34.xml><?xml version="1.0" encoding="utf-8"?>
 <p:sld xmlns:a="http://schemas.openxmlformats.org/drawingml/2006/main" xmlns:r="http://schemas.openxmlformats.org/officeDocument/2006/relationships" xmlns:p="http://schemas.openxmlformats.org/presentationml/2006/main">
   <p:cSld>
     <p:spTree>
@@ -6133,7 +6255,7 @@
 </p:sld>
 </file>
 
-<file path=ppt/slides/slide34.xml><?xml version="1.0" encoding="utf-8"?>
+<file path=ppt/slides/slide35.xml><?xml version="1.0" encoding="utf-8"?>
 <p:sld xmlns:a="http://schemas.openxmlformats.org/drawingml/2006/main" xmlns:r="http://schemas.openxmlformats.org/officeDocument/2006/relationships" xmlns:p="http://schemas.openxmlformats.org/presentationml/2006/main">
   <p:cSld>
     <p:spTree>
@@ -6239,7 +6361,7 @@
 </p:sld>
 </file>
 
-<file path=ppt/slides/slide35.xml><?xml version="1.0" encoding="utf-8"?>
+<file path=ppt/slides/slide36.xml><?xml version="1.0" encoding="utf-8"?>
 <p:sld xmlns:a="http://schemas.openxmlformats.org/drawingml/2006/main" xmlns:r="http://schemas.openxmlformats.org/officeDocument/2006/relationships" xmlns:p="http://schemas.openxmlformats.org/presentationml/2006/main">
   <p:cSld>
     <p:spTree>
@@ -6333,7 +6455,7 @@
 </p:sld>
 </file>
 
-<file path=ppt/slides/slide36.xml><?xml version="1.0" encoding="utf-8"?>
+<file path=ppt/slides/slide37.xml><?xml version="1.0" encoding="utf-8"?>
 <p:sld xmlns:a="http://schemas.openxmlformats.org/drawingml/2006/main" xmlns:r="http://schemas.openxmlformats.org/officeDocument/2006/relationships" xmlns:p="http://schemas.openxmlformats.org/presentationml/2006/main">
   <p:cSld>
     <p:spTree>
@@ -6430,7 +6552,7 @@
 </p:sld>
 </file>
 
-<file path=ppt/slides/slide37.xml><?xml version="1.0" encoding="utf-8"?>
+<file path=ppt/slides/slide38.xml><?xml version="1.0" encoding="utf-8"?>
 <p:sld xmlns:a="http://schemas.openxmlformats.org/drawingml/2006/main" xmlns:r="http://schemas.openxmlformats.org/officeDocument/2006/relationships" xmlns:p="http://schemas.openxmlformats.org/presentationml/2006/main">
   <p:cSld>
     <p:spTree>
@@ -6524,7 +6646,7 @@
 </p:sld>
 </file>
 
-<file path=ppt/slides/slide38.xml><?xml version="1.0" encoding="utf-8"?>
+<file path=ppt/slides/slide39.xml><?xml version="1.0" encoding="utf-8"?>
 <p:sld xmlns:a="http://schemas.openxmlformats.org/drawingml/2006/main" xmlns:r="http://schemas.openxmlformats.org/officeDocument/2006/relationships" xmlns:p="http://schemas.openxmlformats.org/presentationml/2006/main">
   <p:cSld>
     <p:spTree>
@@ -6622,7 +6744,90 @@
 </p:sld>
 </file>
 
-<file path=ppt/slides/slide39.xml><?xml version="1.0" encoding="utf-8"?>
+<file path=ppt/slides/slide4.xml><?xml version="1.0" encoding="utf-8"?>
+<p:sld xmlns:a="http://schemas.openxmlformats.org/drawingml/2006/main" xmlns:r="http://schemas.openxmlformats.org/officeDocument/2006/relationships" xmlns:p="http://schemas.openxmlformats.org/presentationml/2006/main">
+  <p:cSld>
+    <p:spTree>
+      <p:nvGrpSpPr>
+        <p:cNvPr id="1" name=""/>
+        <p:cNvGrpSpPr/>
+        <p:nvPr/>
+      </p:nvGrpSpPr>
+      <p:grpSpPr>
+        <a:xfrm>
+          <a:off x="0" y="0"/>
+          <a:ext cx="0" cy="0"/>
+          <a:chOff x="0" y="0"/>
+          <a:chExt cx="0" cy="0"/>
+        </a:xfrm>
+      </p:grpSpPr>
+      <p:sp>
+        <p:nvSpPr>
+          <p:cNvPr id="2" name="Title 1">
+            <a:extLst>
+              <a:ext uri="{FF2B5EF4-FFF2-40B4-BE49-F238E27FC236}">
+                <a16:creationId xmlns:a16="http://schemas.microsoft.com/office/drawing/2014/main" id="{B4D6B164-459A-5845-CDA9-568B10BAC3CF}"/>
+              </a:ext>
+            </a:extLst>
+          </p:cNvPr>
+          <p:cNvSpPr>
+            <a:spLocks noGrp="1"/>
+          </p:cNvSpPr>
+          <p:nvPr>
+            <p:ph type="title"/>
+          </p:nvPr>
+        </p:nvSpPr>
+        <p:spPr/>
+        <p:txBody>
+          <a:bodyPr/>
+          <a:lstStyle/>
+          <a:p>
+            <a:r>
+              <a:rPr lang="en-US" dirty="0"/>
+              <a:t>Jeopardy game</a:t>
+            </a:r>
+          </a:p>
+        </p:txBody>
+      </p:sp>
+      <p:sp>
+        <p:nvSpPr>
+          <p:cNvPr id="3" name="Text Placeholder 2">
+            <a:extLst>
+              <a:ext uri="{FF2B5EF4-FFF2-40B4-BE49-F238E27FC236}">
+                <a16:creationId xmlns:a16="http://schemas.microsoft.com/office/drawing/2014/main" id="{F55C66AC-4172-2428-B08F-2744BD8F1449}"/>
+              </a:ext>
+            </a:extLst>
+          </p:cNvPr>
+          <p:cNvSpPr>
+            <a:spLocks noGrp="1"/>
+          </p:cNvSpPr>
+          <p:nvPr>
+            <p:ph type="body" idx="1"/>
+          </p:nvPr>
+        </p:nvSpPr>
+        <p:spPr/>
+        <p:txBody>
+          <a:bodyPr/>
+          <a:lstStyle/>
+          <a:p>
+            <a:endParaRPr lang="en-US"/>
+          </a:p>
+        </p:txBody>
+      </p:sp>
+    </p:spTree>
+    <p:extLst>
+      <p:ext uri="{BB962C8B-B14F-4D97-AF65-F5344CB8AC3E}">
+        <p14:creationId xmlns:p14="http://schemas.microsoft.com/office/powerpoint/2010/main" val="1182834889"/>
+      </p:ext>
+    </p:extLst>
+  </p:cSld>
+  <p:clrMapOvr>
+    <a:masterClrMapping/>
+  </p:clrMapOvr>
+</p:sld>
+</file>
+
+<file path=ppt/slides/slide40.xml><?xml version="1.0" encoding="utf-8"?>
 <p:sld xmlns:a="http://schemas.openxmlformats.org/drawingml/2006/main" xmlns:r="http://schemas.openxmlformats.org/officeDocument/2006/relationships" xmlns:p="http://schemas.openxmlformats.org/presentationml/2006/main">
   <p:cSld>
     <p:spTree>
@@ -6716,111 +6921,7 @@
 </p:sld>
 </file>
 
-<file path=ppt/slides/slide4.xml><?xml version="1.0" encoding="utf-8"?>
-<p:sld xmlns:a="http://schemas.openxmlformats.org/drawingml/2006/main" xmlns:r="http://schemas.openxmlformats.org/officeDocument/2006/relationships" xmlns:p="http://schemas.openxmlformats.org/presentationml/2006/main">
-  <p:cSld>
-    <p:spTree>
-      <p:nvGrpSpPr>
-        <p:cNvPr id="1" name=""/>
-        <p:cNvGrpSpPr/>
-        <p:nvPr/>
-      </p:nvGrpSpPr>
-      <p:grpSpPr>
-        <a:xfrm>
-          <a:off x="0" y="0"/>
-          <a:ext cx="0" cy="0"/>
-          <a:chOff x="0" y="0"/>
-          <a:chExt cx="0" cy="0"/>
-        </a:xfrm>
-      </p:grpSpPr>
-      <p:sp>
-        <p:nvSpPr>
-          <p:cNvPr id="2" name="Title 1">
-            <a:extLst>
-              <a:ext uri="{FF2B5EF4-FFF2-40B4-BE49-F238E27FC236}">
-                <a16:creationId xmlns:a16="http://schemas.microsoft.com/office/drawing/2014/main" id="{A3FC1C79-2784-73FA-4997-10942C454D9D}"/>
-              </a:ext>
-            </a:extLst>
-          </p:cNvPr>
-          <p:cNvSpPr>
-            <a:spLocks noGrp="1"/>
-          </p:cNvSpPr>
-          <p:nvPr>
-            <p:ph type="title"/>
-          </p:nvPr>
-        </p:nvSpPr>
-        <p:spPr/>
-        <p:txBody>
-          <a:bodyPr/>
-          <a:lstStyle/>
-          <a:p>
-            <a:r>
-              <a:rPr lang="en-US" dirty="0"/>
-              <a:t>Set-up/Rules</a:t>
-            </a:r>
-          </a:p>
-        </p:txBody>
-      </p:sp>
-      <p:sp>
-        <p:nvSpPr>
-          <p:cNvPr id="3" name="Content Placeholder 2">
-            <a:extLst>
-              <a:ext uri="{FF2B5EF4-FFF2-40B4-BE49-F238E27FC236}">
-                <a16:creationId xmlns:a16="http://schemas.microsoft.com/office/drawing/2014/main" id="{1BD93DAF-69CD-CBAF-5D92-996CAE602D28}"/>
-              </a:ext>
-            </a:extLst>
-          </p:cNvPr>
-          <p:cNvSpPr>
-            <a:spLocks noGrp="1"/>
-          </p:cNvSpPr>
-          <p:nvPr>
-            <p:ph idx="1"/>
-          </p:nvPr>
-        </p:nvSpPr>
-        <p:spPr/>
-        <p:txBody>
-          <a:bodyPr/>
-          <a:lstStyle/>
-          <a:p>
-            <a:r>
-              <a:rPr lang="en-US" dirty="0"/>
-              <a:t>Split into three groups</a:t>
-            </a:r>
-          </a:p>
-          <a:p>
-            <a:r>
-              <a:rPr lang="en-US" dirty="0"/>
-              <a:t>Each group will work as a team to earn points, which are determined by the “worth” of the questions.</a:t>
-            </a:r>
-          </a:p>
-          <a:p>
-            <a:r>
-              <a:rPr lang="en-US" dirty="0"/>
-              <a:t>There are six categories, and each category has 5 questions with value ranging from $200 to $1000, with difficulty roughly aligned with the worth of the question.</a:t>
-            </a:r>
-          </a:p>
-          <a:p>
-            <a:r>
-              <a:rPr lang="en-US" dirty="0"/>
-              <a:t>If your group gets an answer correct, the worth of that question is added to your score; if you do not get the answer correct, it is subtracted from your score and the other teams will have the chance to answer it</a:t>
-            </a:r>
-          </a:p>
-        </p:txBody>
-      </p:sp>
-    </p:spTree>
-    <p:extLst>
-      <p:ext uri="{BB962C8B-B14F-4D97-AF65-F5344CB8AC3E}">
-        <p14:creationId xmlns:p14="http://schemas.microsoft.com/office/powerpoint/2010/main" val="228064533"/>
-      </p:ext>
-    </p:extLst>
-  </p:cSld>
-  <p:clrMapOvr>
-    <a:masterClrMapping/>
-  </p:clrMapOvr>
-</p:sld>
-</file>
-
-<file path=ppt/slides/slide40.xml><?xml version="1.0" encoding="utf-8"?>
+<file path=ppt/slides/slide41.xml><?xml version="1.0" encoding="utf-8"?>
 <p:sld xmlns:a="http://schemas.openxmlformats.org/drawingml/2006/main" xmlns:r="http://schemas.openxmlformats.org/officeDocument/2006/relationships" xmlns:p="http://schemas.openxmlformats.org/presentationml/2006/main">
   <p:cSld>
     <p:spTree>
@@ -6918,7 +7019,7 @@
 </p:sld>
 </file>
 
-<file path=ppt/slides/slide41.xml><?xml version="1.0" encoding="utf-8"?>
+<file path=ppt/slides/slide42.xml><?xml version="1.0" encoding="utf-8"?>
 <p:sld xmlns:a="http://schemas.openxmlformats.org/drawingml/2006/main" xmlns:r="http://schemas.openxmlformats.org/officeDocument/2006/relationships" xmlns:p="http://schemas.openxmlformats.org/presentationml/2006/main">
   <p:cSld>
     <p:spTree>
@@ -7012,7 +7113,7 @@
 </p:sld>
 </file>
 
-<file path=ppt/slides/slide42.xml><?xml version="1.0" encoding="utf-8"?>
+<file path=ppt/slides/slide43.xml><?xml version="1.0" encoding="utf-8"?>
 <p:sld xmlns:a="http://schemas.openxmlformats.org/drawingml/2006/main" xmlns:r="http://schemas.openxmlformats.org/officeDocument/2006/relationships" xmlns:p="http://schemas.openxmlformats.org/presentationml/2006/main">
   <p:cSld>
     <p:spTree>
@@ -7110,7 +7211,7 @@
 </p:sld>
 </file>
 
-<file path=ppt/slides/slide43.xml><?xml version="1.0" encoding="utf-8"?>
+<file path=ppt/slides/slide44.xml><?xml version="1.0" encoding="utf-8"?>
 <p:sld xmlns:a="http://schemas.openxmlformats.org/drawingml/2006/main" xmlns:r="http://schemas.openxmlformats.org/officeDocument/2006/relationships" xmlns:p="http://schemas.openxmlformats.org/presentationml/2006/main">
   <p:cSld>
     <p:spTree>
@@ -7204,7 +7305,7 @@
 </p:sld>
 </file>
 
-<file path=ppt/slides/slide44.xml><?xml version="1.0" encoding="utf-8"?>
+<file path=ppt/slides/slide45.xml><?xml version="1.0" encoding="utf-8"?>
 <p:sld xmlns:a="http://schemas.openxmlformats.org/drawingml/2006/main" xmlns:r="http://schemas.openxmlformats.org/officeDocument/2006/relationships" xmlns:p="http://schemas.openxmlformats.org/presentationml/2006/main">
   <p:cSld>
     <p:spTree>
@@ -7302,7 +7403,7 @@
 </p:sld>
 </file>
 
-<file path=ppt/slides/slide45.xml><?xml version="1.0" encoding="utf-8"?>
+<file path=ppt/slides/slide46.xml><?xml version="1.0" encoding="utf-8"?>
 <p:sld xmlns:a="http://schemas.openxmlformats.org/drawingml/2006/main" xmlns:r="http://schemas.openxmlformats.org/officeDocument/2006/relationships" xmlns:p="http://schemas.openxmlformats.org/presentationml/2006/main">
   <p:cSld>
     <p:spTree>
@@ -7396,7 +7497,7 @@
 </p:sld>
 </file>
 
-<file path=ppt/slides/slide46.xml><?xml version="1.0" encoding="utf-8"?>
+<file path=ppt/slides/slide47.xml><?xml version="1.0" encoding="utf-8"?>
 <p:sld xmlns:a="http://schemas.openxmlformats.org/drawingml/2006/main" xmlns:r="http://schemas.openxmlformats.org/officeDocument/2006/relationships" xmlns:p="http://schemas.openxmlformats.org/presentationml/2006/main">
   <p:cSld>
     <p:spTree>
@@ -7494,7 +7595,7 @@
 </p:sld>
 </file>
 
-<file path=ppt/slides/slide47.xml><?xml version="1.0" encoding="utf-8"?>
+<file path=ppt/slides/slide48.xml><?xml version="1.0" encoding="utf-8"?>
 <p:sld xmlns:a="http://schemas.openxmlformats.org/drawingml/2006/main" xmlns:r="http://schemas.openxmlformats.org/officeDocument/2006/relationships" xmlns:p="http://schemas.openxmlformats.org/presentationml/2006/main">
   <p:cSld>
     <p:spTree>
@@ -7588,7 +7689,7 @@
 </p:sld>
 </file>
 
-<file path=ppt/slides/slide48.xml><?xml version="1.0" encoding="utf-8"?>
+<file path=ppt/slides/slide49.xml><?xml version="1.0" encoding="utf-8"?>
 <p:sld xmlns:a="http://schemas.openxmlformats.org/drawingml/2006/main" xmlns:r="http://schemas.openxmlformats.org/officeDocument/2006/relationships" xmlns:p="http://schemas.openxmlformats.org/presentationml/2006/main">
   <p:cSld>
     <p:spTree>
@@ -7685,7 +7786,111 @@
 </p:sld>
 </file>
 
-<file path=ppt/slides/slide49.xml><?xml version="1.0" encoding="utf-8"?>
+<file path=ppt/slides/slide5.xml><?xml version="1.0" encoding="utf-8"?>
+<p:sld xmlns:a="http://schemas.openxmlformats.org/drawingml/2006/main" xmlns:r="http://schemas.openxmlformats.org/officeDocument/2006/relationships" xmlns:p="http://schemas.openxmlformats.org/presentationml/2006/main">
+  <p:cSld>
+    <p:spTree>
+      <p:nvGrpSpPr>
+        <p:cNvPr id="1" name=""/>
+        <p:cNvGrpSpPr/>
+        <p:nvPr/>
+      </p:nvGrpSpPr>
+      <p:grpSpPr>
+        <a:xfrm>
+          <a:off x="0" y="0"/>
+          <a:ext cx="0" cy="0"/>
+          <a:chOff x="0" y="0"/>
+          <a:chExt cx="0" cy="0"/>
+        </a:xfrm>
+      </p:grpSpPr>
+      <p:sp>
+        <p:nvSpPr>
+          <p:cNvPr id="2" name="Title 1">
+            <a:extLst>
+              <a:ext uri="{FF2B5EF4-FFF2-40B4-BE49-F238E27FC236}">
+                <a16:creationId xmlns:a16="http://schemas.microsoft.com/office/drawing/2014/main" id="{A3FC1C79-2784-73FA-4997-10942C454D9D}"/>
+              </a:ext>
+            </a:extLst>
+          </p:cNvPr>
+          <p:cNvSpPr>
+            <a:spLocks noGrp="1"/>
+          </p:cNvSpPr>
+          <p:nvPr>
+            <p:ph type="title"/>
+          </p:nvPr>
+        </p:nvSpPr>
+        <p:spPr/>
+        <p:txBody>
+          <a:bodyPr/>
+          <a:lstStyle/>
+          <a:p>
+            <a:r>
+              <a:rPr lang="en-US" dirty="0"/>
+              <a:t>Set-up/Rules</a:t>
+            </a:r>
+          </a:p>
+        </p:txBody>
+      </p:sp>
+      <p:sp>
+        <p:nvSpPr>
+          <p:cNvPr id="3" name="Content Placeholder 2">
+            <a:extLst>
+              <a:ext uri="{FF2B5EF4-FFF2-40B4-BE49-F238E27FC236}">
+                <a16:creationId xmlns:a16="http://schemas.microsoft.com/office/drawing/2014/main" id="{1BD93DAF-69CD-CBAF-5D92-996CAE602D28}"/>
+              </a:ext>
+            </a:extLst>
+          </p:cNvPr>
+          <p:cNvSpPr>
+            <a:spLocks noGrp="1"/>
+          </p:cNvSpPr>
+          <p:nvPr>
+            <p:ph idx="1"/>
+          </p:nvPr>
+        </p:nvSpPr>
+        <p:spPr/>
+        <p:txBody>
+          <a:bodyPr/>
+          <a:lstStyle/>
+          <a:p>
+            <a:r>
+              <a:rPr lang="en-US" dirty="0"/>
+              <a:t>Split into three groups</a:t>
+            </a:r>
+          </a:p>
+          <a:p>
+            <a:r>
+              <a:rPr lang="en-US" dirty="0"/>
+              <a:t>Each group will work as a team to earn points, which are determined by the “worth” of the questions.</a:t>
+            </a:r>
+          </a:p>
+          <a:p>
+            <a:r>
+              <a:rPr lang="en-US" dirty="0"/>
+              <a:t>There are six categories, and each category has 5 questions with value ranging from $200 to $1000, with difficulty roughly aligned with the worth of the question.</a:t>
+            </a:r>
+          </a:p>
+          <a:p>
+            <a:r>
+              <a:rPr lang="en-US" dirty="0"/>
+              <a:t>If your group gets an answer correct, the worth of that question is added to your score; if you do not get the answer correct, it is subtracted from your score and the other teams will have the chance to answer it</a:t>
+            </a:r>
+          </a:p>
+        </p:txBody>
+      </p:sp>
+    </p:spTree>
+    <p:extLst>
+      <p:ext uri="{BB962C8B-B14F-4D97-AF65-F5344CB8AC3E}">
+        <p14:creationId xmlns:p14="http://schemas.microsoft.com/office/powerpoint/2010/main" val="228064533"/>
+      </p:ext>
+    </p:extLst>
+  </p:cSld>
+  <p:clrMapOvr>
+    <a:masterClrMapping/>
+  </p:clrMapOvr>
+</p:sld>
+</file>
+
+<file path=ppt/slides/slide50.xml><?xml version="1.0" encoding="utf-8"?>
 <p:sld xmlns:a="http://schemas.openxmlformats.org/drawingml/2006/main" xmlns:r="http://schemas.openxmlformats.org/officeDocument/2006/relationships" xmlns:p="http://schemas.openxmlformats.org/presentationml/2006/main">
   <p:cSld>
     <p:spTree>
@@ -7779,7 +7984,953 @@
 </p:sld>
 </file>
 
-<file path=ppt/slides/slide5.xml><?xml version="1.0" encoding="utf-8"?>
+<file path=ppt/slides/slide51.xml><?xml version="1.0" encoding="utf-8"?>
+<p:sld xmlns:a="http://schemas.openxmlformats.org/drawingml/2006/main" xmlns:r="http://schemas.openxmlformats.org/officeDocument/2006/relationships" xmlns:p="http://schemas.openxmlformats.org/presentationml/2006/main">
+  <p:cSld>
+    <p:spTree>
+      <p:nvGrpSpPr>
+        <p:cNvPr id="1" name="">
+          <a:extLst>
+            <a:ext uri="{FF2B5EF4-FFF2-40B4-BE49-F238E27FC236}">
+              <a16:creationId xmlns:a16="http://schemas.microsoft.com/office/drawing/2014/main" id="{B8EAC64F-3244-2895-4473-E64071EB4FE8}"/>
+            </a:ext>
+          </a:extLst>
+        </p:cNvPr>
+        <p:cNvGrpSpPr/>
+        <p:nvPr/>
+      </p:nvGrpSpPr>
+      <p:grpSpPr>
+        <a:xfrm>
+          <a:off x="0" y="0"/>
+          <a:ext cx="0" cy="0"/>
+          <a:chOff x="0" y="0"/>
+          <a:chExt cx="0" cy="0"/>
+        </a:xfrm>
+      </p:grpSpPr>
+      <p:sp>
+        <p:nvSpPr>
+          <p:cNvPr id="2" name="Title 1">
+            <a:extLst>
+              <a:ext uri="{FF2B5EF4-FFF2-40B4-BE49-F238E27FC236}">
+                <a16:creationId xmlns:a16="http://schemas.microsoft.com/office/drawing/2014/main" id="{EBF3E609-02E3-B563-2B11-BC2657977C19}"/>
+              </a:ext>
+            </a:extLst>
+          </p:cNvPr>
+          <p:cNvSpPr>
+            <a:spLocks noGrp="1"/>
+          </p:cNvSpPr>
+          <p:nvPr>
+            <p:ph type="title"/>
+          </p:nvPr>
+        </p:nvSpPr>
+        <p:spPr/>
+        <p:txBody>
+          <a:bodyPr/>
+          <a:lstStyle/>
+          <a:p>
+            <a:r>
+              <a:rPr lang="en-US" dirty="0"/>
+              <a:t>We’ve Got the Power-$400</a:t>
+            </a:r>
+          </a:p>
+        </p:txBody>
+      </p:sp>
+      <p:sp>
+        <p:nvSpPr>
+          <p:cNvPr id="3" name="Content Placeholder 2">
+            <a:extLst>
+              <a:ext uri="{FF2B5EF4-FFF2-40B4-BE49-F238E27FC236}">
+                <a16:creationId xmlns:a16="http://schemas.microsoft.com/office/drawing/2014/main" id="{F4F2212A-C9E6-007B-BDE1-7B4A69455FED}"/>
+              </a:ext>
+            </a:extLst>
+          </p:cNvPr>
+          <p:cNvSpPr>
+            <a:spLocks noGrp="1"/>
+          </p:cNvSpPr>
+          <p:nvPr>
+            <p:ph idx="1"/>
+          </p:nvPr>
+        </p:nvSpPr>
+        <p:spPr/>
+        <p:txBody>
+          <a:bodyPr>
+            <a:normAutofit/>
+          </a:bodyPr>
+          <a:lstStyle/>
+          <a:p>
+            <a:pPr marL="0" indent="0" fontAlgn="ctr">
+              <a:buNone/>
+            </a:pPr>
+            <a:r>
+              <a:rPr lang="en-US" sz="4400" dirty="0"/>
+              <a:t>This rate is the complement of the power.</a:t>
+            </a:r>
+          </a:p>
+        </p:txBody>
+      </p:sp>
+    </p:spTree>
+    <p:extLst>
+      <p:ext uri="{BB962C8B-B14F-4D97-AF65-F5344CB8AC3E}">
+        <p14:creationId xmlns:p14="http://schemas.microsoft.com/office/powerpoint/2010/main" val="2198408981"/>
+      </p:ext>
+    </p:extLst>
+  </p:cSld>
+  <p:clrMapOvr>
+    <a:masterClrMapping/>
+  </p:clrMapOvr>
+</p:sld>
+</file>
+
+<file path=ppt/slides/slide52.xml><?xml version="1.0" encoding="utf-8"?>
+<p:sld xmlns:a="http://schemas.openxmlformats.org/drawingml/2006/main" xmlns:r="http://schemas.openxmlformats.org/officeDocument/2006/relationships" xmlns:p="http://schemas.openxmlformats.org/presentationml/2006/main">
+  <p:cSld>
+    <p:spTree>
+      <p:nvGrpSpPr>
+        <p:cNvPr id="1" name="">
+          <a:extLst>
+            <a:ext uri="{FF2B5EF4-FFF2-40B4-BE49-F238E27FC236}">
+              <a16:creationId xmlns:a16="http://schemas.microsoft.com/office/drawing/2014/main" id="{B1D108A0-5BE9-C12F-580A-A887CF1E38CA}"/>
+            </a:ext>
+          </a:extLst>
+        </p:cNvPr>
+        <p:cNvGrpSpPr/>
+        <p:nvPr/>
+      </p:nvGrpSpPr>
+      <p:grpSpPr>
+        <a:xfrm>
+          <a:off x="0" y="0"/>
+          <a:ext cx="0" cy="0"/>
+          <a:chOff x="0" y="0"/>
+          <a:chExt cx="0" cy="0"/>
+        </a:xfrm>
+      </p:grpSpPr>
+      <p:sp>
+        <p:nvSpPr>
+          <p:cNvPr id="2" name="Title 1">
+            <a:extLst>
+              <a:ext uri="{FF2B5EF4-FFF2-40B4-BE49-F238E27FC236}">
+                <a16:creationId xmlns:a16="http://schemas.microsoft.com/office/drawing/2014/main" id="{78C4E427-B3E0-A637-07E0-E7CC1CCAF771}"/>
+              </a:ext>
+            </a:extLst>
+          </p:cNvPr>
+          <p:cNvSpPr>
+            <a:spLocks noGrp="1"/>
+          </p:cNvSpPr>
+          <p:nvPr>
+            <p:ph type="title"/>
+          </p:nvPr>
+        </p:nvSpPr>
+        <p:spPr/>
+        <p:txBody>
+          <a:bodyPr/>
+          <a:lstStyle/>
+          <a:p>
+            <a:endParaRPr lang="en-US" dirty="0"/>
+          </a:p>
+        </p:txBody>
+      </p:sp>
+      <p:sp>
+        <p:nvSpPr>
+          <p:cNvPr id="3" name="Content Placeholder 2">
+            <a:extLst>
+              <a:ext uri="{FF2B5EF4-FFF2-40B4-BE49-F238E27FC236}">
+                <a16:creationId xmlns:a16="http://schemas.microsoft.com/office/drawing/2014/main" id="{75BD79DB-2B9E-3328-C04C-98968AB92407}"/>
+              </a:ext>
+            </a:extLst>
+          </p:cNvPr>
+          <p:cNvSpPr>
+            <a:spLocks noGrp="1"/>
+          </p:cNvSpPr>
+          <p:nvPr>
+            <p:ph idx="1"/>
+          </p:nvPr>
+        </p:nvSpPr>
+        <p:spPr/>
+        <p:txBody>
+          <a:bodyPr>
+            <a:normAutofit/>
+          </a:bodyPr>
+          <a:lstStyle/>
+          <a:p>
+            <a:pPr marL="0" indent="0" algn="ctr" fontAlgn="ctr">
+              <a:buNone/>
+            </a:pPr>
+            <a:r>
+              <a:rPr lang="en-US" sz="4400" b="1" dirty="0"/>
+              <a:t>What is the Type II error rate?</a:t>
+            </a:r>
+          </a:p>
+        </p:txBody>
+      </p:sp>
+    </p:spTree>
+    <p:extLst>
+      <p:ext uri="{BB962C8B-B14F-4D97-AF65-F5344CB8AC3E}">
+        <p14:creationId xmlns:p14="http://schemas.microsoft.com/office/powerpoint/2010/main" val="3727434693"/>
+      </p:ext>
+    </p:extLst>
+  </p:cSld>
+  <p:clrMapOvr>
+    <a:masterClrMapping/>
+  </p:clrMapOvr>
+</p:sld>
+</file>
+
+<file path=ppt/slides/slide53.xml><?xml version="1.0" encoding="utf-8"?>
+<p:sld xmlns:a="http://schemas.openxmlformats.org/drawingml/2006/main" xmlns:r="http://schemas.openxmlformats.org/officeDocument/2006/relationships" xmlns:p="http://schemas.openxmlformats.org/presentationml/2006/main">
+  <p:cSld>
+    <p:spTree>
+      <p:nvGrpSpPr>
+        <p:cNvPr id="1" name="">
+          <a:extLst>
+            <a:ext uri="{FF2B5EF4-FFF2-40B4-BE49-F238E27FC236}">
+              <a16:creationId xmlns:a16="http://schemas.microsoft.com/office/drawing/2014/main" id="{9071ACFF-D4E3-50CB-B617-9AC8D3021C8C}"/>
+            </a:ext>
+          </a:extLst>
+        </p:cNvPr>
+        <p:cNvGrpSpPr/>
+        <p:nvPr/>
+      </p:nvGrpSpPr>
+      <p:grpSpPr>
+        <a:xfrm>
+          <a:off x="0" y="0"/>
+          <a:ext cx="0" cy="0"/>
+          <a:chOff x="0" y="0"/>
+          <a:chExt cx="0" cy="0"/>
+        </a:xfrm>
+      </p:grpSpPr>
+      <p:sp>
+        <p:nvSpPr>
+          <p:cNvPr id="2" name="Title 1">
+            <a:extLst>
+              <a:ext uri="{FF2B5EF4-FFF2-40B4-BE49-F238E27FC236}">
+                <a16:creationId xmlns:a16="http://schemas.microsoft.com/office/drawing/2014/main" id="{6AEDBE3F-B391-2521-D1A6-FD6D6358EFC0}"/>
+              </a:ext>
+            </a:extLst>
+          </p:cNvPr>
+          <p:cNvSpPr>
+            <a:spLocks noGrp="1"/>
+          </p:cNvSpPr>
+          <p:nvPr>
+            <p:ph type="title"/>
+          </p:nvPr>
+        </p:nvSpPr>
+        <p:spPr/>
+        <p:txBody>
+          <a:bodyPr/>
+          <a:lstStyle/>
+          <a:p>
+            <a:r>
+              <a:rPr lang="en-US" dirty="0"/>
+              <a:t>We’ve Got the Power-$600</a:t>
+            </a:r>
+          </a:p>
+        </p:txBody>
+      </p:sp>
+      <p:sp>
+        <p:nvSpPr>
+          <p:cNvPr id="3" name="Content Placeholder 2">
+            <a:extLst>
+              <a:ext uri="{FF2B5EF4-FFF2-40B4-BE49-F238E27FC236}">
+                <a16:creationId xmlns:a16="http://schemas.microsoft.com/office/drawing/2014/main" id="{2D91D78C-E707-C04A-CAAB-B49154CAD980}"/>
+              </a:ext>
+            </a:extLst>
+          </p:cNvPr>
+          <p:cNvSpPr>
+            <a:spLocks noGrp="1"/>
+          </p:cNvSpPr>
+          <p:nvPr>
+            <p:ph idx="1"/>
+          </p:nvPr>
+        </p:nvSpPr>
+        <p:spPr/>
+        <p:txBody>
+          <a:bodyPr>
+            <a:normAutofit/>
+          </a:bodyPr>
+          <a:lstStyle/>
+          <a:p>
+            <a:pPr marL="0" indent="0" fontAlgn="ctr">
+              <a:buNone/>
+            </a:pPr>
+            <a:r>
+              <a:rPr lang="en-US" sz="4400" dirty="0"/>
+              <a:t>In a situation where both parametric or non-parametric tests are valid, using this type of test with result in greater statistical power.</a:t>
+            </a:r>
+          </a:p>
+        </p:txBody>
+      </p:sp>
+    </p:spTree>
+    <p:extLst>
+      <p:ext uri="{BB962C8B-B14F-4D97-AF65-F5344CB8AC3E}">
+        <p14:creationId xmlns:p14="http://schemas.microsoft.com/office/powerpoint/2010/main" val="3518267385"/>
+      </p:ext>
+    </p:extLst>
+  </p:cSld>
+  <p:clrMapOvr>
+    <a:masterClrMapping/>
+  </p:clrMapOvr>
+</p:sld>
+</file>
+
+<file path=ppt/slides/slide54.xml><?xml version="1.0" encoding="utf-8"?>
+<p:sld xmlns:a="http://schemas.openxmlformats.org/drawingml/2006/main" xmlns:r="http://schemas.openxmlformats.org/officeDocument/2006/relationships" xmlns:p="http://schemas.openxmlformats.org/presentationml/2006/main">
+  <p:cSld>
+    <p:spTree>
+      <p:nvGrpSpPr>
+        <p:cNvPr id="1" name="">
+          <a:extLst>
+            <a:ext uri="{FF2B5EF4-FFF2-40B4-BE49-F238E27FC236}">
+              <a16:creationId xmlns:a16="http://schemas.microsoft.com/office/drawing/2014/main" id="{23DA832C-AEFE-46B7-30CF-B92C9E6C8FF6}"/>
+            </a:ext>
+          </a:extLst>
+        </p:cNvPr>
+        <p:cNvGrpSpPr/>
+        <p:nvPr/>
+      </p:nvGrpSpPr>
+      <p:grpSpPr>
+        <a:xfrm>
+          <a:off x="0" y="0"/>
+          <a:ext cx="0" cy="0"/>
+          <a:chOff x="0" y="0"/>
+          <a:chExt cx="0" cy="0"/>
+        </a:xfrm>
+      </p:grpSpPr>
+      <p:sp>
+        <p:nvSpPr>
+          <p:cNvPr id="2" name="Title 1">
+            <a:extLst>
+              <a:ext uri="{FF2B5EF4-FFF2-40B4-BE49-F238E27FC236}">
+                <a16:creationId xmlns:a16="http://schemas.microsoft.com/office/drawing/2014/main" id="{99E6D5D0-3358-09DC-9C06-35CCA53D0A22}"/>
+              </a:ext>
+            </a:extLst>
+          </p:cNvPr>
+          <p:cNvSpPr>
+            <a:spLocks noGrp="1"/>
+          </p:cNvSpPr>
+          <p:nvPr>
+            <p:ph type="title"/>
+          </p:nvPr>
+        </p:nvSpPr>
+        <p:spPr/>
+        <p:txBody>
+          <a:bodyPr/>
+          <a:lstStyle/>
+          <a:p>
+            <a:endParaRPr lang="en-US" dirty="0"/>
+          </a:p>
+        </p:txBody>
+      </p:sp>
+      <p:sp>
+        <p:nvSpPr>
+          <p:cNvPr id="3" name="Content Placeholder 2">
+            <a:extLst>
+              <a:ext uri="{FF2B5EF4-FFF2-40B4-BE49-F238E27FC236}">
+                <a16:creationId xmlns:a16="http://schemas.microsoft.com/office/drawing/2014/main" id="{9DF6EE67-E5A4-AA7D-9F2C-C00D42DE3E55}"/>
+              </a:ext>
+            </a:extLst>
+          </p:cNvPr>
+          <p:cNvSpPr>
+            <a:spLocks noGrp="1"/>
+          </p:cNvSpPr>
+          <p:nvPr>
+            <p:ph idx="1"/>
+          </p:nvPr>
+        </p:nvSpPr>
+        <p:spPr/>
+        <p:txBody>
+          <a:bodyPr>
+            <a:normAutofit/>
+          </a:bodyPr>
+          <a:lstStyle/>
+          <a:p>
+            <a:pPr marL="0" indent="0" algn="ctr" fontAlgn="ctr">
+              <a:buNone/>
+            </a:pPr>
+            <a:r>
+              <a:rPr lang="en-US" sz="4400" b="1" dirty="0"/>
+              <a:t>What is a parametric test?</a:t>
+            </a:r>
+          </a:p>
+        </p:txBody>
+      </p:sp>
+    </p:spTree>
+    <p:extLst>
+      <p:ext uri="{BB962C8B-B14F-4D97-AF65-F5344CB8AC3E}">
+        <p14:creationId xmlns:p14="http://schemas.microsoft.com/office/powerpoint/2010/main" val="2988638950"/>
+      </p:ext>
+    </p:extLst>
+  </p:cSld>
+  <p:clrMapOvr>
+    <a:masterClrMapping/>
+  </p:clrMapOvr>
+</p:sld>
+</file>
+
+<file path=ppt/slides/slide55.xml><?xml version="1.0" encoding="utf-8"?>
+<p:sld xmlns:a="http://schemas.openxmlformats.org/drawingml/2006/main" xmlns:r="http://schemas.openxmlformats.org/officeDocument/2006/relationships" xmlns:p="http://schemas.openxmlformats.org/presentationml/2006/main">
+  <p:cSld>
+    <p:spTree>
+      <p:nvGrpSpPr>
+        <p:cNvPr id="1" name="">
+          <a:extLst>
+            <a:ext uri="{FF2B5EF4-FFF2-40B4-BE49-F238E27FC236}">
+              <a16:creationId xmlns:a16="http://schemas.microsoft.com/office/drawing/2014/main" id="{00E94CA5-B13B-828B-6C9C-D5439B1138A7}"/>
+            </a:ext>
+          </a:extLst>
+        </p:cNvPr>
+        <p:cNvGrpSpPr/>
+        <p:nvPr/>
+      </p:nvGrpSpPr>
+      <p:grpSpPr>
+        <a:xfrm>
+          <a:off x="0" y="0"/>
+          <a:ext cx="0" cy="0"/>
+          <a:chOff x="0" y="0"/>
+          <a:chExt cx="0" cy="0"/>
+        </a:xfrm>
+      </p:grpSpPr>
+      <p:sp>
+        <p:nvSpPr>
+          <p:cNvPr id="2" name="Title 1">
+            <a:extLst>
+              <a:ext uri="{FF2B5EF4-FFF2-40B4-BE49-F238E27FC236}">
+                <a16:creationId xmlns:a16="http://schemas.microsoft.com/office/drawing/2014/main" id="{8F655055-5687-7F50-D66A-F8A9451762B2}"/>
+              </a:ext>
+            </a:extLst>
+          </p:cNvPr>
+          <p:cNvSpPr>
+            <a:spLocks noGrp="1"/>
+          </p:cNvSpPr>
+          <p:nvPr>
+            <p:ph type="title"/>
+          </p:nvPr>
+        </p:nvSpPr>
+        <p:spPr/>
+        <p:txBody>
+          <a:bodyPr/>
+          <a:lstStyle/>
+          <a:p>
+            <a:r>
+              <a:rPr lang="en-US" dirty="0"/>
+              <a:t>We’ve Got the Power-$800</a:t>
+            </a:r>
+          </a:p>
+        </p:txBody>
+      </p:sp>
+      <p:sp>
+        <p:nvSpPr>
+          <p:cNvPr id="3" name="Content Placeholder 2">
+            <a:extLst>
+              <a:ext uri="{FF2B5EF4-FFF2-40B4-BE49-F238E27FC236}">
+                <a16:creationId xmlns:a16="http://schemas.microsoft.com/office/drawing/2014/main" id="{FF172B1B-90C7-E729-DFD9-CC4201F80F8C}"/>
+              </a:ext>
+            </a:extLst>
+          </p:cNvPr>
+          <p:cNvSpPr>
+            <a:spLocks noGrp="1"/>
+          </p:cNvSpPr>
+          <p:nvPr>
+            <p:ph idx="1"/>
+          </p:nvPr>
+        </p:nvSpPr>
+        <p:spPr/>
+        <p:txBody>
+          <a:bodyPr>
+            <a:normAutofit/>
+          </a:bodyPr>
+          <a:lstStyle/>
+          <a:p>
+            <a:pPr marL="0" indent="0" fontAlgn="ctr">
+              <a:buNone/>
+            </a:pPr>
+            <a:r>
+              <a:rPr lang="en-US" sz="4400" dirty="0"/>
+              <a:t>This test will have greater statistical power than a sign test when the differences in medians are symmetrically distributed.</a:t>
+            </a:r>
+          </a:p>
+          <a:p>
+            <a:pPr marL="0" indent="0" fontAlgn="ctr">
+              <a:buNone/>
+            </a:pPr>
+            <a:endParaRPr lang="en-US" sz="4400" dirty="0"/>
+          </a:p>
+        </p:txBody>
+      </p:sp>
+    </p:spTree>
+    <p:extLst>
+      <p:ext uri="{BB962C8B-B14F-4D97-AF65-F5344CB8AC3E}">
+        <p14:creationId xmlns:p14="http://schemas.microsoft.com/office/powerpoint/2010/main" val="1123777924"/>
+      </p:ext>
+    </p:extLst>
+  </p:cSld>
+  <p:clrMapOvr>
+    <a:masterClrMapping/>
+  </p:clrMapOvr>
+</p:sld>
+</file>
+
+<file path=ppt/slides/slide56.xml><?xml version="1.0" encoding="utf-8"?>
+<p:sld xmlns:a="http://schemas.openxmlformats.org/drawingml/2006/main" xmlns:r="http://schemas.openxmlformats.org/officeDocument/2006/relationships" xmlns:p="http://schemas.openxmlformats.org/presentationml/2006/main">
+  <p:cSld>
+    <p:spTree>
+      <p:nvGrpSpPr>
+        <p:cNvPr id="1" name="">
+          <a:extLst>
+            <a:ext uri="{FF2B5EF4-FFF2-40B4-BE49-F238E27FC236}">
+              <a16:creationId xmlns:a16="http://schemas.microsoft.com/office/drawing/2014/main" id="{39AD94C1-3246-EAEE-782A-6733210BDDD7}"/>
+            </a:ext>
+          </a:extLst>
+        </p:cNvPr>
+        <p:cNvGrpSpPr/>
+        <p:nvPr/>
+      </p:nvGrpSpPr>
+      <p:grpSpPr>
+        <a:xfrm>
+          <a:off x="0" y="0"/>
+          <a:ext cx="0" cy="0"/>
+          <a:chOff x="0" y="0"/>
+          <a:chExt cx="0" cy="0"/>
+        </a:xfrm>
+      </p:grpSpPr>
+      <p:sp>
+        <p:nvSpPr>
+          <p:cNvPr id="2" name="Title 1">
+            <a:extLst>
+              <a:ext uri="{FF2B5EF4-FFF2-40B4-BE49-F238E27FC236}">
+                <a16:creationId xmlns:a16="http://schemas.microsoft.com/office/drawing/2014/main" id="{48BEF76A-D8C7-D2A1-06C6-3919F15A5175}"/>
+              </a:ext>
+            </a:extLst>
+          </p:cNvPr>
+          <p:cNvSpPr>
+            <a:spLocks noGrp="1"/>
+          </p:cNvSpPr>
+          <p:nvPr>
+            <p:ph type="title"/>
+          </p:nvPr>
+        </p:nvSpPr>
+        <p:spPr/>
+        <p:txBody>
+          <a:bodyPr/>
+          <a:lstStyle/>
+          <a:p>
+            <a:endParaRPr lang="en-US" dirty="0"/>
+          </a:p>
+        </p:txBody>
+      </p:sp>
+      <p:sp>
+        <p:nvSpPr>
+          <p:cNvPr id="3" name="Content Placeholder 2">
+            <a:extLst>
+              <a:ext uri="{FF2B5EF4-FFF2-40B4-BE49-F238E27FC236}">
+                <a16:creationId xmlns:a16="http://schemas.microsoft.com/office/drawing/2014/main" id="{CC902FC5-0290-D412-4494-63A0B06F4F8A}"/>
+              </a:ext>
+            </a:extLst>
+          </p:cNvPr>
+          <p:cNvSpPr>
+            <a:spLocks noGrp="1"/>
+          </p:cNvSpPr>
+          <p:nvPr>
+            <p:ph idx="1"/>
+          </p:nvPr>
+        </p:nvSpPr>
+        <p:spPr/>
+        <p:txBody>
+          <a:bodyPr>
+            <a:normAutofit/>
+          </a:bodyPr>
+          <a:lstStyle/>
+          <a:p>
+            <a:pPr marL="0" indent="0" algn="ctr" fontAlgn="ctr">
+              <a:buNone/>
+            </a:pPr>
+            <a:r>
+              <a:rPr lang="en-US" sz="4400" b="1" dirty="0"/>
+              <a:t>What is the Wilcoxon sign-rank test?</a:t>
+            </a:r>
+          </a:p>
+        </p:txBody>
+      </p:sp>
+    </p:spTree>
+    <p:extLst>
+      <p:ext uri="{BB962C8B-B14F-4D97-AF65-F5344CB8AC3E}">
+        <p14:creationId xmlns:p14="http://schemas.microsoft.com/office/powerpoint/2010/main" val="3582371440"/>
+      </p:ext>
+    </p:extLst>
+  </p:cSld>
+  <p:clrMapOvr>
+    <a:masterClrMapping/>
+  </p:clrMapOvr>
+</p:sld>
+</file>
+
+<file path=ppt/slides/slide57.xml><?xml version="1.0" encoding="utf-8"?>
+<p:sld xmlns:a="http://schemas.openxmlformats.org/drawingml/2006/main" xmlns:r="http://schemas.openxmlformats.org/officeDocument/2006/relationships" xmlns:p="http://schemas.openxmlformats.org/presentationml/2006/main">
+  <p:cSld>
+    <p:spTree>
+      <p:nvGrpSpPr>
+        <p:cNvPr id="1" name="">
+          <a:extLst>
+            <a:ext uri="{FF2B5EF4-FFF2-40B4-BE49-F238E27FC236}">
+              <a16:creationId xmlns:a16="http://schemas.microsoft.com/office/drawing/2014/main" id="{111FAA3E-FEF9-E130-21AE-13CDAD4DBAE3}"/>
+            </a:ext>
+          </a:extLst>
+        </p:cNvPr>
+        <p:cNvGrpSpPr/>
+        <p:nvPr/>
+      </p:nvGrpSpPr>
+      <p:grpSpPr>
+        <a:xfrm>
+          <a:off x="0" y="0"/>
+          <a:ext cx="0" cy="0"/>
+          <a:chOff x="0" y="0"/>
+          <a:chExt cx="0" cy="0"/>
+        </a:xfrm>
+      </p:grpSpPr>
+      <p:sp>
+        <p:nvSpPr>
+          <p:cNvPr id="2" name="Title 1">
+            <a:extLst>
+              <a:ext uri="{FF2B5EF4-FFF2-40B4-BE49-F238E27FC236}">
+                <a16:creationId xmlns:a16="http://schemas.microsoft.com/office/drawing/2014/main" id="{E942EFDA-05D1-A194-8763-B66C1A0F77C0}"/>
+              </a:ext>
+            </a:extLst>
+          </p:cNvPr>
+          <p:cNvSpPr>
+            <a:spLocks noGrp="1"/>
+          </p:cNvSpPr>
+          <p:nvPr>
+            <p:ph type="title"/>
+          </p:nvPr>
+        </p:nvSpPr>
+        <p:spPr/>
+        <p:txBody>
+          <a:bodyPr/>
+          <a:lstStyle/>
+          <a:p>
+            <a:r>
+              <a:rPr lang="en-US" dirty="0"/>
+              <a:t>We’ve Got the Power-$1000</a:t>
+            </a:r>
+          </a:p>
+        </p:txBody>
+      </p:sp>
+      <p:sp>
+        <p:nvSpPr>
+          <p:cNvPr id="3" name="Content Placeholder 2">
+            <a:extLst>
+              <a:ext uri="{FF2B5EF4-FFF2-40B4-BE49-F238E27FC236}">
+                <a16:creationId xmlns:a16="http://schemas.microsoft.com/office/drawing/2014/main" id="{49D82089-506E-BA24-F704-C6966F8F60BD}"/>
+              </a:ext>
+            </a:extLst>
+          </p:cNvPr>
+          <p:cNvSpPr>
+            <a:spLocks noGrp="1"/>
+          </p:cNvSpPr>
+          <p:nvPr>
+            <p:ph idx="1"/>
+          </p:nvPr>
+        </p:nvSpPr>
+        <p:spPr/>
+        <p:txBody>
+          <a:bodyPr>
+            <a:normAutofit lnSpcReduction="10000"/>
+          </a:bodyPr>
+          <a:lstStyle/>
+          <a:p>
+            <a:pPr marL="0" indent="0">
+              <a:buNone/>
+            </a:pPr>
+            <a:r>
+              <a:rPr lang="en-US" sz="4400" dirty="0"/>
+              <a:t>The following R function will solve for this variable:</a:t>
+            </a:r>
+          </a:p>
+          <a:p>
+            <a:pPr marL="0" indent="0">
+              <a:buNone/>
+            </a:pPr>
+            <a:r>
+              <a:rPr lang="en-US" sz="3600" dirty="0" err="1"/>
+              <a:t>power.t.test</a:t>
+            </a:r>
+            <a:r>
+              <a:rPr lang="en-US" sz="3600" dirty="0"/>
+              <a:t>(n = 20,</a:t>
+            </a:r>
+          </a:p>
+          <a:p>
+            <a:pPr marL="0" indent="0">
+              <a:buNone/>
+            </a:pPr>
+            <a:r>
+              <a:rPr lang="en-US" sz="3600" dirty="0"/>
+              <a:t>                          </a:t>
+            </a:r>
+            <a:r>
+              <a:rPr lang="en-US" sz="3600" dirty="0" err="1"/>
+              <a:t>sd</a:t>
+            </a:r>
+            <a:r>
+              <a:rPr lang="en-US" sz="3600" dirty="0"/>
+              <a:t> = 3,</a:t>
+            </a:r>
+          </a:p>
+          <a:p>
+            <a:pPr marL="0" indent="0">
+              <a:buNone/>
+            </a:pPr>
+            <a:r>
+              <a:rPr lang="en-US" sz="3600" dirty="0"/>
+              <a:t>                          power = 0.80,</a:t>
+            </a:r>
+          </a:p>
+          <a:p>
+            <a:pPr marL="0" indent="0">
+              <a:buNone/>
+            </a:pPr>
+            <a:r>
+              <a:rPr lang="en-US" sz="3600" dirty="0"/>
+              <a:t>                          </a:t>
+            </a:r>
+            <a:r>
+              <a:rPr lang="en-US" sz="3600" dirty="0" err="1"/>
+              <a:t>sig.level</a:t>
+            </a:r>
+            <a:r>
+              <a:rPr lang="en-US" sz="3600" dirty="0"/>
+              <a:t> = 0.05,</a:t>
+            </a:r>
+          </a:p>
+          <a:p>
+            <a:pPr marL="0" indent="0">
+              <a:buNone/>
+            </a:pPr>
+            <a:r>
+              <a:rPr lang="en-US" sz="3600" dirty="0"/>
+              <a:t>		       type = “</a:t>
+            </a:r>
+            <a:r>
+              <a:rPr lang="en-US" sz="3600" dirty="0" err="1"/>
+              <a:t>one.sample</a:t>
+            </a:r>
+            <a:r>
+              <a:rPr lang="en-US" sz="3600" dirty="0"/>
+              <a:t>”)</a:t>
+            </a:r>
+          </a:p>
+          <a:p>
+            <a:pPr marL="0" indent="0">
+              <a:buNone/>
+            </a:pPr>
+            <a:endParaRPr lang="en-US" sz="4400" dirty="0"/>
+          </a:p>
+        </p:txBody>
+      </p:sp>
+    </p:spTree>
+    <p:extLst>
+      <p:ext uri="{BB962C8B-B14F-4D97-AF65-F5344CB8AC3E}">
+        <p14:creationId xmlns:p14="http://schemas.microsoft.com/office/powerpoint/2010/main" val="2914963963"/>
+      </p:ext>
+    </p:extLst>
+  </p:cSld>
+  <p:clrMapOvr>
+    <a:masterClrMapping/>
+  </p:clrMapOvr>
+</p:sld>
+</file>
+
+<file path=ppt/slides/slide58.xml><?xml version="1.0" encoding="utf-8"?>
+<p:sld xmlns:a="http://schemas.openxmlformats.org/drawingml/2006/main" xmlns:r="http://schemas.openxmlformats.org/officeDocument/2006/relationships" xmlns:p="http://schemas.openxmlformats.org/presentationml/2006/main">
+  <p:cSld>
+    <p:spTree>
+      <p:nvGrpSpPr>
+        <p:cNvPr id="1" name="">
+          <a:extLst>
+            <a:ext uri="{FF2B5EF4-FFF2-40B4-BE49-F238E27FC236}">
+              <a16:creationId xmlns:a16="http://schemas.microsoft.com/office/drawing/2014/main" id="{8734CE43-2615-4A67-3CFF-D511E1685806}"/>
+            </a:ext>
+          </a:extLst>
+        </p:cNvPr>
+        <p:cNvGrpSpPr/>
+        <p:nvPr/>
+      </p:nvGrpSpPr>
+      <p:grpSpPr>
+        <a:xfrm>
+          <a:off x="0" y="0"/>
+          <a:ext cx="0" cy="0"/>
+          <a:chOff x="0" y="0"/>
+          <a:chExt cx="0" cy="0"/>
+        </a:xfrm>
+      </p:grpSpPr>
+      <p:sp>
+        <p:nvSpPr>
+          <p:cNvPr id="2" name="Title 1">
+            <a:extLst>
+              <a:ext uri="{FF2B5EF4-FFF2-40B4-BE49-F238E27FC236}">
+                <a16:creationId xmlns:a16="http://schemas.microsoft.com/office/drawing/2014/main" id="{ABB2E9B0-7522-A5E7-AAFF-C59C2D83DF85}"/>
+              </a:ext>
+            </a:extLst>
+          </p:cNvPr>
+          <p:cNvSpPr>
+            <a:spLocks noGrp="1"/>
+          </p:cNvSpPr>
+          <p:nvPr>
+            <p:ph type="title"/>
+          </p:nvPr>
+        </p:nvSpPr>
+        <p:spPr/>
+        <p:txBody>
+          <a:bodyPr/>
+          <a:lstStyle/>
+          <a:p>
+            <a:endParaRPr lang="en-US" dirty="0"/>
+          </a:p>
+        </p:txBody>
+      </p:sp>
+      <p:sp>
+        <p:nvSpPr>
+          <p:cNvPr id="3" name="Content Placeholder 2">
+            <a:extLst>
+              <a:ext uri="{FF2B5EF4-FFF2-40B4-BE49-F238E27FC236}">
+                <a16:creationId xmlns:a16="http://schemas.microsoft.com/office/drawing/2014/main" id="{CA30F860-183D-4072-AB53-655EC901288F}"/>
+              </a:ext>
+            </a:extLst>
+          </p:cNvPr>
+          <p:cNvSpPr>
+            <a:spLocks noGrp="1"/>
+          </p:cNvSpPr>
+          <p:nvPr>
+            <p:ph idx="1"/>
+          </p:nvPr>
+        </p:nvSpPr>
+        <p:spPr/>
+        <p:txBody>
+          <a:bodyPr>
+            <a:normAutofit/>
+          </a:bodyPr>
+          <a:lstStyle/>
+          <a:p>
+            <a:pPr marL="0" indent="0" algn="ctr" fontAlgn="ctr">
+              <a:buNone/>
+            </a:pPr>
+            <a:r>
+              <a:rPr lang="en-US" sz="4400" b="1" dirty="0"/>
+              <a:t>What is the effect size/delta?</a:t>
+            </a:r>
+          </a:p>
+        </p:txBody>
+      </p:sp>
+    </p:spTree>
+    <p:extLst>
+      <p:ext uri="{BB962C8B-B14F-4D97-AF65-F5344CB8AC3E}">
+        <p14:creationId xmlns:p14="http://schemas.microsoft.com/office/powerpoint/2010/main" val="2665824334"/>
+      </p:ext>
+    </p:extLst>
+  </p:cSld>
+  <p:clrMapOvr>
+    <a:masterClrMapping/>
+  </p:clrMapOvr>
+</p:sld>
+</file>
+
+<file path=ppt/slides/slide59.xml><?xml version="1.0" encoding="utf-8"?>
+<p:sld xmlns:a="http://schemas.openxmlformats.org/drawingml/2006/main" xmlns:r="http://schemas.openxmlformats.org/officeDocument/2006/relationships" xmlns:p="http://schemas.openxmlformats.org/presentationml/2006/main">
+  <p:cSld>
+    <p:spTree>
+      <p:nvGrpSpPr>
+        <p:cNvPr id="1" name="">
+          <a:extLst>
+            <a:ext uri="{FF2B5EF4-FFF2-40B4-BE49-F238E27FC236}">
+              <a16:creationId xmlns:a16="http://schemas.microsoft.com/office/drawing/2014/main" id="{D498413F-4556-7C71-1E86-3BA240BBBEED}"/>
+            </a:ext>
+          </a:extLst>
+        </p:cNvPr>
+        <p:cNvGrpSpPr/>
+        <p:nvPr/>
+      </p:nvGrpSpPr>
+      <p:grpSpPr>
+        <a:xfrm>
+          <a:off x="0" y="0"/>
+          <a:ext cx="0" cy="0"/>
+          <a:chOff x="0" y="0"/>
+          <a:chExt cx="0" cy="0"/>
+        </a:xfrm>
+      </p:grpSpPr>
+      <p:sp>
+        <p:nvSpPr>
+          <p:cNvPr id="2" name="Title 1">
+            <a:extLst>
+              <a:ext uri="{FF2B5EF4-FFF2-40B4-BE49-F238E27FC236}">
+                <a16:creationId xmlns:a16="http://schemas.microsoft.com/office/drawing/2014/main" id="{33903F01-972C-817A-90F1-5C52C9B2086C}"/>
+              </a:ext>
+            </a:extLst>
+          </p:cNvPr>
+          <p:cNvSpPr>
+            <a:spLocks noGrp="1"/>
+          </p:cNvSpPr>
+          <p:nvPr>
+            <p:ph type="title"/>
+          </p:nvPr>
+        </p:nvSpPr>
+        <p:spPr/>
+        <p:txBody>
+          <a:bodyPr/>
+          <a:lstStyle/>
+          <a:p>
+            <a:r>
+              <a:rPr lang="en-US" dirty="0"/>
+              <a:t>Miscellany-$200</a:t>
+            </a:r>
+          </a:p>
+        </p:txBody>
+      </p:sp>
+      <p:sp>
+        <p:nvSpPr>
+          <p:cNvPr id="3" name="Content Placeholder 2">
+            <a:extLst>
+              <a:ext uri="{FF2B5EF4-FFF2-40B4-BE49-F238E27FC236}">
+                <a16:creationId xmlns:a16="http://schemas.microsoft.com/office/drawing/2014/main" id="{799B7959-9E90-C6D7-59CB-ABE2F77FC605}"/>
+              </a:ext>
+            </a:extLst>
+          </p:cNvPr>
+          <p:cNvSpPr>
+            <a:spLocks noGrp="1"/>
+          </p:cNvSpPr>
+          <p:nvPr>
+            <p:ph idx="1"/>
+          </p:nvPr>
+        </p:nvSpPr>
+        <p:spPr/>
+        <p:txBody>
+          <a:bodyPr>
+            <a:normAutofit/>
+          </a:bodyPr>
+          <a:lstStyle/>
+          <a:p>
+            <a:pPr marL="0" indent="0" fontAlgn="ctr">
+              <a:buNone/>
+            </a:pPr>
+            <a:r>
+              <a:rPr lang="en-US" sz="4400" dirty="0"/>
+              <a:t>This R package allows us to read and manipulate spatial data.</a:t>
+            </a:r>
+          </a:p>
+        </p:txBody>
+      </p:sp>
+    </p:spTree>
+    <p:extLst>
+      <p:ext uri="{BB962C8B-B14F-4D97-AF65-F5344CB8AC3E}">
+        <p14:creationId xmlns:p14="http://schemas.microsoft.com/office/powerpoint/2010/main" val="1858500134"/>
+      </p:ext>
+    </p:extLst>
+  </p:cSld>
+  <p:clrMapOvr>
+    <a:masterClrMapping/>
+  </p:clrMapOvr>
+</p:sld>
+</file>
+
+<file path=ppt/slides/slide6.xml><?xml version="1.0" encoding="utf-8"?>
 <p:sld xmlns:a="http://schemas.openxmlformats.org/drawingml/2006/main" xmlns:r="http://schemas.openxmlformats.org/officeDocument/2006/relationships" xmlns:p="http://schemas.openxmlformats.org/presentationml/2006/main">
   <p:cSld>
     <p:spTree>
@@ -7895,953 +9046,7 @@
 </p:sld>
 </file>
 
-<file path=ppt/slides/slide50.xml><?xml version="1.0" encoding="utf-8"?>
-<p:sld xmlns:a="http://schemas.openxmlformats.org/drawingml/2006/main" xmlns:r="http://schemas.openxmlformats.org/officeDocument/2006/relationships" xmlns:p="http://schemas.openxmlformats.org/presentationml/2006/main">
-  <p:cSld>
-    <p:spTree>
-      <p:nvGrpSpPr>
-        <p:cNvPr id="1" name="">
-          <a:extLst>
-            <a:ext uri="{FF2B5EF4-FFF2-40B4-BE49-F238E27FC236}">
-              <a16:creationId xmlns:a16="http://schemas.microsoft.com/office/drawing/2014/main" id="{B8EAC64F-3244-2895-4473-E64071EB4FE8}"/>
-            </a:ext>
-          </a:extLst>
-        </p:cNvPr>
-        <p:cNvGrpSpPr/>
-        <p:nvPr/>
-      </p:nvGrpSpPr>
-      <p:grpSpPr>
-        <a:xfrm>
-          <a:off x="0" y="0"/>
-          <a:ext cx="0" cy="0"/>
-          <a:chOff x="0" y="0"/>
-          <a:chExt cx="0" cy="0"/>
-        </a:xfrm>
-      </p:grpSpPr>
-      <p:sp>
-        <p:nvSpPr>
-          <p:cNvPr id="2" name="Title 1">
-            <a:extLst>
-              <a:ext uri="{FF2B5EF4-FFF2-40B4-BE49-F238E27FC236}">
-                <a16:creationId xmlns:a16="http://schemas.microsoft.com/office/drawing/2014/main" id="{EBF3E609-02E3-B563-2B11-BC2657977C19}"/>
-              </a:ext>
-            </a:extLst>
-          </p:cNvPr>
-          <p:cNvSpPr>
-            <a:spLocks noGrp="1"/>
-          </p:cNvSpPr>
-          <p:nvPr>
-            <p:ph type="title"/>
-          </p:nvPr>
-        </p:nvSpPr>
-        <p:spPr/>
-        <p:txBody>
-          <a:bodyPr/>
-          <a:lstStyle/>
-          <a:p>
-            <a:r>
-              <a:rPr lang="en-US" dirty="0"/>
-              <a:t>We’ve Got the Power-$400</a:t>
-            </a:r>
-          </a:p>
-        </p:txBody>
-      </p:sp>
-      <p:sp>
-        <p:nvSpPr>
-          <p:cNvPr id="3" name="Content Placeholder 2">
-            <a:extLst>
-              <a:ext uri="{FF2B5EF4-FFF2-40B4-BE49-F238E27FC236}">
-                <a16:creationId xmlns:a16="http://schemas.microsoft.com/office/drawing/2014/main" id="{F4F2212A-C9E6-007B-BDE1-7B4A69455FED}"/>
-              </a:ext>
-            </a:extLst>
-          </p:cNvPr>
-          <p:cNvSpPr>
-            <a:spLocks noGrp="1"/>
-          </p:cNvSpPr>
-          <p:nvPr>
-            <p:ph idx="1"/>
-          </p:nvPr>
-        </p:nvSpPr>
-        <p:spPr/>
-        <p:txBody>
-          <a:bodyPr>
-            <a:normAutofit/>
-          </a:bodyPr>
-          <a:lstStyle/>
-          <a:p>
-            <a:pPr marL="0" indent="0" fontAlgn="ctr">
-              <a:buNone/>
-            </a:pPr>
-            <a:r>
-              <a:rPr lang="en-US" sz="4400" dirty="0"/>
-              <a:t>This rate is the complement of the power.</a:t>
-            </a:r>
-          </a:p>
-        </p:txBody>
-      </p:sp>
-    </p:spTree>
-    <p:extLst>
-      <p:ext uri="{BB962C8B-B14F-4D97-AF65-F5344CB8AC3E}">
-        <p14:creationId xmlns:p14="http://schemas.microsoft.com/office/powerpoint/2010/main" val="2198408981"/>
-      </p:ext>
-    </p:extLst>
-  </p:cSld>
-  <p:clrMapOvr>
-    <a:masterClrMapping/>
-  </p:clrMapOvr>
-</p:sld>
-</file>
-
-<file path=ppt/slides/slide51.xml><?xml version="1.0" encoding="utf-8"?>
-<p:sld xmlns:a="http://schemas.openxmlformats.org/drawingml/2006/main" xmlns:r="http://schemas.openxmlformats.org/officeDocument/2006/relationships" xmlns:p="http://schemas.openxmlformats.org/presentationml/2006/main">
-  <p:cSld>
-    <p:spTree>
-      <p:nvGrpSpPr>
-        <p:cNvPr id="1" name="">
-          <a:extLst>
-            <a:ext uri="{FF2B5EF4-FFF2-40B4-BE49-F238E27FC236}">
-              <a16:creationId xmlns:a16="http://schemas.microsoft.com/office/drawing/2014/main" id="{B1D108A0-5BE9-C12F-580A-A887CF1E38CA}"/>
-            </a:ext>
-          </a:extLst>
-        </p:cNvPr>
-        <p:cNvGrpSpPr/>
-        <p:nvPr/>
-      </p:nvGrpSpPr>
-      <p:grpSpPr>
-        <a:xfrm>
-          <a:off x="0" y="0"/>
-          <a:ext cx="0" cy="0"/>
-          <a:chOff x="0" y="0"/>
-          <a:chExt cx="0" cy="0"/>
-        </a:xfrm>
-      </p:grpSpPr>
-      <p:sp>
-        <p:nvSpPr>
-          <p:cNvPr id="2" name="Title 1">
-            <a:extLst>
-              <a:ext uri="{FF2B5EF4-FFF2-40B4-BE49-F238E27FC236}">
-                <a16:creationId xmlns:a16="http://schemas.microsoft.com/office/drawing/2014/main" id="{78C4E427-B3E0-A637-07E0-E7CC1CCAF771}"/>
-              </a:ext>
-            </a:extLst>
-          </p:cNvPr>
-          <p:cNvSpPr>
-            <a:spLocks noGrp="1"/>
-          </p:cNvSpPr>
-          <p:nvPr>
-            <p:ph type="title"/>
-          </p:nvPr>
-        </p:nvSpPr>
-        <p:spPr/>
-        <p:txBody>
-          <a:bodyPr/>
-          <a:lstStyle/>
-          <a:p>
-            <a:endParaRPr lang="en-US" dirty="0"/>
-          </a:p>
-        </p:txBody>
-      </p:sp>
-      <p:sp>
-        <p:nvSpPr>
-          <p:cNvPr id="3" name="Content Placeholder 2">
-            <a:extLst>
-              <a:ext uri="{FF2B5EF4-FFF2-40B4-BE49-F238E27FC236}">
-                <a16:creationId xmlns:a16="http://schemas.microsoft.com/office/drawing/2014/main" id="{75BD79DB-2B9E-3328-C04C-98968AB92407}"/>
-              </a:ext>
-            </a:extLst>
-          </p:cNvPr>
-          <p:cNvSpPr>
-            <a:spLocks noGrp="1"/>
-          </p:cNvSpPr>
-          <p:nvPr>
-            <p:ph idx="1"/>
-          </p:nvPr>
-        </p:nvSpPr>
-        <p:spPr/>
-        <p:txBody>
-          <a:bodyPr>
-            <a:normAutofit/>
-          </a:bodyPr>
-          <a:lstStyle/>
-          <a:p>
-            <a:pPr marL="0" indent="0" algn="ctr" fontAlgn="ctr">
-              <a:buNone/>
-            </a:pPr>
-            <a:r>
-              <a:rPr lang="en-US" sz="4400" b="1" dirty="0"/>
-              <a:t>What is the Type II error rate?</a:t>
-            </a:r>
-          </a:p>
-        </p:txBody>
-      </p:sp>
-    </p:spTree>
-    <p:extLst>
-      <p:ext uri="{BB962C8B-B14F-4D97-AF65-F5344CB8AC3E}">
-        <p14:creationId xmlns:p14="http://schemas.microsoft.com/office/powerpoint/2010/main" val="3727434693"/>
-      </p:ext>
-    </p:extLst>
-  </p:cSld>
-  <p:clrMapOvr>
-    <a:masterClrMapping/>
-  </p:clrMapOvr>
-</p:sld>
-</file>
-
-<file path=ppt/slides/slide52.xml><?xml version="1.0" encoding="utf-8"?>
-<p:sld xmlns:a="http://schemas.openxmlformats.org/drawingml/2006/main" xmlns:r="http://schemas.openxmlformats.org/officeDocument/2006/relationships" xmlns:p="http://schemas.openxmlformats.org/presentationml/2006/main">
-  <p:cSld>
-    <p:spTree>
-      <p:nvGrpSpPr>
-        <p:cNvPr id="1" name="">
-          <a:extLst>
-            <a:ext uri="{FF2B5EF4-FFF2-40B4-BE49-F238E27FC236}">
-              <a16:creationId xmlns:a16="http://schemas.microsoft.com/office/drawing/2014/main" id="{9071ACFF-D4E3-50CB-B617-9AC8D3021C8C}"/>
-            </a:ext>
-          </a:extLst>
-        </p:cNvPr>
-        <p:cNvGrpSpPr/>
-        <p:nvPr/>
-      </p:nvGrpSpPr>
-      <p:grpSpPr>
-        <a:xfrm>
-          <a:off x="0" y="0"/>
-          <a:ext cx="0" cy="0"/>
-          <a:chOff x="0" y="0"/>
-          <a:chExt cx="0" cy="0"/>
-        </a:xfrm>
-      </p:grpSpPr>
-      <p:sp>
-        <p:nvSpPr>
-          <p:cNvPr id="2" name="Title 1">
-            <a:extLst>
-              <a:ext uri="{FF2B5EF4-FFF2-40B4-BE49-F238E27FC236}">
-                <a16:creationId xmlns:a16="http://schemas.microsoft.com/office/drawing/2014/main" id="{6AEDBE3F-B391-2521-D1A6-FD6D6358EFC0}"/>
-              </a:ext>
-            </a:extLst>
-          </p:cNvPr>
-          <p:cNvSpPr>
-            <a:spLocks noGrp="1"/>
-          </p:cNvSpPr>
-          <p:nvPr>
-            <p:ph type="title"/>
-          </p:nvPr>
-        </p:nvSpPr>
-        <p:spPr/>
-        <p:txBody>
-          <a:bodyPr/>
-          <a:lstStyle/>
-          <a:p>
-            <a:r>
-              <a:rPr lang="en-US" dirty="0"/>
-              <a:t>We’ve Got the Power-$600</a:t>
-            </a:r>
-          </a:p>
-        </p:txBody>
-      </p:sp>
-      <p:sp>
-        <p:nvSpPr>
-          <p:cNvPr id="3" name="Content Placeholder 2">
-            <a:extLst>
-              <a:ext uri="{FF2B5EF4-FFF2-40B4-BE49-F238E27FC236}">
-                <a16:creationId xmlns:a16="http://schemas.microsoft.com/office/drawing/2014/main" id="{2D91D78C-E707-C04A-CAAB-B49154CAD980}"/>
-              </a:ext>
-            </a:extLst>
-          </p:cNvPr>
-          <p:cNvSpPr>
-            <a:spLocks noGrp="1"/>
-          </p:cNvSpPr>
-          <p:nvPr>
-            <p:ph idx="1"/>
-          </p:nvPr>
-        </p:nvSpPr>
-        <p:spPr/>
-        <p:txBody>
-          <a:bodyPr>
-            <a:normAutofit/>
-          </a:bodyPr>
-          <a:lstStyle/>
-          <a:p>
-            <a:pPr marL="0" indent="0" fontAlgn="ctr">
-              <a:buNone/>
-            </a:pPr>
-            <a:r>
-              <a:rPr lang="en-US" sz="4400" dirty="0"/>
-              <a:t>In a situation where both parametric or non-parametric tests are valid, using this type of test with result in greater statistical power.</a:t>
-            </a:r>
-          </a:p>
-        </p:txBody>
-      </p:sp>
-    </p:spTree>
-    <p:extLst>
-      <p:ext uri="{BB962C8B-B14F-4D97-AF65-F5344CB8AC3E}">
-        <p14:creationId xmlns:p14="http://schemas.microsoft.com/office/powerpoint/2010/main" val="3518267385"/>
-      </p:ext>
-    </p:extLst>
-  </p:cSld>
-  <p:clrMapOvr>
-    <a:masterClrMapping/>
-  </p:clrMapOvr>
-</p:sld>
-</file>
-
-<file path=ppt/slides/slide53.xml><?xml version="1.0" encoding="utf-8"?>
-<p:sld xmlns:a="http://schemas.openxmlformats.org/drawingml/2006/main" xmlns:r="http://schemas.openxmlformats.org/officeDocument/2006/relationships" xmlns:p="http://schemas.openxmlformats.org/presentationml/2006/main">
-  <p:cSld>
-    <p:spTree>
-      <p:nvGrpSpPr>
-        <p:cNvPr id="1" name="">
-          <a:extLst>
-            <a:ext uri="{FF2B5EF4-FFF2-40B4-BE49-F238E27FC236}">
-              <a16:creationId xmlns:a16="http://schemas.microsoft.com/office/drawing/2014/main" id="{23DA832C-AEFE-46B7-30CF-B92C9E6C8FF6}"/>
-            </a:ext>
-          </a:extLst>
-        </p:cNvPr>
-        <p:cNvGrpSpPr/>
-        <p:nvPr/>
-      </p:nvGrpSpPr>
-      <p:grpSpPr>
-        <a:xfrm>
-          <a:off x="0" y="0"/>
-          <a:ext cx="0" cy="0"/>
-          <a:chOff x="0" y="0"/>
-          <a:chExt cx="0" cy="0"/>
-        </a:xfrm>
-      </p:grpSpPr>
-      <p:sp>
-        <p:nvSpPr>
-          <p:cNvPr id="2" name="Title 1">
-            <a:extLst>
-              <a:ext uri="{FF2B5EF4-FFF2-40B4-BE49-F238E27FC236}">
-                <a16:creationId xmlns:a16="http://schemas.microsoft.com/office/drawing/2014/main" id="{99E6D5D0-3358-09DC-9C06-35CCA53D0A22}"/>
-              </a:ext>
-            </a:extLst>
-          </p:cNvPr>
-          <p:cNvSpPr>
-            <a:spLocks noGrp="1"/>
-          </p:cNvSpPr>
-          <p:nvPr>
-            <p:ph type="title"/>
-          </p:nvPr>
-        </p:nvSpPr>
-        <p:spPr/>
-        <p:txBody>
-          <a:bodyPr/>
-          <a:lstStyle/>
-          <a:p>
-            <a:endParaRPr lang="en-US" dirty="0"/>
-          </a:p>
-        </p:txBody>
-      </p:sp>
-      <p:sp>
-        <p:nvSpPr>
-          <p:cNvPr id="3" name="Content Placeholder 2">
-            <a:extLst>
-              <a:ext uri="{FF2B5EF4-FFF2-40B4-BE49-F238E27FC236}">
-                <a16:creationId xmlns:a16="http://schemas.microsoft.com/office/drawing/2014/main" id="{9DF6EE67-E5A4-AA7D-9F2C-C00D42DE3E55}"/>
-              </a:ext>
-            </a:extLst>
-          </p:cNvPr>
-          <p:cNvSpPr>
-            <a:spLocks noGrp="1"/>
-          </p:cNvSpPr>
-          <p:nvPr>
-            <p:ph idx="1"/>
-          </p:nvPr>
-        </p:nvSpPr>
-        <p:spPr/>
-        <p:txBody>
-          <a:bodyPr>
-            <a:normAutofit/>
-          </a:bodyPr>
-          <a:lstStyle/>
-          <a:p>
-            <a:pPr marL="0" indent="0" algn="ctr" fontAlgn="ctr">
-              <a:buNone/>
-            </a:pPr>
-            <a:r>
-              <a:rPr lang="en-US" sz="4400" b="1" dirty="0"/>
-              <a:t>What is a parametric test?</a:t>
-            </a:r>
-          </a:p>
-        </p:txBody>
-      </p:sp>
-    </p:spTree>
-    <p:extLst>
-      <p:ext uri="{BB962C8B-B14F-4D97-AF65-F5344CB8AC3E}">
-        <p14:creationId xmlns:p14="http://schemas.microsoft.com/office/powerpoint/2010/main" val="2988638950"/>
-      </p:ext>
-    </p:extLst>
-  </p:cSld>
-  <p:clrMapOvr>
-    <a:masterClrMapping/>
-  </p:clrMapOvr>
-</p:sld>
-</file>
-
-<file path=ppt/slides/slide54.xml><?xml version="1.0" encoding="utf-8"?>
-<p:sld xmlns:a="http://schemas.openxmlformats.org/drawingml/2006/main" xmlns:r="http://schemas.openxmlformats.org/officeDocument/2006/relationships" xmlns:p="http://schemas.openxmlformats.org/presentationml/2006/main">
-  <p:cSld>
-    <p:spTree>
-      <p:nvGrpSpPr>
-        <p:cNvPr id="1" name="">
-          <a:extLst>
-            <a:ext uri="{FF2B5EF4-FFF2-40B4-BE49-F238E27FC236}">
-              <a16:creationId xmlns:a16="http://schemas.microsoft.com/office/drawing/2014/main" id="{00E94CA5-B13B-828B-6C9C-D5439B1138A7}"/>
-            </a:ext>
-          </a:extLst>
-        </p:cNvPr>
-        <p:cNvGrpSpPr/>
-        <p:nvPr/>
-      </p:nvGrpSpPr>
-      <p:grpSpPr>
-        <a:xfrm>
-          <a:off x="0" y="0"/>
-          <a:ext cx="0" cy="0"/>
-          <a:chOff x="0" y="0"/>
-          <a:chExt cx="0" cy="0"/>
-        </a:xfrm>
-      </p:grpSpPr>
-      <p:sp>
-        <p:nvSpPr>
-          <p:cNvPr id="2" name="Title 1">
-            <a:extLst>
-              <a:ext uri="{FF2B5EF4-FFF2-40B4-BE49-F238E27FC236}">
-                <a16:creationId xmlns:a16="http://schemas.microsoft.com/office/drawing/2014/main" id="{8F655055-5687-7F50-D66A-F8A9451762B2}"/>
-              </a:ext>
-            </a:extLst>
-          </p:cNvPr>
-          <p:cNvSpPr>
-            <a:spLocks noGrp="1"/>
-          </p:cNvSpPr>
-          <p:nvPr>
-            <p:ph type="title"/>
-          </p:nvPr>
-        </p:nvSpPr>
-        <p:spPr/>
-        <p:txBody>
-          <a:bodyPr/>
-          <a:lstStyle/>
-          <a:p>
-            <a:r>
-              <a:rPr lang="en-US" dirty="0"/>
-              <a:t>We’ve Got the Power-$800</a:t>
-            </a:r>
-          </a:p>
-        </p:txBody>
-      </p:sp>
-      <p:sp>
-        <p:nvSpPr>
-          <p:cNvPr id="3" name="Content Placeholder 2">
-            <a:extLst>
-              <a:ext uri="{FF2B5EF4-FFF2-40B4-BE49-F238E27FC236}">
-                <a16:creationId xmlns:a16="http://schemas.microsoft.com/office/drawing/2014/main" id="{FF172B1B-90C7-E729-DFD9-CC4201F80F8C}"/>
-              </a:ext>
-            </a:extLst>
-          </p:cNvPr>
-          <p:cNvSpPr>
-            <a:spLocks noGrp="1"/>
-          </p:cNvSpPr>
-          <p:nvPr>
-            <p:ph idx="1"/>
-          </p:nvPr>
-        </p:nvSpPr>
-        <p:spPr/>
-        <p:txBody>
-          <a:bodyPr>
-            <a:normAutofit/>
-          </a:bodyPr>
-          <a:lstStyle/>
-          <a:p>
-            <a:pPr marL="0" indent="0" fontAlgn="ctr">
-              <a:buNone/>
-            </a:pPr>
-            <a:r>
-              <a:rPr lang="en-US" sz="4400" dirty="0"/>
-              <a:t>This test will have greater statistical power than a sign test when the differences in medians are symmetrically distributed.</a:t>
-            </a:r>
-          </a:p>
-          <a:p>
-            <a:pPr marL="0" indent="0" fontAlgn="ctr">
-              <a:buNone/>
-            </a:pPr>
-            <a:endParaRPr lang="en-US" sz="4400" dirty="0"/>
-          </a:p>
-        </p:txBody>
-      </p:sp>
-    </p:spTree>
-    <p:extLst>
-      <p:ext uri="{BB962C8B-B14F-4D97-AF65-F5344CB8AC3E}">
-        <p14:creationId xmlns:p14="http://schemas.microsoft.com/office/powerpoint/2010/main" val="1123777924"/>
-      </p:ext>
-    </p:extLst>
-  </p:cSld>
-  <p:clrMapOvr>
-    <a:masterClrMapping/>
-  </p:clrMapOvr>
-</p:sld>
-</file>
-
-<file path=ppt/slides/slide55.xml><?xml version="1.0" encoding="utf-8"?>
-<p:sld xmlns:a="http://schemas.openxmlformats.org/drawingml/2006/main" xmlns:r="http://schemas.openxmlformats.org/officeDocument/2006/relationships" xmlns:p="http://schemas.openxmlformats.org/presentationml/2006/main">
-  <p:cSld>
-    <p:spTree>
-      <p:nvGrpSpPr>
-        <p:cNvPr id="1" name="">
-          <a:extLst>
-            <a:ext uri="{FF2B5EF4-FFF2-40B4-BE49-F238E27FC236}">
-              <a16:creationId xmlns:a16="http://schemas.microsoft.com/office/drawing/2014/main" id="{39AD94C1-3246-EAEE-782A-6733210BDDD7}"/>
-            </a:ext>
-          </a:extLst>
-        </p:cNvPr>
-        <p:cNvGrpSpPr/>
-        <p:nvPr/>
-      </p:nvGrpSpPr>
-      <p:grpSpPr>
-        <a:xfrm>
-          <a:off x="0" y="0"/>
-          <a:ext cx="0" cy="0"/>
-          <a:chOff x="0" y="0"/>
-          <a:chExt cx="0" cy="0"/>
-        </a:xfrm>
-      </p:grpSpPr>
-      <p:sp>
-        <p:nvSpPr>
-          <p:cNvPr id="2" name="Title 1">
-            <a:extLst>
-              <a:ext uri="{FF2B5EF4-FFF2-40B4-BE49-F238E27FC236}">
-                <a16:creationId xmlns:a16="http://schemas.microsoft.com/office/drawing/2014/main" id="{48BEF76A-D8C7-D2A1-06C6-3919F15A5175}"/>
-              </a:ext>
-            </a:extLst>
-          </p:cNvPr>
-          <p:cNvSpPr>
-            <a:spLocks noGrp="1"/>
-          </p:cNvSpPr>
-          <p:nvPr>
-            <p:ph type="title"/>
-          </p:nvPr>
-        </p:nvSpPr>
-        <p:spPr/>
-        <p:txBody>
-          <a:bodyPr/>
-          <a:lstStyle/>
-          <a:p>
-            <a:endParaRPr lang="en-US" dirty="0"/>
-          </a:p>
-        </p:txBody>
-      </p:sp>
-      <p:sp>
-        <p:nvSpPr>
-          <p:cNvPr id="3" name="Content Placeholder 2">
-            <a:extLst>
-              <a:ext uri="{FF2B5EF4-FFF2-40B4-BE49-F238E27FC236}">
-                <a16:creationId xmlns:a16="http://schemas.microsoft.com/office/drawing/2014/main" id="{CC902FC5-0290-D412-4494-63A0B06F4F8A}"/>
-              </a:ext>
-            </a:extLst>
-          </p:cNvPr>
-          <p:cNvSpPr>
-            <a:spLocks noGrp="1"/>
-          </p:cNvSpPr>
-          <p:nvPr>
-            <p:ph idx="1"/>
-          </p:nvPr>
-        </p:nvSpPr>
-        <p:spPr/>
-        <p:txBody>
-          <a:bodyPr>
-            <a:normAutofit/>
-          </a:bodyPr>
-          <a:lstStyle/>
-          <a:p>
-            <a:pPr marL="0" indent="0" algn="ctr" fontAlgn="ctr">
-              <a:buNone/>
-            </a:pPr>
-            <a:r>
-              <a:rPr lang="en-US" sz="4400" b="1" dirty="0"/>
-              <a:t>What is the Wilcoxon sign-rank test?</a:t>
-            </a:r>
-          </a:p>
-        </p:txBody>
-      </p:sp>
-    </p:spTree>
-    <p:extLst>
-      <p:ext uri="{BB962C8B-B14F-4D97-AF65-F5344CB8AC3E}">
-        <p14:creationId xmlns:p14="http://schemas.microsoft.com/office/powerpoint/2010/main" val="3582371440"/>
-      </p:ext>
-    </p:extLst>
-  </p:cSld>
-  <p:clrMapOvr>
-    <a:masterClrMapping/>
-  </p:clrMapOvr>
-</p:sld>
-</file>
-
-<file path=ppt/slides/slide56.xml><?xml version="1.0" encoding="utf-8"?>
-<p:sld xmlns:a="http://schemas.openxmlformats.org/drawingml/2006/main" xmlns:r="http://schemas.openxmlformats.org/officeDocument/2006/relationships" xmlns:p="http://schemas.openxmlformats.org/presentationml/2006/main">
-  <p:cSld>
-    <p:spTree>
-      <p:nvGrpSpPr>
-        <p:cNvPr id="1" name="">
-          <a:extLst>
-            <a:ext uri="{FF2B5EF4-FFF2-40B4-BE49-F238E27FC236}">
-              <a16:creationId xmlns:a16="http://schemas.microsoft.com/office/drawing/2014/main" id="{111FAA3E-FEF9-E130-21AE-13CDAD4DBAE3}"/>
-            </a:ext>
-          </a:extLst>
-        </p:cNvPr>
-        <p:cNvGrpSpPr/>
-        <p:nvPr/>
-      </p:nvGrpSpPr>
-      <p:grpSpPr>
-        <a:xfrm>
-          <a:off x="0" y="0"/>
-          <a:ext cx="0" cy="0"/>
-          <a:chOff x="0" y="0"/>
-          <a:chExt cx="0" cy="0"/>
-        </a:xfrm>
-      </p:grpSpPr>
-      <p:sp>
-        <p:nvSpPr>
-          <p:cNvPr id="2" name="Title 1">
-            <a:extLst>
-              <a:ext uri="{FF2B5EF4-FFF2-40B4-BE49-F238E27FC236}">
-                <a16:creationId xmlns:a16="http://schemas.microsoft.com/office/drawing/2014/main" id="{E942EFDA-05D1-A194-8763-B66C1A0F77C0}"/>
-              </a:ext>
-            </a:extLst>
-          </p:cNvPr>
-          <p:cNvSpPr>
-            <a:spLocks noGrp="1"/>
-          </p:cNvSpPr>
-          <p:nvPr>
-            <p:ph type="title"/>
-          </p:nvPr>
-        </p:nvSpPr>
-        <p:spPr/>
-        <p:txBody>
-          <a:bodyPr/>
-          <a:lstStyle/>
-          <a:p>
-            <a:r>
-              <a:rPr lang="en-US" dirty="0"/>
-              <a:t>We’ve Got the Power-$1000</a:t>
-            </a:r>
-          </a:p>
-        </p:txBody>
-      </p:sp>
-      <p:sp>
-        <p:nvSpPr>
-          <p:cNvPr id="3" name="Content Placeholder 2">
-            <a:extLst>
-              <a:ext uri="{FF2B5EF4-FFF2-40B4-BE49-F238E27FC236}">
-                <a16:creationId xmlns:a16="http://schemas.microsoft.com/office/drawing/2014/main" id="{49D82089-506E-BA24-F704-C6966F8F60BD}"/>
-              </a:ext>
-            </a:extLst>
-          </p:cNvPr>
-          <p:cNvSpPr>
-            <a:spLocks noGrp="1"/>
-          </p:cNvSpPr>
-          <p:nvPr>
-            <p:ph idx="1"/>
-          </p:nvPr>
-        </p:nvSpPr>
-        <p:spPr/>
-        <p:txBody>
-          <a:bodyPr>
-            <a:normAutofit lnSpcReduction="10000"/>
-          </a:bodyPr>
-          <a:lstStyle/>
-          <a:p>
-            <a:pPr marL="0" indent="0">
-              <a:buNone/>
-            </a:pPr>
-            <a:r>
-              <a:rPr lang="en-US" sz="4400" dirty="0"/>
-              <a:t>The following R function will solve for this variable:</a:t>
-            </a:r>
-          </a:p>
-          <a:p>
-            <a:pPr marL="0" indent="0">
-              <a:buNone/>
-            </a:pPr>
-            <a:r>
-              <a:rPr lang="en-US" sz="3600" dirty="0" err="1"/>
-              <a:t>power.t.test</a:t>
-            </a:r>
-            <a:r>
-              <a:rPr lang="en-US" sz="3600" dirty="0"/>
-              <a:t>(n = 20,</a:t>
-            </a:r>
-          </a:p>
-          <a:p>
-            <a:pPr marL="0" indent="0">
-              <a:buNone/>
-            </a:pPr>
-            <a:r>
-              <a:rPr lang="en-US" sz="3600" dirty="0"/>
-              <a:t>                          </a:t>
-            </a:r>
-            <a:r>
-              <a:rPr lang="en-US" sz="3600" dirty="0" err="1"/>
-              <a:t>sd</a:t>
-            </a:r>
-            <a:r>
-              <a:rPr lang="en-US" sz="3600" dirty="0"/>
-              <a:t> = 3,</a:t>
-            </a:r>
-          </a:p>
-          <a:p>
-            <a:pPr marL="0" indent="0">
-              <a:buNone/>
-            </a:pPr>
-            <a:r>
-              <a:rPr lang="en-US" sz="3600" dirty="0"/>
-              <a:t>                          power = 0.80,</a:t>
-            </a:r>
-          </a:p>
-          <a:p>
-            <a:pPr marL="0" indent="0">
-              <a:buNone/>
-            </a:pPr>
-            <a:r>
-              <a:rPr lang="en-US" sz="3600" dirty="0"/>
-              <a:t>                          </a:t>
-            </a:r>
-            <a:r>
-              <a:rPr lang="en-US" sz="3600" dirty="0" err="1"/>
-              <a:t>sig.level</a:t>
-            </a:r>
-            <a:r>
-              <a:rPr lang="en-US" sz="3600" dirty="0"/>
-              <a:t> = 0.05,</a:t>
-            </a:r>
-          </a:p>
-          <a:p>
-            <a:pPr marL="0" indent="0">
-              <a:buNone/>
-            </a:pPr>
-            <a:r>
-              <a:rPr lang="en-US" sz="3600" dirty="0"/>
-              <a:t>		       type = “</a:t>
-            </a:r>
-            <a:r>
-              <a:rPr lang="en-US" sz="3600" dirty="0" err="1"/>
-              <a:t>one.sample</a:t>
-            </a:r>
-            <a:r>
-              <a:rPr lang="en-US" sz="3600" dirty="0"/>
-              <a:t>”)</a:t>
-            </a:r>
-          </a:p>
-          <a:p>
-            <a:pPr marL="0" indent="0">
-              <a:buNone/>
-            </a:pPr>
-            <a:endParaRPr lang="en-US" sz="4400" dirty="0"/>
-          </a:p>
-        </p:txBody>
-      </p:sp>
-    </p:spTree>
-    <p:extLst>
-      <p:ext uri="{BB962C8B-B14F-4D97-AF65-F5344CB8AC3E}">
-        <p14:creationId xmlns:p14="http://schemas.microsoft.com/office/powerpoint/2010/main" val="2914963963"/>
-      </p:ext>
-    </p:extLst>
-  </p:cSld>
-  <p:clrMapOvr>
-    <a:masterClrMapping/>
-  </p:clrMapOvr>
-</p:sld>
-</file>
-
-<file path=ppt/slides/slide57.xml><?xml version="1.0" encoding="utf-8"?>
-<p:sld xmlns:a="http://schemas.openxmlformats.org/drawingml/2006/main" xmlns:r="http://schemas.openxmlformats.org/officeDocument/2006/relationships" xmlns:p="http://schemas.openxmlformats.org/presentationml/2006/main">
-  <p:cSld>
-    <p:spTree>
-      <p:nvGrpSpPr>
-        <p:cNvPr id="1" name="">
-          <a:extLst>
-            <a:ext uri="{FF2B5EF4-FFF2-40B4-BE49-F238E27FC236}">
-              <a16:creationId xmlns:a16="http://schemas.microsoft.com/office/drawing/2014/main" id="{8734CE43-2615-4A67-3CFF-D511E1685806}"/>
-            </a:ext>
-          </a:extLst>
-        </p:cNvPr>
-        <p:cNvGrpSpPr/>
-        <p:nvPr/>
-      </p:nvGrpSpPr>
-      <p:grpSpPr>
-        <a:xfrm>
-          <a:off x="0" y="0"/>
-          <a:ext cx="0" cy="0"/>
-          <a:chOff x="0" y="0"/>
-          <a:chExt cx="0" cy="0"/>
-        </a:xfrm>
-      </p:grpSpPr>
-      <p:sp>
-        <p:nvSpPr>
-          <p:cNvPr id="2" name="Title 1">
-            <a:extLst>
-              <a:ext uri="{FF2B5EF4-FFF2-40B4-BE49-F238E27FC236}">
-                <a16:creationId xmlns:a16="http://schemas.microsoft.com/office/drawing/2014/main" id="{ABB2E9B0-7522-A5E7-AAFF-C59C2D83DF85}"/>
-              </a:ext>
-            </a:extLst>
-          </p:cNvPr>
-          <p:cNvSpPr>
-            <a:spLocks noGrp="1"/>
-          </p:cNvSpPr>
-          <p:nvPr>
-            <p:ph type="title"/>
-          </p:nvPr>
-        </p:nvSpPr>
-        <p:spPr/>
-        <p:txBody>
-          <a:bodyPr/>
-          <a:lstStyle/>
-          <a:p>
-            <a:endParaRPr lang="en-US" dirty="0"/>
-          </a:p>
-        </p:txBody>
-      </p:sp>
-      <p:sp>
-        <p:nvSpPr>
-          <p:cNvPr id="3" name="Content Placeholder 2">
-            <a:extLst>
-              <a:ext uri="{FF2B5EF4-FFF2-40B4-BE49-F238E27FC236}">
-                <a16:creationId xmlns:a16="http://schemas.microsoft.com/office/drawing/2014/main" id="{CA30F860-183D-4072-AB53-655EC901288F}"/>
-              </a:ext>
-            </a:extLst>
-          </p:cNvPr>
-          <p:cNvSpPr>
-            <a:spLocks noGrp="1"/>
-          </p:cNvSpPr>
-          <p:nvPr>
-            <p:ph idx="1"/>
-          </p:nvPr>
-        </p:nvSpPr>
-        <p:spPr/>
-        <p:txBody>
-          <a:bodyPr>
-            <a:normAutofit/>
-          </a:bodyPr>
-          <a:lstStyle/>
-          <a:p>
-            <a:pPr marL="0" indent="0" algn="ctr" fontAlgn="ctr">
-              <a:buNone/>
-            </a:pPr>
-            <a:r>
-              <a:rPr lang="en-US" sz="4400" b="1" dirty="0"/>
-              <a:t>What is the effect size/delta?</a:t>
-            </a:r>
-          </a:p>
-        </p:txBody>
-      </p:sp>
-    </p:spTree>
-    <p:extLst>
-      <p:ext uri="{BB962C8B-B14F-4D97-AF65-F5344CB8AC3E}">
-        <p14:creationId xmlns:p14="http://schemas.microsoft.com/office/powerpoint/2010/main" val="2665824334"/>
-      </p:ext>
-    </p:extLst>
-  </p:cSld>
-  <p:clrMapOvr>
-    <a:masterClrMapping/>
-  </p:clrMapOvr>
-</p:sld>
-</file>
-
-<file path=ppt/slides/slide58.xml><?xml version="1.0" encoding="utf-8"?>
-<p:sld xmlns:a="http://schemas.openxmlformats.org/drawingml/2006/main" xmlns:r="http://schemas.openxmlformats.org/officeDocument/2006/relationships" xmlns:p="http://schemas.openxmlformats.org/presentationml/2006/main">
-  <p:cSld>
-    <p:spTree>
-      <p:nvGrpSpPr>
-        <p:cNvPr id="1" name="">
-          <a:extLst>
-            <a:ext uri="{FF2B5EF4-FFF2-40B4-BE49-F238E27FC236}">
-              <a16:creationId xmlns:a16="http://schemas.microsoft.com/office/drawing/2014/main" id="{D498413F-4556-7C71-1E86-3BA240BBBEED}"/>
-            </a:ext>
-          </a:extLst>
-        </p:cNvPr>
-        <p:cNvGrpSpPr/>
-        <p:nvPr/>
-      </p:nvGrpSpPr>
-      <p:grpSpPr>
-        <a:xfrm>
-          <a:off x="0" y="0"/>
-          <a:ext cx="0" cy="0"/>
-          <a:chOff x="0" y="0"/>
-          <a:chExt cx="0" cy="0"/>
-        </a:xfrm>
-      </p:grpSpPr>
-      <p:sp>
-        <p:nvSpPr>
-          <p:cNvPr id="2" name="Title 1">
-            <a:extLst>
-              <a:ext uri="{FF2B5EF4-FFF2-40B4-BE49-F238E27FC236}">
-                <a16:creationId xmlns:a16="http://schemas.microsoft.com/office/drawing/2014/main" id="{33903F01-972C-817A-90F1-5C52C9B2086C}"/>
-              </a:ext>
-            </a:extLst>
-          </p:cNvPr>
-          <p:cNvSpPr>
-            <a:spLocks noGrp="1"/>
-          </p:cNvSpPr>
-          <p:nvPr>
-            <p:ph type="title"/>
-          </p:nvPr>
-        </p:nvSpPr>
-        <p:spPr/>
-        <p:txBody>
-          <a:bodyPr/>
-          <a:lstStyle/>
-          <a:p>
-            <a:r>
-              <a:rPr lang="en-US" dirty="0"/>
-              <a:t>Miscellany-$200</a:t>
-            </a:r>
-          </a:p>
-        </p:txBody>
-      </p:sp>
-      <p:sp>
-        <p:nvSpPr>
-          <p:cNvPr id="3" name="Content Placeholder 2">
-            <a:extLst>
-              <a:ext uri="{FF2B5EF4-FFF2-40B4-BE49-F238E27FC236}">
-                <a16:creationId xmlns:a16="http://schemas.microsoft.com/office/drawing/2014/main" id="{799B7959-9E90-C6D7-59CB-ABE2F77FC605}"/>
-              </a:ext>
-            </a:extLst>
-          </p:cNvPr>
-          <p:cNvSpPr>
-            <a:spLocks noGrp="1"/>
-          </p:cNvSpPr>
-          <p:nvPr>
-            <p:ph idx="1"/>
-          </p:nvPr>
-        </p:nvSpPr>
-        <p:spPr/>
-        <p:txBody>
-          <a:bodyPr>
-            <a:normAutofit/>
-          </a:bodyPr>
-          <a:lstStyle/>
-          <a:p>
-            <a:pPr marL="0" indent="0" fontAlgn="ctr">
-              <a:buNone/>
-            </a:pPr>
-            <a:r>
-              <a:rPr lang="en-US" sz="4400" dirty="0"/>
-              <a:t>This R package allows us to read and manipulate spatial data.</a:t>
-            </a:r>
-          </a:p>
-        </p:txBody>
-      </p:sp>
-    </p:spTree>
-    <p:extLst>
-      <p:ext uri="{BB962C8B-B14F-4D97-AF65-F5344CB8AC3E}">
-        <p14:creationId xmlns:p14="http://schemas.microsoft.com/office/powerpoint/2010/main" val="1858500134"/>
-      </p:ext>
-    </p:extLst>
-  </p:cSld>
-  <p:clrMapOvr>
-    <a:masterClrMapping/>
-  </p:clrMapOvr>
-</p:sld>
-</file>
-
-<file path=ppt/slides/slide59.xml><?xml version="1.0" encoding="utf-8"?>
+<file path=ppt/slides/slide60.xml><?xml version="1.0" encoding="utf-8"?>
 <p:sld xmlns:a="http://schemas.openxmlformats.org/drawingml/2006/main" xmlns:r="http://schemas.openxmlformats.org/officeDocument/2006/relationships" xmlns:p="http://schemas.openxmlformats.org/presentationml/2006/main">
   <p:cSld>
     <p:spTree>
@@ -8935,93 +9140,7 @@
 </p:sld>
 </file>
 
-<file path=ppt/slides/slide6.xml><?xml version="1.0" encoding="utf-8"?>
-<p:sld xmlns:a="http://schemas.openxmlformats.org/drawingml/2006/main" xmlns:r="http://schemas.openxmlformats.org/officeDocument/2006/relationships" xmlns:p="http://schemas.openxmlformats.org/presentationml/2006/main">
-  <p:cSld>
-    <p:spTree>
-      <p:nvGrpSpPr>
-        <p:cNvPr id="1" name=""/>
-        <p:cNvGrpSpPr/>
-        <p:nvPr/>
-      </p:nvGrpSpPr>
-      <p:grpSpPr>
-        <a:xfrm>
-          <a:off x="0" y="0"/>
-          <a:ext cx="0" cy="0"/>
-          <a:chOff x="0" y="0"/>
-          <a:chExt cx="0" cy="0"/>
-        </a:xfrm>
-      </p:grpSpPr>
-      <p:sp>
-        <p:nvSpPr>
-          <p:cNvPr id="2" name="Title 1">
-            <a:extLst>
-              <a:ext uri="{FF2B5EF4-FFF2-40B4-BE49-F238E27FC236}">
-                <a16:creationId xmlns:a16="http://schemas.microsoft.com/office/drawing/2014/main" id="{1273C18A-8229-F0AE-1E8A-55E491407B00}"/>
-              </a:ext>
-            </a:extLst>
-          </p:cNvPr>
-          <p:cNvSpPr>
-            <a:spLocks noGrp="1"/>
-          </p:cNvSpPr>
-          <p:nvPr>
-            <p:ph type="title"/>
-          </p:nvPr>
-        </p:nvSpPr>
-        <p:spPr/>
-        <p:txBody>
-          <a:bodyPr/>
-          <a:lstStyle/>
-          <a:p>
-            <a:r>
-              <a:rPr lang="en-US" dirty="0"/>
-              <a:t>One Final Rule</a:t>
-            </a:r>
-          </a:p>
-        </p:txBody>
-      </p:sp>
-      <p:sp>
-        <p:nvSpPr>
-          <p:cNvPr id="3" name="Content Placeholder 2">
-            <a:extLst>
-              <a:ext uri="{FF2B5EF4-FFF2-40B4-BE49-F238E27FC236}">
-                <a16:creationId xmlns:a16="http://schemas.microsoft.com/office/drawing/2014/main" id="{33BD3802-888F-DDA6-288C-C9EEB87E43C7}"/>
-              </a:ext>
-            </a:extLst>
-          </p:cNvPr>
-          <p:cNvSpPr>
-            <a:spLocks noGrp="1"/>
-          </p:cNvSpPr>
-          <p:nvPr>
-            <p:ph idx="1"/>
-          </p:nvPr>
-        </p:nvSpPr>
-        <p:spPr/>
-        <p:txBody>
-          <a:bodyPr/>
-          <a:lstStyle/>
-          <a:p>
-            <a:r>
-              <a:rPr lang="en-US" dirty="0"/>
-              <a:t>No referencing notes/the internet/textbooks! This is an opportunity for you to see what you know ahead of tomorrow’s exam.</a:t>
-            </a:r>
-          </a:p>
-        </p:txBody>
-      </p:sp>
-    </p:spTree>
-    <p:extLst>
-      <p:ext uri="{BB962C8B-B14F-4D97-AF65-F5344CB8AC3E}">
-        <p14:creationId xmlns:p14="http://schemas.microsoft.com/office/powerpoint/2010/main" val="3587569964"/>
-      </p:ext>
-    </p:extLst>
-  </p:cSld>
-  <p:clrMapOvr>
-    <a:masterClrMapping/>
-  </p:clrMapOvr>
-</p:sld>
-</file>
-
-<file path=ppt/slides/slide60.xml><?xml version="1.0" encoding="utf-8"?>
+<file path=ppt/slides/slide61.xml><?xml version="1.0" encoding="utf-8"?>
 <p:sld xmlns:a="http://schemas.openxmlformats.org/drawingml/2006/main" xmlns:r="http://schemas.openxmlformats.org/officeDocument/2006/relationships" xmlns:p="http://schemas.openxmlformats.org/presentationml/2006/main">
   <p:cSld>
     <p:spTree>
@@ -9118,7 +9237,7 @@
 </p:sld>
 </file>
 
-<file path=ppt/slides/slide61.xml><?xml version="1.0" encoding="utf-8"?>
+<file path=ppt/slides/slide62.xml><?xml version="1.0" encoding="utf-8"?>
 <p:sld xmlns:a="http://schemas.openxmlformats.org/drawingml/2006/main" xmlns:r="http://schemas.openxmlformats.org/officeDocument/2006/relationships" xmlns:p="http://schemas.openxmlformats.org/presentationml/2006/main">
   <p:cSld>
     <p:spTree>
@@ -9212,7 +9331,7 @@
 </p:sld>
 </file>
 
-<file path=ppt/slides/slide62.xml><?xml version="1.0" encoding="utf-8"?>
+<file path=ppt/slides/slide63.xml><?xml version="1.0" encoding="utf-8"?>
 <p:sld xmlns:a="http://schemas.openxmlformats.org/drawingml/2006/main" xmlns:r="http://schemas.openxmlformats.org/officeDocument/2006/relationships" xmlns:p="http://schemas.openxmlformats.org/presentationml/2006/main">
   <p:cSld>
     <p:spTree>
@@ -9309,7 +9428,7 @@
 </p:sld>
 </file>
 
-<file path=ppt/slides/slide63.xml><?xml version="1.0" encoding="utf-8"?>
+<file path=ppt/slides/slide64.xml><?xml version="1.0" encoding="utf-8"?>
 <p:sld xmlns:a="http://schemas.openxmlformats.org/drawingml/2006/main" xmlns:r="http://schemas.openxmlformats.org/officeDocument/2006/relationships" xmlns:p="http://schemas.openxmlformats.org/presentationml/2006/main">
   <p:cSld>
     <p:spTree>
@@ -9403,7 +9522,7 @@
 </p:sld>
 </file>
 
-<file path=ppt/slides/slide64.xml><?xml version="1.0" encoding="utf-8"?>
+<file path=ppt/slides/slide65.xml><?xml version="1.0" encoding="utf-8"?>
 <p:sld xmlns:a="http://schemas.openxmlformats.org/drawingml/2006/main" xmlns:r="http://schemas.openxmlformats.org/officeDocument/2006/relationships" xmlns:p="http://schemas.openxmlformats.org/presentationml/2006/main">
   <p:cSld>
     <p:spTree>
@@ -9500,7 +9619,7 @@
 </p:sld>
 </file>
 
-<file path=ppt/slides/slide65.xml><?xml version="1.0" encoding="utf-8"?>
+<file path=ppt/slides/slide66.xml><?xml version="1.0" encoding="utf-8"?>
 <p:sld xmlns:a="http://schemas.openxmlformats.org/drawingml/2006/main" xmlns:r="http://schemas.openxmlformats.org/officeDocument/2006/relationships" xmlns:p="http://schemas.openxmlformats.org/presentationml/2006/main">
   <p:cSld>
     <p:spTree>
@@ -9594,7 +9713,7 @@
 </p:sld>
 </file>
 
-<file path=ppt/slides/slide66.xml><?xml version="1.0" encoding="utf-8"?>
+<file path=ppt/slides/slide67.xml><?xml version="1.0" encoding="utf-8"?>
 <p:sld xmlns:a="http://schemas.openxmlformats.org/drawingml/2006/main" xmlns:r="http://schemas.openxmlformats.org/officeDocument/2006/relationships" xmlns:p="http://schemas.openxmlformats.org/presentationml/2006/main">
   <p:cSld>
     <p:spTree>
@@ -9691,7 +9810,7 @@
 </p:sld>
 </file>
 
-<file path=ppt/slides/slide67.xml><?xml version="1.0" encoding="utf-8"?>
+<file path=ppt/slides/slide68.xml><?xml version="1.0" encoding="utf-8"?>
 <p:sld xmlns:a="http://schemas.openxmlformats.org/drawingml/2006/main" xmlns:r="http://schemas.openxmlformats.org/officeDocument/2006/relationships" xmlns:p="http://schemas.openxmlformats.org/presentationml/2006/main">
   <p:cSld>
     <p:spTree>
@@ -9776,86 +9895,6 @@
     <p:extLst>
       <p:ext uri="{BB962C8B-B14F-4D97-AF65-F5344CB8AC3E}">
         <p14:creationId xmlns:p14="http://schemas.microsoft.com/office/powerpoint/2010/main" val="612163537"/>
-      </p:ext>
-    </p:extLst>
-  </p:cSld>
-  <p:clrMapOvr>
-    <a:masterClrMapping/>
-  </p:clrMapOvr>
-</p:sld>
-</file>
-
-<file path=ppt/slides/slide68.xml><?xml version="1.0" encoding="utf-8"?>
-<p:sld xmlns:a="http://schemas.openxmlformats.org/drawingml/2006/main" xmlns:r="http://schemas.openxmlformats.org/officeDocument/2006/relationships" xmlns:p="http://schemas.openxmlformats.org/presentationml/2006/main">
-  <p:cSld>
-    <p:spTree>
-      <p:nvGrpSpPr>
-        <p:cNvPr id="1" name=""/>
-        <p:cNvGrpSpPr/>
-        <p:nvPr/>
-      </p:nvGrpSpPr>
-      <p:grpSpPr>
-        <a:xfrm>
-          <a:off x="0" y="0"/>
-          <a:ext cx="0" cy="0"/>
-          <a:chOff x="0" y="0"/>
-          <a:chExt cx="0" cy="0"/>
-        </a:xfrm>
-      </p:grpSpPr>
-      <p:sp>
-        <p:nvSpPr>
-          <p:cNvPr id="2" name="Title 1">
-            <a:extLst>
-              <a:ext uri="{FF2B5EF4-FFF2-40B4-BE49-F238E27FC236}">
-                <a16:creationId xmlns:a16="http://schemas.microsoft.com/office/drawing/2014/main" id="{FD9FADB7-AC94-EC32-1E8B-2365916D741D}"/>
-              </a:ext>
-            </a:extLst>
-          </p:cNvPr>
-          <p:cNvSpPr>
-            <a:spLocks noGrp="1"/>
-          </p:cNvSpPr>
-          <p:nvPr>
-            <p:ph type="title"/>
-          </p:nvPr>
-        </p:nvSpPr>
-        <p:spPr/>
-        <p:txBody>
-          <a:bodyPr/>
-          <a:lstStyle/>
-          <a:p>
-            <a:endParaRPr lang="en-US"/>
-          </a:p>
-        </p:txBody>
-      </p:sp>
-      <p:sp>
-        <p:nvSpPr>
-          <p:cNvPr id="3" name="Content Placeholder 2">
-            <a:extLst>
-              <a:ext uri="{FF2B5EF4-FFF2-40B4-BE49-F238E27FC236}">
-                <a16:creationId xmlns:a16="http://schemas.microsoft.com/office/drawing/2014/main" id="{95529217-20DB-695C-8645-157AB7806CE4}"/>
-              </a:ext>
-            </a:extLst>
-          </p:cNvPr>
-          <p:cNvSpPr>
-            <a:spLocks noGrp="1"/>
-          </p:cNvSpPr>
-          <p:nvPr>
-            <p:ph idx="1"/>
-          </p:nvPr>
-        </p:nvSpPr>
-        <p:spPr/>
-        <p:txBody>
-          <a:bodyPr/>
-          <a:lstStyle/>
-          <a:p>
-            <a:endParaRPr lang="en-US"/>
-          </a:p>
-        </p:txBody>
-      </p:sp>
-    </p:spTree>
-    <p:extLst>
-      <p:ext uri="{BB962C8B-B14F-4D97-AF65-F5344CB8AC3E}">
-        <p14:creationId xmlns:p14="http://schemas.microsoft.com/office/powerpoint/2010/main" val="3022762003"/>
       </p:ext>
     </p:extLst>
   </p:cSld>
@@ -9887,6 +9926,172 @@
           <p:cNvPr id="2" name="Title 1">
             <a:extLst>
               <a:ext uri="{FF2B5EF4-FFF2-40B4-BE49-F238E27FC236}">
+                <a16:creationId xmlns:a16="http://schemas.microsoft.com/office/drawing/2014/main" id="{FD9FADB7-AC94-EC32-1E8B-2365916D741D}"/>
+              </a:ext>
+            </a:extLst>
+          </p:cNvPr>
+          <p:cNvSpPr>
+            <a:spLocks noGrp="1"/>
+          </p:cNvSpPr>
+          <p:nvPr>
+            <p:ph type="title"/>
+          </p:nvPr>
+        </p:nvSpPr>
+        <p:spPr/>
+        <p:txBody>
+          <a:bodyPr/>
+          <a:lstStyle/>
+          <a:p>
+            <a:endParaRPr lang="en-US"/>
+          </a:p>
+        </p:txBody>
+      </p:sp>
+      <p:sp>
+        <p:nvSpPr>
+          <p:cNvPr id="3" name="Content Placeholder 2">
+            <a:extLst>
+              <a:ext uri="{FF2B5EF4-FFF2-40B4-BE49-F238E27FC236}">
+                <a16:creationId xmlns:a16="http://schemas.microsoft.com/office/drawing/2014/main" id="{95529217-20DB-695C-8645-157AB7806CE4}"/>
+              </a:ext>
+            </a:extLst>
+          </p:cNvPr>
+          <p:cNvSpPr>
+            <a:spLocks noGrp="1"/>
+          </p:cNvSpPr>
+          <p:nvPr>
+            <p:ph idx="1"/>
+          </p:nvPr>
+        </p:nvSpPr>
+        <p:spPr/>
+        <p:txBody>
+          <a:bodyPr/>
+          <a:lstStyle/>
+          <a:p>
+            <a:endParaRPr lang="en-US"/>
+          </a:p>
+        </p:txBody>
+      </p:sp>
+    </p:spTree>
+    <p:extLst>
+      <p:ext uri="{BB962C8B-B14F-4D97-AF65-F5344CB8AC3E}">
+        <p14:creationId xmlns:p14="http://schemas.microsoft.com/office/powerpoint/2010/main" val="3022762003"/>
+      </p:ext>
+    </p:extLst>
+  </p:cSld>
+  <p:clrMapOvr>
+    <a:masterClrMapping/>
+  </p:clrMapOvr>
+</p:sld>
+</file>
+
+<file path=ppt/slides/slide7.xml><?xml version="1.0" encoding="utf-8"?>
+<p:sld xmlns:a="http://schemas.openxmlformats.org/drawingml/2006/main" xmlns:r="http://schemas.openxmlformats.org/officeDocument/2006/relationships" xmlns:p="http://schemas.openxmlformats.org/presentationml/2006/main">
+  <p:cSld>
+    <p:spTree>
+      <p:nvGrpSpPr>
+        <p:cNvPr id="1" name=""/>
+        <p:cNvGrpSpPr/>
+        <p:nvPr/>
+      </p:nvGrpSpPr>
+      <p:grpSpPr>
+        <a:xfrm>
+          <a:off x="0" y="0"/>
+          <a:ext cx="0" cy="0"/>
+          <a:chOff x="0" y="0"/>
+          <a:chExt cx="0" cy="0"/>
+        </a:xfrm>
+      </p:grpSpPr>
+      <p:sp>
+        <p:nvSpPr>
+          <p:cNvPr id="2" name="Title 1">
+            <a:extLst>
+              <a:ext uri="{FF2B5EF4-FFF2-40B4-BE49-F238E27FC236}">
+                <a16:creationId xmlns:a16="http://schemas.microsoft.com/office/drawing/2014/main" id="{1273C18A-8229-F0AE-1E8A-55E491407B00}"/>
+              </a:ext>
+            </a:extLst>
+          </p:cNvPr>
+          <p:cNvSpPr>
+            <a:spLocks noGrp="1"/>
+          </p:cNvSpPr>
+          <p:nvPr>
+            <p:ph type="title"/>
+          </p:nvPr>
+        </p:nvSpPr>
+        <p:spPr/>
+        <p:txBody>
+          <a:bodyPr/>
+          <a:lstStyle/>
+          <a:p>
+            <a:r>
+              <a:rPr lang="en-US" dirty="0"/>
+              <a:t>One Final Rule</a:t>
+            </a:r>
+          </a:p>
+        </p:txBody>
+      </p:sp>
+      <p:sp>
+        <p:nvSpPr>
+          <p:cNvPr id="3" name="Content Placeholder 2">
+            <a:extLst>
+              <a:ext uri="{FF2B5EF4-FFF2-40B4-BE49-F238E27FC236}">
+                <a16:creationId xmlns:a16="http://schemas.microsoft.com/office/drawing/2014/main" id="{33BD3802-888F-DDA6-288C-C9EEB87E43C7}"/>
+              </a:ext>
+            </a:extLst>
+          </p:cNvPr>
+          <p:cNvSpPr>
+            <a:spLocks noGrp="1"/>
+          </p:cNvSpPr>
+          <p:nvPr>
+            <p:ph idx="1"/>
+          </p:nvPr>
+        </p:nvSpPr>
+        <p:spPr/>
+        <p:txBody>
+          <a:bodyPr/>
+          <a:lstStyle/>
+          <a:p>
+            <a:r>
+              <a:rPr lang="en-US" dirty="0"/>
+              <a:t>No referencing notes/the internet/textbooks! This is an opportunity for you to see what you know ahead of tomorrow’s exam.</a:t>
+            </a:r>
+          </a:p>
+        </p:txBody>
+      </p:sp>
+    </p:spTree>
+    <p:extLst>
+      <p:ext uri="{BB962C8B-B14F-4D97-AF65-F5344CB8AC3E}">
+        <p14:creationId xmlns:p14="http://schemas.microsoft.com/office/powerpoint/2010/main" val="3587569964"/>
+      </p:ext>
+    </p:extLst>
+  </p:cSld>
+  <p:clrMapOvr>
+    <a:masterClrMapping/>
+  </p:clrMapOvr>
+</p:sld>
+</file>
+
+<file path=ppt/slides/slide70.xml><?xml version="1.0" encoding="utf-8"?>
+<p:sld xmlns:a="http://schemas.openxmlformats.org/drawingml/2006/main" xmlns:r="http://schemas.openxmlformats.org/officeDocument/2006/relationships" xmlns:p="http://schemas.openxmlformats.org/presentationml/2006/main">
+  <p:cSld>
+    <p:spTree>
+      <p:nvGrpSpPr>
+        <p:cNvPr id="1" name=""/>
+        <p:cNvGrpSpPr/>
+        <p:nvPr/>
+      </p:nvGrpSpPr>
+      <p:grpSpPr>
+        <a:xfrm>
+          <a:off x="0" y="0"/>
+          <a:ext cx="0" cy="0"/>
+          <a:chOff x="0" y="0"/>
+          <a:chExt cx="0" cy="0"/>
+        </a:xfrm>
+      </p:grpSpPr>
+      <p:sp>
+        <p:nvSpPr>
+          <p:cNvPr id="2" name="Title 1">
+            <a:extLst>
+              <a:ext uri="{FF2B5EF4-FFF2-40B4-BE49-F238E27FC236}">
                 <a16:creationId xmlns:a16="http://schemas.microsoft.com/office/drawing/2014/main" id="{2A5E667F-E4FE-B985-EE5E-6D0113D6DB86}"/>
               </a:ext>
             </a:extLst>
@@ -9948,7 +10153,516 @@
 </p:sld>
 </file>
 
-<file path=ppt/slides/slide7.xml><?xml version="1.0" encoding="utf-8"?>
+<file path=ppt/slides/slide71.xml><?xml version="1.0" encoding="utf-8"?>
+<p:sld xmlns:a="http://schemas.openxmlformats.org/drawingml/2006/main" xmlns:r="http://schemas.openxmlformats.org/officeDocument/2006/relationships" xmlns:p="http://schemas.openxmlformats.org/presentationml/2006/main">
+  <p:cSld>
+    <p:spTree>
+      <p:nvGrpSpPr>
+        <p:cNvPr id="1" name=""/>
+        <p:cNvGrpSpPr/>
+        <p:nvPr/>
+      </p:nvGrpSpPr>
+      <p:grpSpPr>
+        <a:xfrm>
+          <a:off x="0" y="0"/>
+          <a:ext cx="0" cy="0"/>
+          <a:chOff x="0" y="0"/>
+          <a:chExt cx="0" cy="0"/>
+        </a:xfrm>
+      </p:grpSpPr>
+      <p:sp>
+        <p:nvSpPr>
+          <p:cNvPr id="2" name="Title 1">
+            <a:extLst>
+              <a:ext uri="{FF2B5EF4-FFF2-40B4-BE49-F238E27FC236}">
+                <a16:creationId xmlns:a16="http://schemas.microsoft.com/office/drawing/2014/main" id="{CA9FBF47-04B4-17D9-0C0E-BDA1939D2022}"/>
+              </a:ext>
+            </a:extLst>
+          </p:cNvPr>
+          <p:cNvSpPr>
+            <a:spLocks noGrp="1"/>
+          </p:cNvSpPr>
+          <p:nvPr>
+            <p:ph type="title"/>
+          </p:nvPr>
+        </p:nvSpPr>
+        <p:spPr/>
+        <p:txBody>
+          <a:bodyPr/>
+          <a:lstStyle/>
+          <a:p>
+            <a:r>
+              <a:rPr lang="en-US" dirty="0"/>
+              <a:t>Final Jeopardy</a:t>
+            </a:r>
+          </a:p>
+        </p:txBody>
+      </p:sp>
+      <p:sp>
+        <p:nvSpPr>
+          <p:cNvPr id="3" name="Content Placeholder 2">
+            <a:extLst>
+              <a:ext uri="{FF2B5EF4-FFF2-40B4-BE49-F238E27FC236}">
+                <a16:creationId xmlns:a16="http://schemas.microsoft.com/office/drawing/2014/main" id="{50E8BFCD-7593-DBBE-819B-B6466D026B5B}"/>
+              </a:ext>
+            </a:extLst>
+          </p:cNvPr>
+          <p:cNvSpPr>
+            <a:spLocks noGrp="1"/>
+          </p:cNvSpPr>
+          <p:nvPr>
+            <p:ph idx="1"/>
+          </p:nvPr>
+        </p:nvSpPr>
+        <p:spPr>
+          <a:xfrm>
+            <a:off x="838200" y="1690688"/>
+            <a:ext cx="10515600" cy="4351338"/>
+          </a:xfrm>
+        </p:spPr>
+        <p:txBody>
+          <a:bodyPr>
+            <a:normAutofit/>
+          </a:bodyPr>
+          <a:lstStyle/>
+          <a:p>
+            <a:pPr marL="0" indent="0">
+              <a:buNone/>
+            </a:pPr>
+            <a:r>
+              <a:rPr lang="en-US" sz="2400" dirty="0"/>
+              <a:t>Let’s say you are conducting a study on the effects of a new medication on platelet count as measured in a complete blood count. You have two groups, one of which receives a placebo and the other of which receives the new medication. Your null hypothesis is that the two groups will have equal mean platelet count; your alternative is that the two groups will have different mean platelet count. </a:t>
+            </a:r>
+          </a:p>
+          <a:p>
+            <a:pPr marL="0" indent="0">
+              <a:buNone/>
+            </a:pPr>
+            <a:r>
+              <a:rPr lang="en-US" sz="2400" dirty="0"/>
+              <a:t>We will assume that the two groups have unequal variance, and the first few rows of your data table (named </a:t>
+            </a:r>
+            <a:r>
+              <a:rPr lang="en-US" sz="2400" dirty="0" err="1"/>
+              <a:t>study_results</a:t>
+            </a:r>
+            <a:r>
+              <a:rPr lang="en-US" sz="2400" dirty="0"/>
+              <a:t>) looks like this:</a:t>
+            </a:r>
+          </a:p>
+        </p:txBody>
+      </p:sp>
+      <p:graphicFrame>
+        <p:nvGraphicFramePr>
+          <p:cNvPr id="5" name="Table 4">
+            <a:extLst>
+              <a:ext uri="{FF2B5EF4-FFF2-40B4-BE49-F238E27FC236}">
+                <a16:creationId xmlns:a16="http://schemas.microsoft.com/office/drawing/2014/main" id="{37D26FD2-0AE4-D5BB-CDDB-14533701A0C2}"/>
+              </a:ext>
+            </a:extLst>
+          </p:cNvPr>
+          <p:cNvGraphicFramePr>
+            <a:graphicFrameLocks noGrp="1"/>
+          </p:cNvGraphicFramePr>
+          <p:nvPr>
+            <p:extLst>
+              <p:ext uri="{D42A27DB-BD31-4B8C-83A1-F6EECF244321}">
+                <p14:modId xmlns:p14="http://schemas.microsoft.com/office/powerpoint/2010/main" val="4076719625"/>
+              </p:ext>
+            </p:extLst>
+          </p:nvPr>
+        </p:nvGraphicFramePr>
+        <p:xfrm>
+          <a:off x="568960" y="4558666"/>
+          <a:ext cx="4043680" cy="1483360"/>
+        </p:xfrm>
+        <a:graphic>
+          <a:graphicData uri="http://schemas.openxmlformats.org/drawingml/2006/table">
+            <a:tbl>
+              <a:tblPr firstRow="1" bandRow="1">
+                <a:tableStyleId>{5C22544A-7EE6-4342-B048-85BDC9FD1C3A}</a:tableStyleId>
+              </a:tblPr>
+              <a:tblGrid>
+                <a:gridCol w="1696720">
+                  <a:extLst>
+                    <a:ext uri="{9D8B030D-6E8A-4147-A177-3AD203B41FA5}">
+                      <a16:colId xmlns:a16="http://schemas.microsoft.com/office/drawing/2014/main" val="262997953"/>
+                    </a:ext>
+                  </a:extLst>
+                </a:gridCol>
+                <a:gridCol w="1259840">
+                  <a:extLst>
+                    <a:ext uri="{9D8B030D-6E8A-4147-A177-3AD203B41FA5}">
+                      <a16:colId xmlns:a16="http://schemas.microsoft.com/office/drawing/2014/main" val="3293070170"/>
+                    </a:ext>
+                  </a:extLst>
+                </a:gridCol>
+                <a:gridCol w="1087120">
+                  <a:extLst>
+                    <a:ext uri="{9D8B030D-6E8A-4147-A177-3AD203B41FA5}">
+                      <a16:colId xmlns:a16="http://schemas.microsoft.com/office/drawing/2014/main" val="2384909865"/>
+                    </a:ext>
+                  </a:extLst>
+                </a:gridCol>
+              </a:tblGrid>
+              <a:tr h="370840">
+                <a:tc>
+                  <a:txBody>
+                    <a:bodyPr/>
+                    <a:lstStyle/>
+                    <a:p>
+                      <a:r>
+                        <a:rPr lang="en-US" dirty="0" err="1"/>
+                        <a:t>Participant_id</a:t>
+                      </a:r>
+                      <a:endParaRPr lang="en-US" dirty="0"/>
+                    </a:p>
+                  </a:txBody>
+                  <a:tcPr/>
+                </a:tc>
+                <a:tc>
+                  <a:txBody>
+                    <a:bodyPr/>
+                    <a:lstStyle/>
+                    <a:p>
+                      <a:r>
+                        <a:rPr lang="en-US" dirty="0"/>
+                        <a:t>group</a:t>
+                      </a:r>
+                    </a:p>
+                  </a:txBody>
+                  <a:tcPr/>
+                </a:tc>
+                <a:tc>
+                  <a:txBody>
+                    <a:bodyPr/>
+                    <a:lstStyle/>
+                    <a:p>
+                      <a:r>
+                        <a:rPr lang="en-US" dirty="0"/>
+                        <a:t>platelet</a:t>
+                      </a:r>
+                    </a:p>
+                  </a:txBody>
+                  <a:tcPr/>
+                </a:tc>
+                <a:extLst>
+                  <a:ext uri="{0D108BD9-81ED-4DB2-BD59-A6C34878D82A}">
+                    <a16:rowId xmlns:a16="http://schemas.microsoft.com/office/drawing/2014/main" val="678948823"/>
+                  </a:ext>
+                </a:extLst>
+              </a:tr>
+              <a:tr h="370840">
+                <a:tc>
+                  <a:txBody>
+                    <a:bodyPr/>
+                    <a:lstStyle/>
+                    <a:p>
+                      <a:r>
+                        <a:rPr lang="en-US" dirty="0"/>
+                        <a:t>1</a:t>
+                      </a:r>
+                    </a:p>
+                  </a:txBody>
+                  <a:tcPr/>
+                </a:tc>
+                <a:tc>
+                  <a:txBody>
+                    <a:bodyPr/>
+                    <a:lstStyle/>
+                    <a:p>
+                      <a:r>
+                        <a:rPr lang="en-US" dirty="0"/>
+                        <a:t>Treatment</a:t>
+                      </a:r>
+                    </a:p>
+                  </a:txBody>
+                  <a:tcPr/>
+                </a:tc>
+                <a:tc>
+                  <a:txBody>
+                    <a:bodyPr/>
+                    <a:lstStyle/>
+                    <a:p>
+                      <a:r>
+                        <a:rPr lang="en-US" dirty="0"/>
+                        <a:t>180</a:t>
+                      </a:r>
+                    </a:p>
+                  </a:txBody>
+                  <a:tcPr/>
+                </a:tc>
+                <a:extLst>
+                  <a:ext uri="{0D108BD9-81ED-4DB2-BD59-A6C34878D82A}">
+                    <a16:rowId xmlns:a16="http://schemas.microsoft.com/office/drawing/2014/main" val="3348493373"/>
+                  </a:ext>
+                </a:extLst>
+              </a:tr>
+              <a:tr h="370840">
+                <a:tc>
+                  <a:txBody>
+                    <a:bodyPr/>
+                    <a:lstStyle/>
+                    <a:p>
+                      <a:r>
+                        <a:rPr lang="en-US" dirty="0"/>
+                        <a:t>2</a:t>
+                      </a:r>
+                    </a:p>
+                  </a:txBody>
+                  <a:tcPr/>
+                </a:tc>
+                <a:tc>
+                  <a:txBody>
+                    <a:bodyPr/>
+                    <a:lstStyle/>
+                    <a:p>
+                      <a:r>
+                        <a:rPr lang="en-US" dirty="0"/>
+                        <a:t>Placebo</a:t>
+                      </a:r>
+                    </a:p>
+                  </a:txBody>
+                  <a:tcPr/>
+                </a:tc>
+                <a:tc>
+                  <a:txBody>
+                    <a:bodyPr/>
+                    <a:lstStyle/>
+                    <a:p>
+                      <a:r>
+                        <a:rPr lang="en-US" dirty="0"/>
+                        <a:t>140</a:t>
+                      </a:r>
+                    </a:p>
+                  </a:txBody>
+                  <a:tcPr/>
+                </a:tc>
+                <a:extLst>
+                  <a:ext uri="{0D108BD9-81ED-4DB2-BD59-A6C34878D82A}">
+                    <a16:rowId xmlns:a16="http://schemas.microsoft.com/office/drawing/2014/main" val="257108487"/>
+                  </a:ext>
+                </a:extLst>
+              </a:tr>
+              <a:tr h="370840">
+                <a:tc>
+                  <a:txBody>
+                    <a:bodyPr/>
+                    <a:lstStyle/>
+                    <a:p>
+                      <a:r>
+                        <a:rPr lang="en-US" dirty="0"/>
+                        <a:t>3</a:t>
+                      </a:r>
+                    </a:p>
+                  </a:txBody>
+                  <a:tcPr/>
+                </a:tc>
+                <a:tc>
+                  <a:txBody>
+                    <a:bodyPr/>
+                    <a:lstStyle/>
+                    <a:p>
+                      <a:r>
+                        <a:rPr lang="en-US" dirty="0"/>
+                        <a:t>Placebo</a:t>
+                      </a:r>
+                    </a:p>
+                  </a:txBody>
+                  <a:tcPr/>
+                </a:tc>
+                <a:tc>
+                  <a:txBody>
+                    <a:bodyPr/>
+                    <a:lstStyle/>
+                    <a:p>
+                      <a:r>
+                        <a:rPr lang="en-US" dirty="0"/>
+                        <a:t>125</a:t>
+                      </a:r>
+                    </a:p>
+                  </a:txBody>
+                  <a:tcPr/>
+                </a:tc>
+                <a:extLst>
+                  <a:ext uri="{0D108BD9-81ED-4DB2-BD59-A6C34878D82A}">
+                    <a16:rowId xmlns:a16="http://schemas.microsoft.com/office/drawing/2014/main" val="1906159351"/>
+                  </a:ext>
+                </a:extLst>
+              </a:tr>
+            </a:tbl>
+          </a:graphicData>
+        </a:graphic>
+      </p:graphicFrame>
+      <p:sp>
+        <p:nvSpPr>
+          <p:cNvPr id="6" name="TextBox 5">
+            <a:extLst>
+              <a:ext uri="{FF2B5EF4-FFF2-40B4-BE49-F238E27FC236}">
+                <a16:creationId xmlns:a16="http://schemas.microsoft.com/office/drawing/2014/main" id="{CAA6B12D-BB8B-F6FF-41B6-459E59BD3FE0}"/>
+              </a:ext>
+            </a:extLst>
+          </p:cNvPr>
+          <p:cNvSpPr txBox="1"/>
+          <p:nvPr/>
+        </p:nvSpPr>
+        <p:spPr>
+          <a:xfrm>
+            <a:off x="5130800" y="4654015"/>
+            <a:ext cx="5354320" cy="1631216"/>
+          </a:xfrm>
+          <a:prstGeom prst="rect">
+            <a:avLst/>
+          </a:prstGeom>
+          <a:noFill/>
+        </p:spPr>
+        <p:txBody>
+          <a:bodyPr wrap="square" rtlCol="0">
+            <a:spAutoFit/>
+          </a:bodyPr>
+          <a:lstStyle/>
+          <a:p>
+            <a:r>
+              <a:rPr lang="en-US" sz="2000" dirty="0"/>
+              <a:t>What would you enter in R to conduct a two-sample t-test for this study?</a:t>
+            </a:r>
+          </a:p>
+          <a:p>
+            <a:endParaRPr lang="en-US" sz="2000" dirty="0"/>
+          </a:p>
+          <a:p>
+            <a:r>
+              <a:rPr lang="en-US" sz="2000" dirty="0"/>
+              <a:t>What is the precise definition of the p-value from your test in this scenario?</a:t>
+            </a:r>
+          </a:p>
+        </p:txBody>
+      </p:sp>
+    </p:spTree>
+    <p:extLst>
+      <p:ext uri="{BB962C8B-B14F-4D97-AF65-F5344CB8AC3E}">
+        <p14:creationId xmlns:p14="http://schemas.microsoft.com/office/powerpoint/2010/main" val="4183720322"/>
+      </p:ext>
+    </p:extLst>
+  </p:cSld>
+  <p:clrMapOvr>
+    <a:masterClrMapping/>
+  </p:clrMapOvr>
+</p:sld>
+</file>
+
+<file path=ppt/slides/slide72.xml><?xml version="1.0" encoding="utf-8"?>
+<p:sld xmlns:a="http://schemas.openxmlformats.org/drawingml/2006/main" xmlns:r="http://schemas.openxmlformats.org/officeDocument/2006/relationships" xmlns:p="http://schemas.openxmlformats.org/presentationml/2006/main">
+  <p:cSld>
+    <p:spTree>
+      <p:nvGrpSpPr>
+        <p:cNvPr id="1" name=""/>
+        <p:cNvGrpSpPr/>
+        <p:nvPr/>
+      </p:nvGrpSpPr>
+      <p:grpSpPr>
+        <a:xfrm>
+          <a:off x="0" y="0"/>
+          <a:ext cx="0" cy="0"/>
+          <a:chOff x="0" y="0"/>
+          <a:chExt cx="0" cy="0"/>
+        </a:xfrm>
+      </p:grpSpPr>
+    </p:spTree>
+    <p:extLst>
+      <p:ext uri="{BB962C8B-B14F-4D97-AF65-F5344CB8AC3E}">
+        <p14:creationId xmlns:p14="http://schemas.microsoft.com/office/powerpoint/2010/main" val="1498042792"/>
+      </p:ext>
+    </p:extLst>
+  </p:cSld>
+  <p:clrMapOvr>
+    <a:masterClrMapping/>
+  </p:clrMapOvr>
+</p:sld>
+</file>
+
+<file path=ppt/slides/slide73.xml><?xml version="1.0" encoding="utf-8"?>
+<p:sld xmlns:a="http://schemas.openxmlformats.org/drawingml/2006/main" xmlns:r="http://schemas.openxmlformats.org/officeDocument/2006/relationships" xmlns:p="http://schemas.openxmlformats.org/presentationml/2006/main">
+  <p:cSld>
+    <p:spTree>
+      <p:nvGrpSpPr>
+        <p:cNvPr id="1" name=""/>
+        <p:cNvGrpSpPr/>
+        <p:nvPr/>
+      </p:nvGrpSpPr>
+      <p:grpSpPr>
+        <a:xfrm>
+          <a:off x="0" y="0"/>
+          <a:ext cx="0" cy="0"/>
+          <a:chOff x="0" y="0"/>
+          <a:chExt cx="0" cy="0"/>
+        </a:xfrm>
+      </p:grpSpPr>
+      <p:sp>
+        <p:nvSpPr>
+          <p:cNvPr id="2" name="Title 1">
+            <a:extLst>
+              <a:ext uri="{FF2B5EF4-FFF2-40B4-BE49-F238E27FC236}">
+                <a16:creationId xmlns:a16="http://schemas.microsoft.com/office/drawing/2014/main" id="{756A0409-5167-078C-F696-E4DA686161F2}"/>
+              </a:ext>
+            </a:extLst>
+          </p:cNvPr>
+          <p:cNvSpPr>
+            <a:spLocks noGrp="1"/>
+          </p:cNvSpPr>
+          <p:nvPr>
+            <p:ph type="title"/>
+          </p:nvPr>
+        </p:nvSpPr>
+        <p:spPr/>
+        <p:txBody>
+          <a:bodyPr/>
+          <a:lstStyle/>
+          <a:p>
+            <a:endParaRPr lang="en-US" dirty="0"/>
+          </a:p>
+        </p:txBody>
+      </p:sp>
+      <p:sp>
+        <p:nvSpPr>
+          <p:cNvPr id="3" name="Text Placeholder 2">
+            <a:extLst>
+              <a:ext uri="{FF2B5EF4-FFF2-40B4-BE49-F238E27FC236}">
+                <a16:creationId xmlns:a16="http://schemas.microsoft.com/office/drawing/2014/main" id="{F7E95FA9-2E52-CDDF-1D0A-D4FB66B9B5C7}"/>
+              </a:ext>
+            </a:extLst>
+          </p:cNvPr>
+          <p:cNvSpPr>
+            <a:spLocks noGrp="1"/>
+          </p:cNvSpPr>
+          <p:nvPr>
+            <p:ph type="body" idx="1"/>
+          </p:nvPr>
+        </p:nvSpPr>
+        <p:spPr/>
+        <p:txBody>
+          <a:bodyPr/>
+          <a:lstStyle/>
+          <a:p>
+            <a:endParaRPr lang="en-US"/>
+          </a:p>
+        </p:txBody>
+      </p:sp>
+    </p:spTree>
+    <p:extLst>
+      <p:ext uri="{BB962C8B-B14F-4D97-AF65-F5344CB8AC3E}">
+        <p14:creationId xmlns:p14="http://schemas.microsoft.com/office/powerpoint/2010/main" val="1417457770"/>
+      </p:ext>
+    </p:extLst>
+  </p:cSld>
+  <p:clrMapOvr>
+    <a:masterClrMapping/>
+  </p:clrMapOvr>
+</p:sld>
+</file>
+
+<file path=ppt/slides/slide8.xml><?xml version="1.0" encoding="utf-8"?>
 <p:sld xmlns:a="http://schemas.openxmlformats.org/drawingml/2006/main" xmlns:r="http://schemas.openxmlformats.org/officeDocument/2006/relationships" xmlns:p="http://schemas.openxmlformats.org/presentationml/2006/main">
   <p:cSld>
     <p:spTree>
@@ -10772,7 +11486,7 @@
 </p:sld>
 </file>
 
-<file path=ppt/slides/slide70.xml><?xml version="1.0" encoding="utf-8"?>
+<file path=ppt/slides/slide9.xml><?xml version="1.0" encoding="utf-8"?>
 <p:sld xmlns:a="http://schemas.openxmlformats.org/drawingml/2006/main" xmlns:r="http://schemas.openxmlformats.org/officeDocument/2006/relationships" xmlns:p="http://schemas.openxmlformats.org/presentationml/2006/main">
   <p:cSld>
     <p:spTree>
@@ -10794,515 +11508,6 @@
           <p:cNvPr id="2" name="Title 1">
             <a:extLst>
               <a:ext uri="{FF2B5EF4-FFF2-40B4-BE49-F238E27FC236}">
-                <a16:creationId xmlns:a16="http://schemas.microsoft.com/office/drawing/2014/main" id="{CA9FBF47-04B4-17D9-0C0E-BDA1939D2022}"/>
-              </a:ext>
-            </a:extLst>
-          </p:cNvPr>
-          <p:cNvSpPr>
-            <a:spLocks noGrp="1"/>
-          </p:cNvSpPr>
-          <p:nvPr>
-            <p:ph type="title"/>
-          </p:nvPr>
-        </p:nvSpPr>
-        <p:spPr/>
-        <p:txBody>
-          <a:bodyPr/>
-          <a:lstStyle/>
-          <a:p>
-            <a:r>
-              <a:rPr lang="en-US" dirty="0"/>
-              <a:t>Final Jeopardy</a:t>
-            </a:r>
-          </a:p>
-        </p:txBody>
-      </p:sp>
-      <p:sp>
-        <p:nvSpPr>
-          <p:cNvPr id="3" name="Content Placeholder 2">
-            <a:extLst>
-              <a:ext uri="{FF2B5EF4-FFF2-40B4-BE49-F238E27FC236}">
-                <a16:creationId xmlns:a16="http://schemas.microsoft.com/office/drawing/2014/main" id="{50E8BFCD-7593-DBBE-819B-B6466D026B5B}"/>
-              </a:ext>
-            </a:extLst>
-          </p:cNvPr>
-          <p:cNvSpPr>
-            <a:spLocks noGrp="1"/>
-          </p:cNvSpPr>
-          <p:nvPr>
-            <p:ph idx="1"/>
-          </p:nvPr>
-        </p:nvSpPr>
-        <p:spPr>
-          <a:xfrm>
-            <a:off x="838200" y="1690688"/>
-            <a:ext cx="10515600" cy="4351338"/>
-          </a:xfrm>
-        </p:spPr>
-        <p:txBody>
-          <a:bodyPr>
-            <a:normAutofit/>
-          </a:bodyPr>
-          <a:lstStyle/>
-          <a:p>
-            <a:pPr marL="0" indent="0">
-              <a:buNone/>
-            </a:pPr>
-            <a:r>
-              <a:rPr lang="en-US" sz="2400" dirty="0"/>
-              <a:t>Let’s say you are conducting a study on the effects of a new medication on platelet count as measured in a complete blood count. You have two groups, one of which receives a placebo and the other of which receives the new medication. Your null hypothesis is that the two groups will have equal mean platelet count; your alternative is that the two groups will have different mean platelet count. </a:t>
-            </a:r>
-          </a:p>
-          <a:p>
-            <a:pPr marL="0" indent="0">
-              <a:buNone/>
-            </a:pPr>
-            <a:r>
-              <a:rPr lang="en-US" sz="2400" dirty="0"/>
-              <a:t>We will assume that the two groups have unequal variance, and the first few rows of your data table (named </a:t>
-            </a:r>
-            <a:r>
-              <a:rPr lang="en-US" sz="2400" dirty="0" err="1"/>
-              <a:t>study_results</a:t>
-            </a:r>
-            <a:r>
-              <a:rPr lang="en-US" sz="2400" dirty="0"/>
-              <a:t>) looks like this:</a:t>
-            </a:r>
-          </a:p>
-        </p:txBody>
-      </p:sp>
-      <p:graphicFrame>
-        <p:nvGraphicFramePr>
-          <p:cNvPr id="5" name="Table 4">
-            <a:extLst>
-              <a:ext uri="{FF2B5EF4-FFF2-40B4-BE49-F238E27FC236}">
-                <a16:creationId xmlns:a16="http://schemas.microsoft.com/office/drawing/2014/main" id="{37D26FD2-0AE4-D5BB-CDDB-14533701A0C2}"/>
-              </a:ext>
-            </a:extLst>
-          </p:cNvPr>
-          <p:cNvGraphicFramePr>
-            <a:graphicFrameLocks noGrp="1"/>
-          </p:cNvGraphicFramePr>
-          <p:nvPr>
-            <p:extLst>
-              <p:ext uri="{D42A27DB-BD31-4B8C-83A1-F6EECF244321}">
-                <p14:modId xmlns:p14="http://schemas.microsoft.com/office/powerpoint/2010/main" val="4076719625"/>
-              </p:ext>
-            </p:extLst>
-          </p:nvPr>
-        </p:nvGraphicFramePr>
-        <p:xfrm>
-          <a:off x="568960" y="4558666"/>
-          <a:ext cx="4043680" cy="1483360"/>
-        </p:xfrm>
-        <a:graphic>
-          <a:graphicData uri="http://schemas.openxmlformats.org/drawingml/2006/table">
-            <a:tbl>
-              <a:tblPr firstRow="1" bandRow="1">
-                <a:tableStyleId>{5C22544A-7EE6-4342-B048-85BDC9FD1C3A}</a:tableStyleId>
-              </a:tblPr>
-              <a:tblGrid>
-                <a:gridCol w="1696720">
-                  <a:extLst>
-                    <a:ext uri="{9D8B030D-6E8A-4147-A177-3AD203B41FA5}">
-                      <a16:colId xmlns:a16="http://schemas.microsoft.com/office/drawing/2014/main" val="262997953"/>
-                    </a:ext>
-                  </a:extLst>
-                </a:gridCol>
-                <a:gridCol w="1259840">
-                  <a:extLst>
-                    <a:ext uri="{9D8B030D-6E8A-4147-A177-3AD203B41FA5}">
-                      <a16:colId xmlns:a16="http://schemas.microsoft.com/office/drawing/2014/main" val="3293070170"/>
-                    </a:ext>
-                  </a:extLst>
-                </a:gridCol>
-                <a:gridCol w="1087120">
-                  <a:extLst>
-                    <a:ext uri="{9D8B030D-6E8A-4147-A177-3AD203B41FA5}">
-                      <a16:colId xmlns:a16="http://schemas.microsoft.com/office/drawing/2014/main" val="2384909865"/>
-                    </a:ext>
-                  </a:extLst>
-                </a:gridCol>
-              </a:tblGrid>
-              <a:tr h="370840">
-                <a:tc>
-                  <a:txBody>
-                    <a:bodyPr/>
-                    <a:lstStyle/>
-                    <a:p>
-                      <a:r>
-                        <a:rPr lang="en-US" dirty="0" err="1"/>
-                        <a:t>Participant_id</a:t>
-                      </a:r>
-                      <a:endParaRPr lang="en-US" dirty="0"/>
-                    </a:p>
-                  </a:txBody>
-                  <a:tcPr/>
-                </a:tc>
-                <a:tc>
-                  <a:txBody>
-                    <a:bodyPr/>
-                    <a:lstStyle/>
-                    <a:p>
-                      <a:r>
-                        <a:rPr lang="en-US" dirty="0"/>
-                        <a:t>group</a:t>
-                      </a:r>
-                    </a:p>
-                  </a:txBody>
-                  <a:tcPr/>
-                </a:tc>
-                <a:tc>
-                  <a:txBody>
-                    <a:bodyPr/>
-                    <a:lstStyle/>
-                    <a:p>
-                      <a:r>
-                        <a:rPr lang="en-US" dirty="0"/>
-                        <a:t>platelet</a:t>
-                      </a:r>
-                    </a:p>
-                  </a:txBody>
-                  <a:tcPr/>
-                </a:tc>
-                <a:extLst>
-                  <a:ext uri="{0D108BD9-81ED-4DB2-BD59-A6C34878D82A}">
-                    <a16:rowId xmlns:a16="http://schemas.microsoft.com/office/drawing/2014/main" val="678948823"/>
-                  </a:ext>
-                </a:extLst>
-              </a:tr>
-              <a:tr h="370840">
-                <a:tc>
-                  <a:txBody>
-                    <a:bodyPr/>
-                    <a:lstStyle/>
-                    <a:p>
-                      <a:r>
-                        <a:rPr lang="en-US" dirty="0"/>
-                        <a:t>1</a:t>
-                      </a:r>
-                    </a:p>
-                  </a:txBody>
-                  <a:tcPr/>
-                </a:tc>
-                <a:tc>
-                  <a:txBody>
-                    <a:bodyPr/>
-                    <a:lstStyle/>
-                    <a:p>
-                      <a:r>
-                        <a:rPr lang="en-US" dirty="0"/>
-                        <a:t>Treatment</a:t>
-                      </a:r>
-                    </a:p>
-                  </a:txBody>
-                  <a:tcPr/>
-                </a:tc>
-                <a:tc>
-                  <a:txBody>
-                    <a:bodyPr/>
-                    <a:lstStyle/>
-                    <a:p>
-                      <a:r>
-                        <a:rPr lang="en-US" dirty="0"/>
-                        <a:t>180</a:t>
-                      </a:r>
-                    </a:p>
-                  </a:txBody>
-                  <a:tcPr/>
-                </a:tc>
-                <a:extLst>
-                  <a:ext uri="{0D108BD9-81ED-4DB2-BD59-A6C34878D82A}">
-                    <a16:rowId xmlns:a16="http://schemas.microsoft.com/office/drawing/2014/main" val="3348493373"/>
-                  </a:ext>
-                </a:extLst>
-              </a:tr>
-              <a:tr h="370840">
-                <a:tc>
-                  <a:txBody>
-                    <a:bodyPr/>
-                    <a:lstStyle/>
-                    <a:p>
-                      <a:r>
-                        <a:rPr lang="en-US" dirty="0"/>
-                        <a:t>2</a:t>
-                      </a:r>
-                    </a:p>
-                  </a:txBody>
-                  <a:tcPr/>
-                </a:tc>
-                <a:tc>
-                  <a:txBody>
-                    <a:bodyPr/>
-                    <a:lstStyle/>
-                    <a:p>
-                      <a:r>
-                        <a:rPr lang="en-US" dirty="0"/>
-                        <a:t>Placebo</a:t>
-                      </a:r>
-                    </a:p>
-                  </a:txBody>
-                  <a:tcPr/>
-                </a:tc>
-                <a:tc>
-                  <a:txBody>
-                    <a:bodyPr/>
-                    <a:lstStyle/>
-                    <a:p>
-                      <a:r>
-                        <a:rPr lang="en-US" dirty="0"/>
-                        <a:t>140</a:t>
-                      </a:r>
-                    </a:p>
-                  </a:txBody>
-                  <a:tcPr/>
-                </a:tc>
-                <a:extLst>
-                  <a:ext uri="{0D108BD9-81ED-4DB2-BD59-A6C34878D82A}">
-                    <a16:rowId xmlns:a16="http://schemas.microsoft.com/office/drawing/2014/main" val="257108487"/>
-                  </a:ext>
-                </a:extLst>
-              </a:tr>
-              <a:tr h="370840">
-                <a:tc>
-                  <a:txBody>
-                    <a:bodyPr/>
-                    <a:lstStyle/>
-                    <a:p>
-                      <a:r>
-                        <a:rPr lang="en-US" dirty="0"/>
-                        <a:t>3</a:t>
-                      </a:r>
-                    </a:p>
-                  </a:txBody>
-                  <a:tcPr/>
-                </a:tc>
-                <a:tc>
-                  <a:txBody>
-                    <a:bodyPr/>
-                    <a:lstStyle/>
-                    <a:p>
-                      <a:r>
-                        <a:rPr lang="en-US" dirty="0"/>
-                        <a:t>Placebo</a:t>
-                      </a:r>
-                    </a:p>
-                  </a:txBody>
-                  <a:tcPr/>
-                </a:tc>
-                <a:tc>
-                  <a:txBody>
-                    <a:bodyPr/>
-                    <a:lstStyle/>
-                    <a:p>
-                      <a:r>
-                        <a:rPr lang="en-US" dirty="0"/>
-                        <a:t>125</a:t>
-                      </a:r>
-                    </a:p>
-                  </a:txBody>
-                  <a:tcPr/>
-                </a:tc>
-                <a:extLst>
-                  <a:ext uri="{0D108BD9-81ED-4DB2-BD59-A6C34878D82A}">
-                    <a16:rowId xmlns:a16="http://schemas.microsoft.com/office/drawing/2014/main" val="1906159351"/>
-                  </a:ext>
-                </a:extLst>
-              </a:tr>
-            </a:tbl>
-          </a:graphicData>
-        </a:graphic>
-      </p:graphicFrame>
-      <p:sp>
-        <p:nvSpPr>
-          <p:cNvPr id="6" name="TextBox 5">
-            <a:extLst>
-              <a:ext uri="{FF2B5EF4-FFF2-40B4-BE49-F238E27FC236}">
-                <a16:creationId xmlns:a16="http://schemas.microsoft.com/office/drawing/2014/main" id="{CAA6B12D-BB8B-F6FF-41B6-459E59BD3FE0}"/>
-              </a:ext>
-            </a:extLst>
-          </p:cNvPr>
-          <p:cNvSpPr txBox="1"/>
-          <p:nvPr/>
-        </p:nvSpPr>
-        <p:spPr>
-          <a:xfrm>
-            <a:off x="5130800" y="4654015"/>
-            <a:ext cx="5354320" cy="1631216"/>
-          </a:xfrm>
-          <a:prstGeom prst="rect">
-            <a:avLst/>
-          </a:prstGeom>
-          <a:noFill/>
-        </p:spPr>
-        <p:txBody>
-          <a:bodyPr wrap="square" rtlCol="0">
-            <a:spAutoFit/>
-          </a:bodyPr>
-          <a:lstStyle/>
-          <a:p>
-            <a:r>
-              <a:rPr lang="en-US" sz="2000" dirty="0"/>
-              <a:t>What would you enter in R to conduct a two-sample t-test for this study?</a:t>
-            </a:r>
-          </a:p>
-          <a:p>
-            <a:endParaRPr lang="en-US" sz="2000" dirty="0"/>
-          </a:p>
-          <a:p>
-            <a:r>
-              <a:rPr lang="en-US" sz="2000" dirty="0"/>
-              <a:t>What is the precise definition of the p-value from your test in this scenario?</a:t>
-            </a:r>
-          </a:p>
-        </p:txBody>
-      </p:sp>
-    </p:spTree>
-    <p:extLst>
-      <p:ext uri="{BB962C8B-B14F-4D97-AF65-F5344CB8AC3E}">
-        <p14:creationId xmlns:p14="http://schemas.microsoft.com/office/powerpoint/2010/main" val="4183720322"/>
-      </p:ext>
-    </p:extLst>
-  </p:cSld>
-  <p:clrMapOvr>
-    <a:masterClrMapping/>
-  </p:clrMapOvr>
-</p:sld>
-</file>
-
-<file path=ppt/slides/slide71.xml><?xml version="1.0" encoding="utf-8"?>
-<p:sld xmlns:a="http://schemas.openxmlformats.org/drawingml/2006/main" xmlns:r="http://schemas.openxmlformats.org/officeDocument/2006/relationships" xmlns:p="http://schemas.openxmlformats.org/presentationml/2006/main">
-  <p:cSld>
-    <p:spTree>
-      <p:nvGrpSpPr>
-        <p:cNvPr id="1" name=""/>
-        <p:cNvGrpSpPr/>
-        <p:nvPr/>
-      </p:nvGrpSpPr>
-      <p:grpSpPr>
-        <a:xfrm>
-          <a:off x="0" y="0"/>
-          <a:ext cx="0" cy="0"/>
-          <a:chOff x="0" y="0"/>
-          <a:chExt cx="0" cy="0"/>
-        </a:xfrm>
-      </p:grpSpPr>
-    </p:spTree>
-    <p:extLst>
-      <p:ext uri="{BB962C8B-B14F-4D97-AF65-F5344CB8AC3E}">
-        <p14:creationId xmlns:p14="http://schemas.microsoft.com/office/powerpoint/2010/main" val="1498042792"/>
-      </p:ext>
-    </p:extLst>
-  </p:cSld>
-  <p:clrMapOvr>
-    <a:masterClrMapping/>
-  </p:clrMapOvr>
-</p:sld>
-</file>
-
-<file path=ppt/slides/slide72.xml><?xml version="1.0" encoding="utf-8"?>
-<p:sld xmlns:a="http://schemas.openxmlformats.org/drawingml/2006/main" xmlns:r="http://schemas.openxmlformats.org/officeDocument/2006/relationships" xmlns:p="http://schemas.openxmlformats.org/presentationml/2006/main">
-  <p:cSld>
-    <p:spTree>
-      <p:nvGrpSpPr>
-        <p:cNvPr id="1" name=""/>
-        <p:cNvGrpSpPr/>
-        <p:nvPr/>
-      </p:nvGrpSpPr>
-      <p:grpSpPr>
-        <a:xfrm>
-          <a:off x="0" y="0"/>
-          <a:ext cx="0" cy="0"/>
-          <a:chOff x="0" y="0"/>
-          <a:chExt cx="0" cy="0"/>
-        </a:xfrm>
-      </p:grpSpPr>
-      <p:sp>
-        <p:nvSpPr>
-          <p:cNvPr id="2" name="Title 1">
-            <a:extLst>
-              <a:ext uri="{FF2B5EF4-FFF2-40B4-BE49-F238E27FC236}">
-                <a16:creationId xmlns:a16="http://schemas.microsoft.com/office/drawing/2014/main" id="{756A0409-5167-078C-F696-E4DA686161F2}"/>
-              </a:ext>
-            </a:extLst>
-          </p:cNvPr>
-          <p:cNvSpPr>
-            <a:spLocks noGrp="1"/>
-          </p:cNvSpPr>
-          <p:nvPr>
-            <p:ph type="title"/>
-          </p:nvPr>
-        </p:nvSpPr>
-        <p:spPr/>
-        <p:txBody>
-          <a:bodyPr/>
-          <a:lstStyle/>
-          <a:p>
-            <a:endParaRPr lang="en-US" dirty="0"/>
-          </a:p>
-        </p:txBody>
-      </p:sp>
-      <p:sp>
-        <p:nvSpPr>
-          <p:cNvPr id="3" name="Text Placeholder 2">
-            <a:extLst>
-              <a:ext uri="{FF2B5EF4-FFF2-40B4-BE49-F238E27FC236}">
-                <a16:creationId xmlns:a16="http://schemas.microsoft.com/office/drawing/2014/main" id="{F7E95FA9-2E52-CDDF-1D0A-D4FB66B9B5C7}"/>
-              </a:ext>
-            </a:extLst>
-          </p:cNvPr>
-          <p:cNvSpPr>
-            <a:spLocks noGrp="1"/>
-          </p:cNvSpPr>
-          <p:nvPr>
-            <p:ph type="body" idx="1"/>
-          </p:nvPr>
-        </p:nvSpPr>
-        <p:spPr/>
-        <p:txBody>
-          <a:bodyPr/>
-          <a:lstStyle/>
-          <a:p>
-            <a:endParaRPr lang="en-US"/>
-          </a:p>
-        </p:txBody>
-      </p:sp>
-    </p:spTree>
-    <p:extLst>
-      <p:ext uri="{BB962C8B-B14F-4D97-AF65-F5344CB8AC3E}">
-        <p14:creationId xmlns:p14="http://schemas.microsoft.com/office/powerpoint/2010/main" val="1417457770"/>
-      </p:ext>
-    </p:extLst>
-  </p:cSld>
-  <p:clrMapOvr>
-    <a:masterClrMapping/>
-  </p:clrMapOvr>
-</p:sld>
-</file>
-
-<file path=ppt/slides/slide8.xml><?xml version="1.0" encoding="utf-8"?>
-<p:sld xmlns:a="http://schemas.openxmlformats.org/drawingml/2006/main" xmlns:r="http://schemas.openxmlformats.org/officeDocument/2006/relationships" xmlns:p="http://schemas.openxmlformats.org/presentationml/2006/main">
-  <p:cSld>
-    <p:spTree>
-      <p:nvGrpSpPr>
-        <p:cNvPr id="1" name=""/>
-        <p:cNvGrpSpPr/>
-        <p:nvPr/>
-      </p:nvGrpSpPr>
-      <p:grpSpPr>
-        <a:xfrm>
-          <a:off x="0" y="0"/>
-          <a:ext cx="0" cy="0"/>
-          <a:chOff x="0" y="0"/>
-          <a:chExt cx="0" cy="0"/>
-        </a:xfrm>
-      </p:grpSpPr>
-      <p:sp>
-        <p:nvSpPr>
-          <p:cNvPr id="2" name="Title 1">
-            <a:extLst>
-              <a:ext uri="{FF2B5EF4-FFF2-40B4-BE49-F238E27FC236}">
                 <a16:creationId xmlns:a16="http://schemas.microsoft.com/office/drawing/2014/main" id="{6F3242D9-CB3D-39A1-A989-F8178DCC59A9}"/>
               </a:ext>
             </a:extLst>
@@ -11363,108 +11568,6 @@
     <p:extLst>
       <p:ext uri="{BB962C8B-B14F-4D97-AF65-F5344CB8AC3E}">
         <p14:creationId xmlns:p14="http://schemas.microsoft.com/office/powerpoint/2010/main" val="3645156210"/>
-      </p:ext>
-    </p:extLst>
-  </p:cSld>
-  <p:clrMapOvr>
-    <a:masterClrMapping/>
-  </p:clrMapOvr>
-</p:sld>
-</file>
-
-<file path=ppt/slides/slide9.xml><?xml version="1.0" encoding="utf-8"?>
-<p:sld xmlns:a="http://schemas.openxmlformats.org/drawingml/2006/main" xmlns:r="http://schemas.openxmlformats.org/officeDocument/2006/relationships" xmlns:p="http://schemas.openxmlformats.org/presentationml/2006/main">
-  <p:cSld>
-    <p:spTree>
-      <p:nvGrpSpPr>
-        <p:cNvPr id="1" name="">
-          <a:extLst>
-            <a:ext uri="{FF2B5EF4-FFF2-40B4-BE49-F238E27FC236}">
-              <a16:creationId xmlns:a16="http://schemas.microsoft.com/office/drawing/2014/main" id="{5F9D0B6F-51A1-0511-0E27-F06942A3EFC2}"/>
-            </a:ext>
-          </a:extLst>
-        </p:cNvPr>
-        <p:cNvGrpSpPr/>
-        <p:nvPr/>
-      </p:nvGrpSpPr>
-      <p:grpSpPr>
-        <a:xfrm>
-          <a:off x="0" y="0"/>
-          <a:ext cx="0" cy="0"/>
-          <a:chOff x="0" y="0"/>
-          <a:chExt cx="0" cy="0"/>
-        </a:xfrm>
-      </p:grpSpPr>
-      <p:sp>
-        <p:nvSpPr>
-          <p:cNvPr id="2" name="Title 1">
-            <a:extLst>
-              <a:ext uri="{FF2B5EF4-FFF2-40B4-BE49-F238E27FC236}">
-                <a16:creationId xmlns:a16="http://schemas.microsoft.com/office/drawing/2014/main" id="{1BA6AEAA-4681-C74B-8214-02F118E0AF56}"/>
-              </a:ext>
-            </a:extLst>
-          </p:cNvPr>
-          <p:cNvSpPr>
-            <a:spLocks noGrp="1"/>
-          </p:cNvSpPr>
-          <p:nvPr>
-            <p:ph type="title"/>
-          </p:nvPr>
-        </p:nvSpPr>
-        <p:spPr/>
-        <p:txBody>
-          <a:bodyPr/>
-          <a:lstStyle/>
-          <a:p>
-            <a:endParaRPr lang="en-US" dirty="0"/>
-          </a:p>
-        </p:txBody>
-      </p:sp>
-      <p:sp>
-        <p:nvSpPr>
-          <p:cNvPr id="3" name="Content Placeholder 2">
-            <a:extLst>
-              <a:ext uri="{FF2B5EF4-FFF2-40B4-BE49-F238E27FC236}">
-                <a16:creationId xmlns:a16="http://schemas.microsoft.com/office/drawing/2014/main" id="{29CA39D1-B7ED-B7FE-30F8-F246D7630AFF}"/>
-              </a:ext>
-            </a:extLst>
-          </p:cNvPr>
-          <p:cNvSpPr>
-            <a:spLocks noGrp="1"/>
-          </p:cNvSpPr>
-          <p:nvPr>
-            <p:ph idx="1"/>
-          </p:nvPr>
-        </p:nvSpPr>
-        <p:spPr/>
-        <p:txBody>
-          <a:bodyPr>
-            <a:normAutofit/>
-          </a:bodyPr>
-          <a:lstStyle/>
-          <a:p>
-            <a:pPr marL="0" indent="0" algn="ctr" fontAlgn="ctr">
-              <a:buNone/>
-            </a:pPr>
-            <a:r>
-              <a:rPr lang="en-US" sz="4400" b="1" dirty="0"/>
-              <a:t>What is </a:t>
-            </a:r>
-            <a:r>
-              <a:rPr lang="en-US" sz="4400" b="1" dirty="0" err="1"/>
-              <a:t>qnorm</a:t>
-            </a:r>
-            <a:r>
-              <a:rPr lang="en-US" sz="4400" b="1" dirty="0"/>
-              <a:t>()?</a:t>
-            </a:r>
-          </a:p>
-        </p:txBody>
-      </p:sp>
-    </p:spTree>
-    <p:extLst>
-      <p:ext uri="{BB962C8B-B14F-4D97-AF65-F5344CB8AC3E}">
-        <p14:creationId xmlns:p14="http://schemas.microsoft.com/office/powerpoint/2010/main" val="1893961312"/>
       </p:ext>
     </p:extLst>
   </p:cSld>

--- a/exam/exam-02/Exam2_Jeopardy.pptx
+++ b/exam/exam-02/Exam2_Jeopardy.pptx
@@ -331,7 +331,7 @@
           <a:p>
             <a:fld id="{C86B8AC5-964B-8C48-8528-DE848C3F2F85}" type="datetimeFigureOut">
               <a:rPr lang="en-US" smtClean="0"/>
-              <a:t>7/14/26</a:t>
+              <a:t>7/15/26</a:t>
             </a:fld>
             <a:endParaRPr lang="en-US"/>
           </a:p>
@@ -529,7 +529,7 @@
           <a:p>
             <a:fld id="{C86B8AC5-964B-8C48-8528-DE848C3F2F85}" type="datetimeFigureOut">
               <a:rPr lang="en-US" smtClean="0"/>
-              <a:t>7/14/26</a:t>
+              <a:t>7/15/26</a:t>
             </a:fld>
             <a:endParaRPr lang="en-US"/>
           </a:p>
@@ -737,7 +737,7 @@
           <a:p>
             <a:fld id="{C86B8AC5-964B-8C48-8528-DE848C3F2F85}" type="datetimeFigureOut">
               <a:rPr lang="en-US" smtClean="0"/>
-              <a:t>7/14/26</a:t>
+              <a:t>7/15/26</a:t>
             </a:fld>
             <a:endParaRPr lang="en-US"/>
           </a:p>
@@ -935,7 +935,7 @@
           <a:p>
             <a:fld id="{C86B8AC5-964B-8C48-8528-DE848C3F2F85}" type="datetimeFigureOut">
               <a:rPr lang="en-US" smtClean="0"/>
-              <a:t>7/14/26</a:t>
+              <a:t>7/15/26</a:t>
             </a:fld>
             <a:endParaRPr lang="en-US"/>
           </a:p>
@@ -1210,7 +1210,7 @@
           <a:p>
             <a:fld id="{C86B8AC5-964B-8C48-8528-DE848C3F2F85}" type="datetimeFigureOut">
               <a:rPr lang="en-US" smtClean="0"/>
-              <a:t>7/14/26</a:t>
+              <a:t>7/15/26</a:t>
             </a:fld>
             <a:endParaRPr lang="en-US"/>
           </a:p>
@@ -1475,7 +1475,7 @@
           <a:p>
             <a:fld id="{C86B8AC5-964B-8C48-8528-DE848C3F2F85}" type="datetimeFigureOut">
               <a:rPr lang="en-US" smtClean="0"/>
-              <a:t>7/14/26</a:t>
+              <a:t>7/15/26</a:t>
             </a:fld>
             <a:endParaRPr lang="en-US"/>
           </a:p>
@@ -1887,7 +1887,7 @@
           <a:p>
             <a:fld id="{C86B8AC5-964B-8C48-8528-DE848C3F2F85}" type="datetimeFigureOut">
               <a:rPr lang="en-US" smtClean="0"/>
-              <a:t>7/14/26</a:t>
+              <a:t>7/15/26</a:t>
             </a:fld>
             <a:endParaRPr lang="en-US"/>
           </a:p>
@@ -2028,7 +2028,7 @@
           <a:p>
             <a:fld id="{C86B8AC5-964B-8C48-8528-DE848C3F2F85}" type="datetimeFigureOut">
               <a:rPr lang="en-US" smtClean="0"/>
-              <a:t>7/14/26</a:t>
+              <a:t>7/15/26</a:t>
             </a:fld>
             <a:endParaRPr lang="en-US"/>
           </a:p>
@@ -2141,7 +2141,7 @@
           <a:p>
             <a:fld id="{C86B8AC5-964B-8C48-8528-DE848C3F2F85}" type="datetimeFigureOut">
               <a:rPr lang="en-US" smtClean="0"/>
-              <a:t>7/14/26</a:t>
+              <a:t>7/15/26</a:t>
             </a:fld>
             <a:endParaRPr lang="en-US"/>
           </a:p>
@@ -2452,7 +2452,7 @@
           <a:p>
             <a:fld id="{C86B8AC5-964B-8C48-8528-DE848C3F2F85}" type="datetimeFigureOut">
               <a:rPr lang="en-US" smtClean="0"/>
-              <a:t>7/14/26</a:t>
+              <a:t>7/15/26</a:t>
             </a:fld>
             <a:endParaRPr lang="en-US"/>
           </a:p>
@@ -2740,7 +2740,7 @@
           <a:p>
             <a:fld id="{C86B8AC5-964B-8C48-8528-DE848C3F2F85}" type="datetimeFigureOut">
               <a:rPr lang="en-US" smtClean="0"/>
-              <a:t>7/14/26</a:t>
+              <a:t>7/15/26</a:t>
             </a:fld>
             <a:endParaRPr lang="en-US"/>
           </a:p>
@@ -2987,7 +2987,7 @@
           <a:p>
             <a:fld id="{C86B8AC5-964B-8C48-8528-DE848C3F2F85}" type="datetimeFigureOut">
               <a:rPr lang="en-US" smtClean="0"/>
-              <a:t>7/14/26</a:t>
+              <a:t>7/15/26</a:t>
             </a:fld>
             <a:endParaRPr lang="en-US"/>
           </a:p>
@@ -3955,12 +3955,17 @@
             </a:r>
             <a:r>
               <a:rPr lang="en-US" sz="4400" b="1" dirty="0" err="1"/>
-              <a:t>drop_geometry_st</a:t>
-            </a:r>
-            <a:r>
-              <a:rPr lang="en-US" sz="4400" b="1" dirty="0"/>
-              <a:t>()?</a:t>
-            </a:r>
+              <a:t>st_drop</a:t>
+            </a:r>
+            <a:r>
+              <a:rPr lang="en-US" sz="4400" b="1" err="1"/>
+              <a:t>_</a:t>
+            </a:r>
+            <a:r>
+              <a:rPr lang="en-US" sz="4400" b="1"/>
+              <a:t>geometry()?</a:t>
+            </a:r>
+            <a:endParaRPr lang="en-US" sz="4400" b="1" dirty="0"/>
           </a:p>
         </p:txBody>
       </p:sp>
@@ -4460,7 +4465,10 @@
             <a:pPr marL="0" indent="0" fontAlgn="ctr">
               <a:buNone/>
             </a:pPr>
-            <a:endParaRPr lang="en-US" sz="4400" dirty="0"/>
+            <a:r>
+              <a:rPr lang="en-US" sz="4400" dirty="0"/>
+              <a:t>This is the degrees of freedom of the distribution for the test statistic in a one-sample t-test on with n = 95.</a:t>
+            </a:r>
           </a:p>
         </p:txBody>
       </p:sp>
@@ -4653,7 +4661,10 @@
             <a:pPr marL="0" indent="0" algn="ctr" fontAlgn="ctr">
               <a:buNone/>
             </a:pPr>
-            <a:endParaRPr lang="en-US" sz="4400" b="1" dirty="0"/>
+            <a:r>
+              <a:rPr lang="en-US" sz="4400" b="1" dirty="0"/>
+              <a:t>What is 94?</a:t>
+            </a:r>
           </a:p>
         </p:txBody>
       </p:sp>
